--- a/entregas-agosto26/apresentacao-prospeccao-agosto26.pptx
+++ b/entregas-agosto26/apresentacao-prospeccao-agosto26.pptx
@@ -4225,9 +4225,9 @@
                 <a:solidFill>
                   <a:srgbClr val="DAFF94"/>
                 </a:solidFill>
-                <a:latin typeface="Cambria" pitchFamily="34" charset="0"/>
-                <a:ea typeface="Cambria" pitchFamily="34" charset="-122"/>
-                <a:cs typeface="Cambria" pitchFamily="34" charset="-120"/>
+                <a:latin typeface="Libre Baskerville" pitchFamily="34" charset="0"/>
+                <a:ea typeface="Libre Baskerville" pitchFamily="34" charset="-122"/>
+                <a:cs typeface="Libre Baskerville" pitchFamily="34" charset="-120"/>
               </a:rPr>
               <a:t>Inteligência de mercado a serviço da sua marca.</a:t>
             </a:r>
@@ -4264,9 +4264,9 @@
                 <a:solidFill>
                   <a:srgbClr val="888888"/>
                 </a:solidFill>
-                <a:latin typeface="Courier New" pitchFamily="34" charset="0"/>
-                <a:ea typeface="Courier New" pitchFamily="34" charset="-122"/>
-                <a:cs typeface="Courier New" pitchFamily="34" charset="-120"/>
+                <a:latin typeface="JetBrains Mono" pitchFamily="34" charset="0"/>
+                <a:ea typeface="JetBrains Mono" pitchFamily="34" charset="-122"/>
+                <a:cs typeface="JetBrains Mono" pitchFamily="34" charset="-120"/>
               </a:rPr>
               <a:t>apresentação de prospecção _ agosto_26</a:t>
             </a:r>
@@ -6831,9 +6831,9 @@
                 <a:solidFill>
                   <a:srgbClr val="FFFFFF"/>
                 </a:solidFill>
-                <a:latin typeface="Cambria" pitchFamily="34" charset="0"/>
-                <a:ea typeface="Cambria" pitchFamily="34" charset="-122"/>
-                <a:cs typeface="Cambria" pitchFamily="34" charset="-120"/>
+                <a:latin typeface="Libre Baskerville" pitchFamily="34" charset="0"/>
+                <a:ea typeface="Libre Baskerville" pitchFamily="34" charset="-122"/>
+                <a:cs typeface="Libre Baskerville" pitchFamily="34" charset="-120"/>
               </a:rPr>
               <a:t>Vamos conversar sobre o que</a:t>
             </a:r>
@@ -6848,9 +6848,9 @@
                 <a:solidFill>
                   <a:srgbClr val="FFFFFF"/>
                 </a:solidFill>
-                <a:latin typeface="Cambria" pitchFamily="34" charset="0"/>
-                <a:ea typeface="Cambria" pitchFamily="34" charset="-122"/>
-                <a:cs typeface="Cambria" pitchFamily="34" charset="-120"/>
+                <a:latin typeface="Libre Baskerville" pitchFamily="34" charset="0"/>
+                <a:ea typeface="Libre Baskerville" pitchFamily="34" charset="-122"/>
+                <a:cs typeface="Libre Baskerville" pitchFamily="34" charset="-120"/>
               </a:rPr>
               <a:t>essas tendências significam</a:t>
             </a:r>
@@ -6865,9 +6865,9 @@
                 <a:solidFill>
                   <a:srgbClr val="FFFFFF"/>
                 </a:solidFill>
-                <a:latin typeface="Cambria" pitchFamily="34" charset="0"/>
-                <a:ea typeface="Cambria" pitchFamily="34" charset="-122"/>
-                <a:cs typeface="Cambria" pitchFamily="34" charset="-120"/>
+                <a:latin typeface="Libre Baskerville" pitchFamily="34" charset="0"/>
+                <a:ea typeface="Libre Baskerville" pitchFamily="34" charset="-122"/>
+                <a:cs typeface="Libre Baskerville" pitchFamily="34" charset="-120"/>
               </a:rPr>
               <a:t>pra sua marca?</a:t>
             </a:r>
@@ -6904,9 +6904,9 @@
                 <a:solidFill>
                   <a:srgbClr val="DAFF94"/>
                 </a:solidFill>
-                <a:latin typeface="Courier New" pitchFamily="34" charset="0"/>
-                <a:ea typeface="Courier New" pitchFamily="34" charset="-122"/>
-                <a:cs typeface="Courier New" pitchFamily="34" charset="-120"/>
+                <a:latin typeface="JetBrains Mono" pitchFamily="34" charset="0"/>
+                <a:ea typeface="JetBrains Mono" pitchFamily="34" charset="-122"/>
+                <a:cs typeface="JetBrains Mono" pitchFamily="34" charset="-120"/>
               </a:rPr>
               <a:t>[ contato@ / site / whatsapp — preencher ]</a:t>
             </a:r>
@@ -6999,9 +6999,9 @@
                 <a:solidFill>
                   <a:srgbClr val="DAFF94"/>
                 </a:solidFill>
-                <a:latin typeface="Courier New" pitchFamily="34" charset="0"/>
-                <a:ea typeface="Courier New" pitchFamily="34" charset="-122"/>
-                <a:cs typeface="Courier New" pitchFamily="34" charset="-120"/>
+                <a:latin typeface="JetBrains Mono" pitchFamily="34" charset="0"/>
+                <a:ea typeface="JetBrains Mono" pitchFamily="34" charset="-122"/>
+                <a:cs typeface="JetBrains Mono" pitchFamily="34" charset="-120"/>
               </a:rPr>
               <a:t>O PONTO DE PARTIDA</a:t>
             </a:r>
@@ -7038,9 +7038,9 @@
                 <a:solidFill>
                   <a:srgbClr val="FFFFFF"/>
                 </a:solidFill>
-                <a:latin typeface="Cambria" pitchFamily="34" charset="0"/>
-                <a:ea typeface="Cambria" pitchFamily="34" charset="-122"/>
-                <a:cs typeface="Cambria" pitchFamily="34" charset="-120"/>
+                <a:latin typeface="Libre Baskerville" pitchFamily="34" charset="0"/>
+                <a:ea typeface="Libre Baskerville" pitchFamily="34" charset="-122"/>
+                <a:cs typeface="Libre Baskerville" pitchFamily="34" charset="-120"/>
               </a:rPr>
               <a:t>O mercado não para de mudar.</a:t>
             </a:r>
@@ -7055,9 +7055,9 @@
                 <a:solidFill>
                   <a:srgbClr val="FFFFFF"/>
                 </a:solidFill>
-                <a:latin typeface="Cambria" pitchFamily="34" charset="0"/>
-                <a:ea typeface="Cambria" pitchFamily="34" charset="-122"/>
-                <a:cs typeface="Cambria" pitchFamily="34" charset="-120"/>
+                <a:latin typeface="Libre Baskerville" pitchFamily="34" charset="0"/>
+                <a:ea typeface="Libre Baskerville" pitchFamily="34" charset="-122"/>
+                <a:cs typeface="Libre Baskerville" pitchFamily="34" charset="-120"/>
               </a:rPr>
               <a:t>A sua marca está lendo isso em tempo real?</a:t>
             </a:r>
@@ -7121,9 +7121,9 @@
                 <a:solidFill>
                   <a:srgbClr val="DAFF94"/>
                 </a:solidFill>
-                <a:latin typeface="Cambria" pitchFamily="34" charset="0"/>
-                <a:ea typeface="Cambria" pitchFamily="34" charset="-122"/>
-                <a:cs typeface="Cambria" pitchFamily="34" charset="-120"/>
+                <a:latin typeface="Libre Baskerville" pitchFamily="34" charset="0"/>
+                <a:ea typeface="Libre Baskerville" pitchFamily="34" charset="-122"/>
+                <a:cs typeface="Libre Baskerville" pitchFamily="34" charset="-120"/>
               </a:rPr>
               <a:t>200%</a:t>
             </a:r>
@@ -7226,9 +7226,9 @@
                 <a:solidFill>
                   <a:srgbClr val="DAFF94"/>
                 </a:solidFill>
-                <a:latin typeface="Cambria" pitchFamily="34" charset="0"/>
-                <a:ea typeface="Cambria" pitchFamily="34" charset="-122"/>
-                <a:cs typeface="Cambria" pitchFamily="34" charset="-120"/>
+                <a:latin typeface="Libre Baskerville" pitchFamily="34" charset="0"/>
+                <a:ea typeface="Libre Baskerville" pitchFamily="34" charset="-122"/>
+                <a:cs typeface="Libre Baskerville" pitchFamily="34" charset="-120"/>
               </a:rPr>
               <a:t>40%</a:t>
             </a:r>
@@ -7331,9 +7331,9 @@
                 <a:solidFill>
                   <a:srgbClr val="DAFF94"/>
                 </a:solidFill>
-                <a:latin typeface="Cambria" pitchFamily="34" charset="0"/>
-                <a:ea typeface="Cambria" pitchFamily="34" charset="-122"/>
-                <a:cs typeface="Cambria" pitchFamily="34" charset="-120"/>
+                <a:latin typeface="Libre Baskerville" pitchFamily="34" charset="0"/>
+                <a:ea typeface="Libre Baskerville" pitchFamily="34" charset="-122"/>
+                <a:cs typeface="Libre Baskerville" pitchFamily="34" charset="-120"/>
               </a:rPr>
               <a:t>64%</a:t>
             </a:r>
@@ -7409,9 +7409,9 @@
                 <a:solidFill>
                   <a:srgbClr val="666666"/>
                 </a:solidFill>
-                <a:latin typeface="Courier New" pitchFamily="34" charset="0"/>
-                <a:ea typeface="Courier New" pitchFamily="34" charset="-122"/>
-                <a:cs typeface="Courier New" pitchFamily="34" charset="-120"/>
+                <a:latin typeface="JetBrains Mono" pitchFamily="34" charset="0"/>
+                <a:ea typeface="JetBrains Mono" pitchFamily="34" charset="-122"/>
+                <a:cs typeface="JetBrains Mono" pitchFamily="34" charset="-120"/>
               </a:rPr>
               <a:t>fonte: Sales Force, Opinion Box, Estadão — .report agosto_26</a:t>
             </a:r>
@@ -7480,9 +7480,9 @@
                 <a:solidFill>
                   <a:srgbClr val="000000"/>
                 </a:solidFill>
-                <a:latin typeface="Courier New" pitchFamily="34" charset="0"/>
-                <a:ea typeface="Courier New" pitchFamily="34" charset="-122"/>
-                <a:cs typeface="Courier New" pitchFamily="34" charset="-120"/>
+                <a:latin typeface="JetBrains Mono" pitchFamily="34" charset="0"/>
+                <a:ea typeface="JetBrains Mono" pitchFamily="34" charset="-122"/>
+                <a:cs typeface="JetBrains Mono" pitchFamily="34" charset="-120"/>
               </a:rPr>
               <a:t>report↗</a:t>
             </a:r>
@@ -7519,9 +7519,9 @@
                 <a:solidFill>
                   <a:srgbClr val="000000"/>
                 </a:solidFill>
-                <a:latin typeface="Cambria" pitchFamily="34" charset="0"/>
-                <a:ea typeface="Cambria" pitchFamily="34" charset="-122"/>
-                <a:cs typeface="Cambria" pitchFamily="34" charset="-120"/>
+                <a:latin typeface="Libre Baskerville" pitchFamily="34" charset="0"/>
+                <a:ea typeface="Libre Baskerville" pitchFamily="34" charset="-122"/>
+                <a:cs typeface="Libre Baskerville" pitchFamily="34" charset="-120"/>
               </a:rPr>
               <a:t>arpejo</a:t>
             </a:r>
@@ -7558,9 +7558,9 @@
                 <a:solidFill>
                   <a:srgbClr val="000000"/>
                 </a:solidFill>
-                <a:latin typeface="Courier New" pitchFamily="34" charset="0"/>
-                <a:ea typeface="Courier New" pitchFamily="34" charset="-122"/>
-                <a:cs typeface="Courier New" pitchFamily="34" charset="-120"/>
+                <a:latin typeface="JetBrains Mono" pitchFamily="34" charset="0"/>
+                <a:ea typeface="JetBrains Mono" pitchFamily="34" charset="-122"/>
+                <a:cs typeface="JetBrains Mono" pitchFamily="34" charset="-120"/>
               </a:rPr>
               <a:t>agosto_26</a:t>
             </a:r>
@@ -7619,9 +7619,9 @@
                 <a:solidFill>
                   <a:srgbClr val="000000"/>
                 </a:solidFill>
-                <a:latin typeface="Cambria" pitchFamily="34" charset="0"/>
-                <a:ea typeface="Cambria" pitchFamily="34" charset="-122"/>
-                <a:cs typeface="Cambria" pitchFamily="34" charset="-120"/>
+                <a:latin typeface="Libre Baskerville" pitchFamily="34" charset="0"/>
+                <a:ea typeface="Libre Baskerville" pitchFamily="34" charset="-122"/>
+                <a:cs typeface="Libre Baskerville" pitchFamily="34" charset="-120"/>
               </a:rPr>
               <a:t>IA</a:t>
             </a:r>
@@ -7781,9 +7781,9 @@
                 <a:solidFill>
                   <a:srgbClr val="DAFF94"/>
                 </a:solidFill>
-                <a:latin typeface="Cambria" pitchFamily="34" charset="0"/>
-                <a:ea typeface="Cambria" pitchFamily="34" charset="-122"/>
-                <a:cs typeface="Cambria" pitchFamily="34" charset="-120"/>
+                <a:latin typeface="Libre Baskerville" pitchFamily="34" charset="0"/>
+                <a:ea typeface="Libre Baskerville" pitchFamily="34" charset="-122"/>
+                <a:cs typeface="Libre Baskerville" pitchFamily="34" charset="-120"/>
               </a:rPr>
               <a:t>O que isso significa</a:t>
             </a:r>
@@ -7798,9 +7798,9 @@
                 <a:solidFill>
                   <a:srgbClr val="DAFF94"/>
                 </a:solidFill>
-                <a:latin typeface="Cambria" pitchFamily="34" charset="0"/>
-                <a:ea typeface="Cambria" pitchFamily="34" charset="-122"/>
-                <a:cs typeface="Cambria" pitchFamily="34" charset="-120"/>
+                <a:latin typeface="Libre Baskerville" pitchFamily="34" charset="0"/>
+                <a:ea typeface="Libre Baskerville" pitchFamily="34" charset="-122"/>
+                <a:cs typeface="Libre Baskerville" pitchFamily="34" charset="-120"/>
               </a:rPr>
               <a:t>pra sua marca:</a:t>
             </a:r>
@@ -7947,9 +7947,9 @@
                 <a:solidFill>
                   <a:srgbClr val="DAFF94"/>
                 </a:solidFill>
-                <a:latin typeface="Courier New" pitchFamily="34" charset="0"/>
-                <a:ea typeface="Courier New" pitchFamily="34" charset="-122"/>
-                <a:cs typeface="Courier New" pitchFamily="34" charset="-120"/>
+                <a:latin typeface="JetBrains Mono" pitchFamily="34" charset="0"/>
+                <a:ea typeface="JetBrains Mono" pitchFamily="34" charset="-122"/>
+                <a:cs typeface="JetBrains Mono" pitchFamily="34" charset="-120"/>
               </a:rPr>
               <a:t>report↗</a:t>
             </a:r>
@@ -7986,9 +7986,9 @@
                 <a:solidFill>
                   <a:srgbClr val="DAFF94"/>
                 </a:solidFill>
-                <a:latin typeface="Cambria" pitchFamily="34" charset="0"/>
-                <a:ea typeface="Cambria" pitchFamily="34" charset="-122"/>
-                <a:cs typeface="Cambria" pitchFamily="34" charset="-120"/>
+                <a:latin typeface="Libre Baskerville" pitchFamily="34" charset="0"/>
+                <a:ea typeface="Libre Baskerville" pitchFamily="34" charset="-122"/>
+                <a:cs typeface="Libre Baskerville" pitchFamily="34" charset="-120"/>
               </a:rPr>
               <a:t>arpejo</a:t>
             </a:r>
@@ -8025,9 +8025,9 @@
                 <a:solidFill>
                   <a:srgbClr val="DAFF94"/>
                 </a:solidFill>
-                <a:latin typeface="Courier New" pitchFamily="34" charset="0"/>
-                <a:ea typeface="Courier New" pitchFamily="34" charset="-122"/>
-                <a:cs typeface="Courier New" pitchFamily="34" charset="-120"/>
+                <a:latin typeface="JetBrains Mono" pitchFamily="34" charset="0"/>
+                <a:ea typeface="JetBrains Mono" pitchFamily="34" charset="-122"/>
+                <a:cs typeface="JetBrains Mono" pitchFamily="34" charset="-120"/>
               </a:rPr>
               <a:t>agosto_26</a:t>
             </a:r>
@@ -8086,9 +8086,9 @@
                 <a:solidFill>
                   <a:srgbClr val="000000"/>
                 </a:solidFill>
-                <a:latin typeface="Cambria" pitchFamily="34" charset="0"/>
-                <a:ea typeface="Cambria" pitchFamily="34" charset="-122"/>
-                <a:cs typeface="Cambria" pitchFamily="34" charset="-120"/>
+                <a:latin typeface="Libre Baskerville" pitchFamily="34" charset="0"/>
+                <a:ea typeface="Libre Baskerville" pitchFamily="34" charset="-122"/>
+                <a:cs typeface="Libre Baskerville" pitchFamily="34" charset="-120"/>
               </a:rPr>
               <a:t>HIPER-</a:t>
             </a:r>
@@ -8103,9 +8103,9 @@
                 <a:solidFill>
                   <a:srgbClr val="000000"/>
                 </a:solidFill>
-                <a:latin typeface="Cambria" pitchFamily="34" charset="0"/>
-                <a:ea typeface="Cambria" pitchFamily="34" charset="-122"/>
-                <a:cs typeface="Cambria" pitchFamily="34" charset="-120"/>
+                <a:latin typeface="Libre Baskerville" pitchFamily="34" charset="0"/>
+                <a:ea typeface="Libre Baskerville" pitchFamily="34" charset="-122"/>
+                <a:cs typeface="Libre Baskerville" pitchFamily="34" charset="-120"/>
               </a:rPr>
               <a:t>REALIDADE</a:t>
             </a:r>
@@ -8142,9 +8142,9 @@
                 <a:solidFill>
                   <a:srgbClr val="222222"/>
                 </a:solidFill>
-                <a:latin typeface="Cambria" pitchFamily="34" charset="0"/>
-                <a:ea typeface="Cambria" pitchFamily="34" charset="-122"/>
-                <a:cs typeface="Cambria" pitchFamily="34" charset="-120"/>
+                <a:latin typeface="Libre Baskerville" pitchFamily="34" charset="0"/>
+                <a:ea typeface="Libre Baskerville" pitchFamily="34" charset="-122"/>
+                <a:cs typeface="Libre Baskerville" pitchFamily="34" charset="-120"/>
               </a:rPr>
               <a:t>Na hiper-realidade, online ou offline, o que conta é a experiência.</a:t>
             </a:r>
@@ -8369,9 +8369,9 @@
                 <a:solidFill>
                   <a:srgbClr val="DAFF94"/>
                 </a:solidFill>
-                <a:latin typeface="Courier New" pitchFamily="34" charset="0"/>
-                <a:ea typeface="Courier New" pitchFamily="34" charset="-122"/>
-                <a:cs typeface="Courier New" pitchFamily="34" charset="-120"/>
+                <a:latin typeface="JetBrains Mono" pitchFamily="34" charset="0"/>
+                <a:ea typeface="JetBrains Mono" pitchFamily="34" charset="-122"/>
+                <a:cs typeface="JetBrains Mono" pitchFamily="34" charset="-120"/>
               </a:rPr>
               <a:t>QUEM SOMOS</a:t>
             </a:r>
@@ -8408,9 +8408,9 @@
                 <a:solidFill>
                   <a:srgbClr val="DAFF94"/>
                 </a:solidFill>
-                <a:latin typeface="Cambria" pitchFamily="34" charset="0"/>
-                <a:ea typeface="Cambria" pitchFamily="34" charset="-122"/>
-                <a:cs typeface="Cambria" pitchFamily="34" charset="-120"/>
+                <a:latin typeface="Libre Baskerville" pitchFamily="34" charset="0"/>
+                <a:ea typeface="Libre Baskerville" pitchFamily="34" charset="-122"/>
+                <a:cs typeface="Libre Baskerville" pitchFamily="34" charset="-120"/>
               </a:rPr>
               <a:t>[ Adicionar aqui o posicionamento oficial da Arpejo — quem</a:t>
             </a:r>
@@ -8425,9 +8425,9 @@
                 <a:solidFill>
                   <a:srgbClr val="DAFF94"/>
                 </a:solidFill>
-                <a:latin typeface="Cambria" pitchFamily="34" charset="0"/>
-                <a:ea typeface="Cambria" pitchFamily="34" charset="-122"/>
-                <a:cs typeface="Cambria" pitchFamily="34" charset="-120"/>
+                <a:latin typeface="Libre Baskerville" pitchFamily="34" charset="0"/>
+                <a:ea typeface="Libre Baskerville" pitchFamily="34" charset="-122"/>
+                <a:cs typeface="Libre Baskerville" pitchFamily="34" charset="-120"/>
               </a:rPr>
               <a:t>vocês são, para quem trabalham e o que os diferencia. ]</a:t>
             </a:r>
@@ -8535,9 +8535,9 @@
                 <a:solidFill>
                   <a:srgbClr val="DAFF94"/>
                 </a:solidFill>
-                <a:latin typeface="Courier New" pitchFamily="34" charset="0"/>
-                <a:ea typeface="Courier New" pitchFamily="34" charset="-122"/>
-                <a:cs typeface="Courier New" pitchFamily="34" charset="-120"/>
+                <a:latin typeface="JetBrains Mono" pitchFamily="34" charset="0"/>
+                <a:ea typeface="JetBrains Mono" pitchFamily="34" charset="-122"/>
+                <a:cs typeface="JetBrains Mono" pitchFamily="34" charset="-120"/>
               </a:rPr>
               <a:t>O QUE FAZEMOS</a:t>
             </a:r>
@@ -11249,9 +11249,9 @@
                 <a:solidFill>
                   <a:srgbClr val="DAFF94"/>
                 </a:solidFill>
-                <a:latin typeface="Courier New" pitchFamily="34" charset="0"/>
-                <a:ea typeface="Courier New" pitchFamily="34" charset="-122"/>
-                <a:cs typeface="Courier New" pitchFamily="34" charset="-120"/>
+                <a:latin typeface="JetBrains Mono" pitchFamily="34" charset="0"/>
+                <a:ea typeface="JetBrains Mono" pitchFamily="34" charset="-122"/>
+                <a:cs typeface="JetBrains Mono" pitchFamily="34" charset="-120"/>
               </a:rPr>
               <a:t>PROVA — O QUE FIZEMOS ESSE MÊS</a:t>
             </a:r>
@@ -11310,9 +11310,9 @@
                 <a:solidFill>
                   <a:srgbClr val="FFFFFF"/>
                 </a:solidFill>
-                <a:latin typeface="Cambria" pitchFamily="34" charset="0"/>
-                <a:ea typeface="Cambria" pitchFamily="34" charset="-122"/>
-                <a:cs typeface="Cambria" pitchFamily="34" charset="-120"/>
+                <a:latin typeface="Libre Baskerville" pitchFamily="34" charset="0"/>
+                <a:ea typeface="Libre Baskerville" pitchFamily="34" charset="-122"/>
+                <a:cs typeface="Libre Baskerville" pitchFamily="34" charset="-120"/>
               </a:rPr>
               <a:t>PagueVeloz — Dia dos Pais</a:t>
             </a:r>
@@ -11371,9 +11371,9 @@
                 <a:solidFill>
                   <a:srgbClr val="DAFF94"/>
                 </a:solidFill>
-                <a:latin typeface="Cambria" pitchFamily="34" charset="0"/>
-                <a:ea typeface="Cambria" pitchFamily="34" charset="-122"/>
-                <a:cs typeface="Cambria" pitchFamily="34" charset="-120"/>
+                <a:latin typeface="Libre Baskerville" pitchFamily="34" charset="0"/>
+                <a:ea typeface="Libre Baskerville" pitchFamily="34" charset="-122"/>
+                <a:cs typeface="Libre Baskerville" pitchFamily="34" charset="-120"/>
               </a:rPr>
               <a:t>Grupo Equatorial — Dia dos Pais</a:t>
             </a:r>
@@ -11410,9 +11410,9 @@
                 <a:solidFill>
                   <a:srgbClr val="999999"/>
                 </a:solidFill>
-                <a:latin typeface="Courier New" pitchFamily="34" charset="0"/>
-                <a:ea typeface="Courier New" pitchFamily="34" charset="-122"/>
-                <a:cs typeface="Courier New" pitchFamily="34" charset="-120"/>
+                <a:latin typeface="JetBrains Mono" pitchFamily="34" charset="0"/>
+                <a:ea typeface="JetBrains Mono" pitchFamily="34" charset="-122"/>
+                <a:cs typeface="JetBrains Mono" pitchFamily="34" charset="-120"/>
               </a:rPr>
               <a:t>Campanhas de Dia dos Pais assinadas pela Arpejo em agosto/26.</a:t>
             </a:r>
@@ -11481,9 +11481,9 @@
                 <a:solidFill>
                   <a:srgbClr val="000000"/>
                 </a:solidFill>
-                <a:latin typeface="Courier New" pitchFamily="34" charset="0"/>
-                <a:ea typeface="Courier New" pitchFamily="34" charset="-122"/>
-                <a:cs typeface="Courier New" pitchFamily="34" charset="-120"/>
+                <a:latin typeface="JetBrains Mono" pitchFamily="34" charset="0"/>
+                <a:ea typeface="JetBrains Mono" pitchFamily="34" charset="-122"/>
+                <a:cs typeface="JetBrains Mono" pitchFamily="34" charset="-120"/>
               </a:rPr>
               <a:t>report↗</a:t>
             </a:r>
@@ -11520,9 +11520,9 @@
                 <a:solidFill>
                   <a:srgbClr val="000000"/>
                 </a:solidFill>
-                <a:latin typeface="Cambria" pitchFamily="34" charset="0"/>
-                <a:ea typeface="Cambria" pitchFamily="34" charset="-122"/>
-                <a:cs typeface="Cambria" pitchFamily="34" charset="-120"/>
+                <a:latin typeface="Libre Baskerville" pitchFamily="34" charset="0"/>
+                <a:ea typeface="Libre Baskerville" pitchFamily="34" charset="-122"/>
+                <a:cs typeface="Libre Baskerville" pitchFamily="34" charset="-120"/>
               </a:rPr>
               <a:t>arpejo</a:t>
             </a:r>
@@ -11559,9 +11559,9 @@
                 <a:solidFill>
                   <a:srgbClr val="000000"/>
                 </a:solidFill>
-                <a:latin typeface="Courier New" pitchFamily="34" charset="0"/>
-                <a:ea typeface="Courier New" pitchFamily="34" charset="-122"/>
-                <a:cs typeface="Courier New" pitchFamily="34" charset="-120"/>
+                <a:latin typeface="JetBrains Mono" pitchFamily="34" charset="0"/>
+                <a:ea typeface="JetBrains Mono" pitchFamily="34" charset="-122"/>
+                <a:cs typeface="JetBrains Mono" pitchFamily="34" charset="-120"/>
               </a:rPr>
               <a:t>agosto_26</a:t>
             </a:r>
@@ -11598,9 +11598,9 @@
                 <a:solidFill>
                   <a:srgbClr val="000000"/>
                 </a:solidFill>
-                <a:latin typeface="Cambria" pitchFamily="34" charset="0"/>
-                <a:ea typeface="Cambria" pitchFamily="34" charset="-122"/>
-                <a:cs typeface="Cambria" pitchFamily="34" charset="-120"/>
+                <a:latin typeface="Libre Baskerville" pitchFamily="34" charset="0"/>
+                <a:ea typeface="Libre Baskerville" pitchFamily="34" charset="-122"/>
+                <a:cs typeface="Libre Baskerville" pitchFamily="34" charset="-120"/>
               </a:rPr>
               <a:t>O nosso diferencial: inteligência de mercado, todo mês.</a:t>
             </a:r>
@@ -11770,9 +11770,9 @@
                 <a:solidFill>
                   <a:srgbClr val="DAFF94"/>
                 </a:solidFill>
-                <a:latin typeface="Courier New" pitchFamily="34" charset="0"/>
-                <a:ea typeface="Courier New" pitchFamily="34" charset="-122"/>
-                <a:cs typeface="Courier New" pitchFamily="34" charset="-120"/>
+                <a:latin typeface="JetBrains Mono" pitchFamily="34" charset="0"/>
+                <a:ea typeface="JetBrains Mono" pitchFamily="34" charset="-122"/>
+                <a:cs typeface="JetBrains Mono" pitchFamily="34" charset="-120"/>
               </a:rPr>
               <a:t>COMO TRABALHAMOS</a:t>
             </a:r>
@@ -11836,9 +11836,9 @@
                 <a:solidFill>
                   <a:srgbClr val="DAFF94"/>
                 </a:solidFill>
-                <a:latin typeface="Courier New" pitchFamily="34" charset="0"/>
-                <a:ea typeface="Courier New" pitchFamily="34" charset="-122"/>
-                <a:cs typeface="Courier New" pitchFamily="34" charset="-120"/>
+                <a:latin typeface="JetBrains Mono" pitchFamily="34" charset="0"/>
+                <a:ea typeface="JetBrains Mono" pitchFamily="34" charset="-122"/>
+                <a:cs typeface="JetBrains Mono" pitchFamily="34" charset="-120"/>
               </a:rPr>
               <a:t>01</a:t>
             </a:r>
@@ -11941,9 +11941,9 @@
                 <a:solidFill>
                   <a:srgbClr val="DAFF94"/>
                 </a:solidFill>
-                <a:latin typeface="Courier New" pitchFamily="34" charset="0"/>
-                <a:ea typeface="Courier New" pitchFamily="34" charset="-122"/>
-                <a:cs typeface="Courier New" pitchFamily="34" charset="-120"/>
+                <a:latin typeface="JetBrains Mono" pitchFamily="34" charset="0"/>
+                <a:ea typeface="JetBrains Mono" pitchFamily="34" charset="-122"/>
+                <a:cs typeface="JetBrains Mono" pitchFamily="34" charset="-120"/>
               </a:rPr>
               <a:t>02</a:t>
             </a:r>
@@ -12046,9 +12046,9 @@
                 <a:solidFill>
                   <a:srgbClr val="DAFF94"/>
                 </a:solidFill>
-                <a:latin typeface="Courier New" pitchFamily="34" charset="0"/>
-                <a:ea typeface="Courier New" pitchFamily="34" charset="-122"/>
-                <a:cs typeface="Courier New" pitchFamily="34" charset="-120"/>
+                <a:latin typeface="JetBrains Mono" pitchFamily="34" charset="0"/>
+                <a:ea typeface="JetBrains Mono" pitchFamily="34" charset="-122"/>
+                <a:cs typeface="JetBrains Mono" pitchFamily="34" charset="-120"/>
               </a:rPr>
               <a:t>03</a:t>
             </a:r>
@@ -12151,9 +12151,9 @@
                 <a:solidFill>
                   <a:srgbClr val="DAFF94"/>
                 </a:solidFill>
-                <a:latin typeface="Courier New" pitchFamily="34" charset="0"/>
-                <a:ea typeface="Courier New" pitchFamily="34" charset="-122"/>
-                <a:cs typeface="Courier New" pitchFamily="34" charset="-120"/>
+                <a:latin typeface="JetBrains Mono" pitchFamily="34" charset="0"/>
+                <a:ea typeface="JetBrains Mono" pitchFamily="34" charset="-122"/>
+                <a:cs typeface="JetBrains Mono" pitchFamily="34" charset="-120"/>
               </a:rPr>
               <a:t>04</a:t>
             </a:r>

--- a/entregas-agosto26/apresentacao-prospeccao-agosto26.pptx
+++ b/entregas-agosto26/apresentacao-prospeccao-agosto26.pptx
@@ -1,6 +1,6 @@
 
 <file path=ppt/presentation.xml><?xml version="1.0" encoding="utf-8"?>
-<p:presentation xmlns:a="http://schemas.openxmlformats.org/drawingml/2006/main" xmlns:r="http://schemas.openxmlformats.org/officeDocument/2006/relationships" xmlns:p="http://schemas.openxmlformats.org/presentationml/2006/main" saveSubsetFonts="1" autoCompressPictures="0">
+<p:presentation xmlns:a="http://schemas.openxmlformats.org/drawingml/2006/main" xmlns:r="http://schemas.openxmlformats.org/officeDocument/2006/relationships" xmlns:p="http://schemas.openxmlformats.org/presentationml/2006/main" embedTrueTypeFonts="1" saveSubsetFonts="1" autoCompressPictures="0">
   <p:sldMasterIdLst>
     <p:sldMasterId id="2147483648" r:id="rId1"/>
   </p:sldMasterIdLst>
@@ -21,6 +21,36 @@
   </p:notesMasterIdLst>
   <p:sldSz cx="12192000" cy="6858000"/>
   <p:notesSz cx="6858000" cy="12192000"/>
+  <p:embeddedFontLst>
+    <p:embeddedFont>
+      <p:font typeface="JetBrains Mono Medium"/>
+      <p:regular r:id="rId17"/>
+      <p:bold r:id="rId18"/>
+      <p:italic r:id="rId19"/>
+      <p:boldItalic r:id="rId20"/>
+    </p:embeddedFont>
+    <p:embeddedFont>
+      <p:font typeface="Urbanist"/>
+      <p:regular r:id="rId21"/>
+      <p:bold r:id="rId22"/>
+      <p:italic r:id="rId23"/>
+      <p:boldItalic r:id="rId24"/>
+    </p:embeddedFont>
+    <p:embeddedFont>
+      <p:font typeface="Libre Baskerville"/>
+      <p:regular r:id="rId25"/>
+      <p:bold r:id="rId26"/>
+      <p:italic r:id="rId27"/>
+      <p:boldItalic r:id="rId28"/>
+    </p:embeddedFont>
+    <p:embeddedFont>
+      <p:font typeface="Ubuntu Mono"/>
+      <p:regular r:id="rId29"/>
+      <p:bold r:id="rId30"/>
+      <p:italic r:id="rId31"/>
+      <p:boldItalic r:id="rId32"/>
+    </p:embeddedFont>
+  </p:embeddedFontLst>
   <p:defaultTextStyle>
     <a:lvl1pPr marL="0" algn="l" defTabSz="914400" rtl="0" eaLnBrk="1" latinLnBrk="0" hangingPunct="1">
       <a:defRPr sz="1800" kern="1200">

--- a/entregas-agosto26/apresentacao-prospeccao-agosto26.pptx
+++ b/entregas-agosto26/apresentacao-prospeccao-agosto26.pptx
@@ -4223,8 +4223,8 @@
         </p:nvSpPr>
         <p:spPr>
           <a:xfrm>
-            <a:off x="1097280" y="2377440"/>
-            <a:ext cx="4572000" cy="822960"/>
+            <a:off x="548640" y="1280160"/>
+            <a:ext cx="5364328" cy="731520"/>
           </a:xfrm>
           <a:prstGeom prst="ellipse">
             <a:avLst/>
@@ -4245,8 +4245,8 @@
         </p:nvSpPr>
         <p:spPr>
           <a:xfrm>
-            <a:off x="1097280" y="2377440"/>
-            <a:ext cx="4572000" cy="822960"/>
+            <a:off x="548640" y="1280160"/>
+            <a:ext cx="5364328" cy="731520"/>
           </a:xfrm>
           <a:prstGeom prst="rect">
             <a:avLst/>
@@ -4262,7 +4262,7 @@
               <a:buNone/>
             </a:pPr>
             <a:r>
-              <a:rPr lang="en-US" sz="1600" i="1" dirty="0">
+              <a:rPr lang="en-US" sz="1500" i="1" dirty="0">
                 <a:solidFill>
                   <a:srgbClr val="FFFFFF"/>
                 </a:solidFill>
@@ -4272,7 +4272,7 @@
               </a:rPr>
               <a:t>PagueVeloz — Dia dos Pais</a:t>
             </a:r>
-            <a:endParaRPr lang="en-US" sz="1600" dirty="0"/>
+            <a:endParaRPr lang="en-US" sz="1500" dirty="0"/>
           </a:p>
         </p:txBody>
       </p:sp>
@@ -4292,8 +4292,8 @@
         </p:blipFill>
         <p:spPr>
           <a:xfrm>
-            <a:off x="5427330" y="2616098"/>
-            <a:ext cx="345643" cy="345643"/>
+            <a:off x="5697901" y="1492301"/>
+            <a:ext cx="307238" cy="307238"/>
           </a:xfrm>
           <a:prstGeom prst="rect">
             <a:avLst/>
@@ -4302,14 +4302,101 @@
       </p:pic>
       <p:sp>
         <p:nvSpPr>
-          <p:cNvPr id="7" name="Shape 3"/>
-          <p:cNvSpPr/>
-          <p:nvPr/>
-        </p:nvSpPr>
-        <p:spPr>
-          <a:xfrm>
-            <a:off x="6400800" y="3657600"/>
-            <a:ext cx="4754880" cy="822960"/>
+          <p:cNvPr id="7" name="Text 3"/>
+          <p:cNvSpPr/>
+          <p:nvPr/>
+        </p:nvSpPr>
+        <p:spPr>
+          <a:xfrm>
+            <a:off x="548640" y="2286000"/>
+            <a:ext cx="5364328" cy="2103120"/>
+          </a:xfrm>
+          <a:prstGeom prst="rect">
+            <a:avLst/>
+          </a:prstGeom>
+          <a:noFill/>
+          <a:ln/>
+        </p:spPr>
+        <p:txBody>
+          <a:bodyPr wrap="square" lIns="0" tIns="0" rIns="0" bIns="0" rtlCol="0" anchor="ctr"/>
+          <a:lstStyle/>
+          <a:p>
+            <a:pPr indent="0" marL="0">
+              <a:buNone/>
+            </a:pPr>
+            <a:r>
+              <a:rPr lang="en-US" sz="1250" dirty="0">
+                <a:solidFill>
+                  <a:srgbClr val="FFFFFF"/>
+                </a:solidFill>
+                <a:latin typeface="Arial" pitchFamily="34" charset="0"/>
+                <a:ea typeface="Arial" pitchFamily="34" charset="-122"/>
+                <a:cs typeface="Arial" pitchFamily="34" charset="-120"/>
+              </a:rPr>
+              <a:t>“O nome por trás do meu nome”: transformamos fachadas de comércio em homenagens aos pais que apoiaram o sonho de três empreendedores em São Paulo e Campinas.</a:t>
+            </a:r>
+            <a:endParaRPr lang="en-US" sz="1250" dirty="0"/>
+          </a:p>
+        </p:txBody>
+      </p:sp>
+      <p:sp>
+        <p:nvSpPr>
+          <p:cNvPr id="8" name="Text 4">
+            <a:hlinkClick r:id="rId3" tooltip=""/>
+          </p:cNvPr>
+          <p:cNvSpPr/>
+          <p:nvPr/>
+        </p:nvSpPr>
+        <p:spPr>
+          <a:xfrm>
+            <a:off x="548640" y="4572000"/>
+            <a:ext cx="5364328" cy="365760"/>
+          </a:xfrm>
+          <a:prstGeom prst="rect">
+            <a:avLst/>
+          </a:prstGeom>
+          <a:noFill/>
+          <a:ln/>
+        </p:spPr>
+        <p:txBody>
+          <a:bodyPr wrap="square" lIns="0" tIns="0" rIns="0" bIns="0" rtlCol="0" anchor="ctr"/>
+          <a:lstStyle/>
+          <a:p>
+            <a:pPr indent="0" marL="0">
+              <a:buNone/>
+            </a:pPr>
+            <a:r>
+              <a:rPr lang="en-US" sz="1200" b="1" u="sng" dirty="0">
+                <a:solidFill>
+                  <a:srgbClr val="FFFFFF"/>
+                </a:solidFill>
+                <a:latin typeface="JetBrains Mono" pitchFamily="34" charset="0"/>
+                <a:ea typeface="JetBrains Mono" pitchFamily="34" charset="-122"/>
+                <a:cs typeface="JetBrains Mono" pitchFamily="34" charset="-120"/>
+                <a:hlinkClick r:id="rId3" invalidUrl="" action="" tgtFrame="" tooltip="" history="1" highlightClick="0" endSnd="0">
+                  <a:extLst>
+                    <a:ext uri="{A12FA001-AC4F-418D-AE19-62706E023703}">
+                      <ahyp:hlinkClr xmlns:ahyp="http://schemas.microsoft.com/office/drawing/2018/hyperlinkcolor" val="tx"/>
+                    </a:ext>
+                  </a:extLst>
+                </a:hlinkClick>
+              </a:rPr>
+              <a:t>▶ assistir ao case</a:t>
+            </a:r>
+            <a:endParaRPr lang="en-US" sz="1200" dirty="0"/>
+          </a:p>
+        </p:txBody>
+      </p:sp>
+      <p:sp>
+        <p:nvSpPr>
+          <p:cNvPr id="9" name="Shape 5"/>
+          <p:cNvSpPr/>
+          <p:nvPr/>
+        </p:nvSpPr>
+        <p:spPr>
+          <a:xfrm>
+            <a:off x="6278728" y="1280160"/>
+            <a:ext cx="5364328" cy="731520"/>
           </a:xfrm>
           <a:prstGeom prst="ellipse">
             <a:avLst/>
@@ -4324,14 +4411,14 @@
       </p:sp>
       <p:sp>
         <p:nvSpPr>
-          <p:cNvPr id="8" name="Text 4"/>
-          <p:cNvSpPr/>
-          <p:nvPr/>
-        </p:nvSpPr>
-        <p:spPr>
-          <a:xfrm>
-            <a:off x="6400800" y="3657600"/>
-            <a:ext cx="4754880" cy="822960"/>
+          <p:cNvPr id="10" name="Text 6"/>
+          <p:cNvSpPr/>
+          <p:nvPr/>
+        </p:nvSpPr>
+        <p:spPr>
+          <a:xfrm>
+            <a:off x="6278728" y="1280160"/>
+            <a:ext cx="5364328" cy="731520"/>
           </a:xfrm>
           <a:prstGeom prst="rect">
             <a:avLst/>
@@ -4347,7 +4434,7 @@
               <a:buNone/>
             </a:pPr>
             <a:r>
-              <a:rPr lang="en-US" sz="1600" i="1" dirty="0">
+              <a:rPr lang="en-US" sz="1500" i="1" dirty="0">
                 <a:solidFill>
                   <a:srgbClr val="DAFF94"/>
                 </a:solidFill>
@@ -4357,28 +4444,28 @@
               </a:rPr>
               <a:t>Grupo Equatorial — Dia dos Pais</a:t>
             </a:r>
-            <a:endParaRPr lang="en-US" sz="1600" dirty="0"/>
+            <a:endParaRPr lang="en-US" sz="1500" dirty="0"/>
           </a:p>
         </p:txBody>
       </p:sp>
       <p:pic>
         <p:nvPicPr>
-          <p:cNvPr id="9" name="Image 2" descr="/home/user/data-manipulation-exercises/.claude/skills/brand-guidelines/assets/textures/globe-lime.png">    </p:cNvPr>
+          <p:cNvPr id="11" name="Image 2" descr="/home/user/data-manipulation-exercises/.claude/skills/brand-guidelines/assets/textures/globe-lime.png">    </p:cNvPr>
           <p:cNvPicPr>
             <a:picLocks noChangeAspect="1"/>
           </p:cNvPicPr>
           <p:nvPr/>
         </p:nvPicPr>
         <p:blipFill>
-          <a:blip r:embed="rId3"/>
+          <a:blip r:embed="rId4"/>
           <a:stretch>
             <a:fillRect/>
           </a:stretch>
         </p:blipFill>
         <p:spPr>
           <a:xfrm>
-            <a:off x="10913730" y="3896258"/>
-            <a:ext cx="345643" cy="345643"/>
+            <a:off x="11427988" y="1492301"/>
+            <a:ext cx="307238" cy="307238"/>
           </a:xfrm>
           <a:prstGeom prst="rect">
             <a:avLst/>
@@ -4387,14 +4474,14 @@
       </p:pic>
       <p:sp>
         <p:nvSpPr>
-          <p:cNvPr id="10" name="Text 5"/>
-          <p:cNvSpPr/>
-          <p:nvPr/>
-        </p:nvSpPr>
-        <p:spPr>
-          <a:xfrm>
-            <a:off x="1097280" y="5120640"/>
-            <a:ext cx="9144000" cy="457200"/>
+          <p:cNvPr id="12" name="Text 7"/>
+          <p:cNvSpPr/>
+          <p:nvPr/>
+        </p:nvSpPr>
+        <p:spPr>
+          <a:xfrm>
+            <a:off x="6278728" y="2286000"/>
+            <a:ext cx="5364328" cy="2103120"/>
           </a:xfrm>
           <a:prstGeom prst="rect">
             <a:avLst/>
@@ -4410,17 +4497,104 @@
               <a:buNone/>
             </a:pPr>
             <a:r>
-              <a:rPr lang="en-US" sz="1200" dirty="0">
-                <a:solidFill>
-                  <a:srgbClr val="999999"/>
+              <a:rPr lang="en-US" sz="1250" dirty="0">
+                <a:solidFill>
+                  <a:srgbClr val="FFFFFF"/>
+                </a:solidFill>
+                <a:latin typeface="Arial" pitchFamily="34" charset="0"/>
+                <a:ea typeface="Arial" pitchFamily="34" charset="-122"/>
+                <a:cs typeface="Arial" pitchFamily="34" charset="-120"/>
+              </a:rPr>
+              <a:t>Espelhos apagados em locais de grande circulação só acendem uma palavra quando a pessoa termina de contar o que herdou do pai — não na aparência, na atitude.</a:t>
+            </a:r>
+            <a:endParaRPr lang="en-US" sz="1250" dirty="0"/>
+          </a:p>
+        </p:txBody>
+      </p:sp>
+      <p:sp>
+        <p:nvSpPr>
+          <p:cNvPr id="13" name="Text 8">
+            <a:hlinkClick r:id="rId5" tooltip=""/>
+          </p:cNvPr>
+          <p:cNvSpPr/>
+          <p:nvPr/>
+        </p:nvSpPr>
+        <p:spPr>
+          <a:xfrm>
+            <a:off x="6278728" y="4572000"/>
+            <a:ext cx="5364328" cy="365760"/>
+          </a:xfrm>
+          <a:prstGeom prst="rect">
+            <a:avLst/>
+          </a:prstGeom>
+          <a:noFill/>
+          <a:ln/>
+        </p:spPr>
+        <p:txBody>
+          <a:bodyPr wrap="square" lIns="0" tIns="0" rIns="0" bIns="0" rtlCol="0" anchor="ctr"/>
+          <a:lstStyle/>
+          <a:p>
+            <a:pPr indent="0" marL="0">
+              <a:buNone/>
+            </a:pPr>
+            <a:r>
+              <a:rPr lang="en-US" sz="1200" b="1" u="sng" dirty="0">
+                <a:solidFill>
+                  <a:srgbClr val="DAFF94"/>
                 </a:solidFill>
                 <a:latin typeface="JetBrains Mono" pitchFamily="34" charset="0"/>
                 <a:ea typeface="JetBrains Mono" pitchFamily="34" charset="-122"/>
                 <a:cs typeface="JetBrains Mono" pitchFamily="34" charset="-120"/>
+                <a:hlinkClick r:id="rId5" invalidUrl="" action="" tgtFrame="" tooltip="" history="1" highlightClick="0" endSnd="0">
+                  <a:extLst>
+                    <a:ext uri="{A12FA001-AC4F-418D-AE19-62706E023703}">
+                      <ahyp:hlinkClr xmlns:ahyp="http://schemas.microsoft.com/office/drawing/2018/hyperlinkcolor" val="tx"/>
+                    </a:ext>
+                  </a:extLst>
+                </a:hlinkClick>
+              </a:rPr>
+              <a:t>▶ assistir ao case</a:t>
+            </a:r>
+            <a:endParaRPr lang="en-US" sz="1200" dirty="0"/>
+          </a:p>
+        </p:txBody>
+      </p:sp>
+      <p:sp>
+        <p:nvSpPr>
+          <p:cNvPr id="14" name="Text 9"/>
+          <p:cNvSpPr/>
+          <p:nvPr/>
+        </p:nvSpPr>
+        <p:spPr>
+          <a:xfrm>
+            <a:off x="548640" y="5394960"/>
+            <a:ext cx="9144000" cy="457200"/>
+          </a:xfrm>
+          <a:prstGeom prst="rect">
+            <a:avLst/>
+          </a:prstGeom>
+          <a:noFill/>
+          <a:ln/>
+        </p:spPr>
+        <p:txBody>
+          <a:bodyPr wrap="square" lIns="0" tIns="0" rIns="0" bIns="0" rtlCol="0" anchor="ctr"/>
+          <a:lstStyle/>
+          <a:p>
+            <a:pPr indent="0" marL="0">
+              <a:buNone/>
+            </a:pPr>
+            <a:r>
+              <a:rPr lang="en-US" sz="1100" dirty="0">
+                <a:solidFill>
+                  <a:srgbClr val="999999"/>
+                </a:solidFill>
+                <a:latin typeface="JetBrains Mono" pitchFamily="34" charset="0"/>
+                <a:ea typeface="JetBrains Mono" pitchFamily="34" charset="-122"/>
+                <a:cs typeface="JetBrains Mono" pitchFamily="34" charset="-120"/>
               </a:rPr>
               <a:t>Campanhas de Dia dos Pais assinadas pela Arpejo em agosto/26.</a:t>
             </a:r>
-            <a:endParaRPr lang="en-US" sz="1200" dirty="0"/>
+            <a:endParaRPr lang="en-US" sz="1100" dirty="0"/>
           </a:p>
         </p:txBody>
       </p:sp>

--- a/entregas-agosto26/apresentacao-prospeccao-agosto26.pptx
+++ b/entregas-agosto26/apresentacao-prospeccao-agosto26.pptx
@@ -3322,9 +3322,32 @@
           </a:p>
         </p:txBody>
       </p:sp>
-      <p:sp>
-        <p:nvSpPr>
-          <p:cNvPr id="5" name="Shape 3"/>
+      <p:pic>
+        <p:nvPicPr>
+          <p:cNvPr id="5" name="Image 0" descr="/tmp/claude-0/-home-user-data-manipulation-exercises/f19acac8-ccb4-5197-8e49-c3b6029ad477/scratchpad/report-images/final/prospect-hiper-realidade.jpg">    </p:cNvPr>
+          <p:cNvPicPr>
+            <a:picLocks noChangeAspect="1"/>
+          </p:cNvPicPr>
+          <p:nvPr/>
+        </p:nvPicPr>
+        <p:blipFill>
+          <a:blip r:embed="rId1"/>
+          <a:srcRect l="0" r="0" t="0" b="0"/>
+          <a:stretch/>
+        </p:blipFill>
+        <p:spPr>
+          <a:xfrm>
+            <a:off x="640080" y="1188720"/>
+            <a:ext cx="5120640" cy="4480560"/>
+          </a:xfrm>
+          <a:prstGeom prst="rect">
+            <a:avLst/>
+          </a:prstGeom>
+        </p:spPr>
+      </p:pic>
+      <p:sp>
+        <p:nvSpPr>
+          <p:cNvPr id="6" name="Shape 3"/>
           <p:cNvSpPr/>
           <p:nvPr/>
         </p:nvSpPr>
@@ -3338,22 +3361,46 @@
               <a:gd name="adj" fmla="val 3061"/>
             </a:avLst>
           </a:prstGeom>
+          <a:ln w="12700">
+            <a:solidFill>
+              <a:srgbClr val="DAFF94"/>
+            </a:solidFill>
+            <a:prstDash val="solid"/>
+          </a:ln>
+        </p:spPr>
+      </p:sp>
+      <p:sp>
+        <p:nvSpPr>
+          <p:cNvPr id="7" name="Shape 4"/>
+          <p:cNvSpPr/>
+          <p:nvPr/>
+        </p:nvSpPr>
+        <p:spPr>
+          <a:xfrm>
+            <a:off x="640080" y="3200400"/>
+            <a:ext cx="5120640" cy="2468880"/>
+          </a:xfrm>
+          <a:prstGeom prst="rect">
+            <a:avLst/>
+          </a:prstGeom>
           <a:solidFill>
-            <a:srgbClr val="DAFF94"/>
+            <a:srgbClr val="000000">
+              <a:alpha val="75000"/>
+            </a:srgbClr>
           </a:solidFill>
           <a:ln/>
         </p:spPr>
       </p:sp>
       <p:sp>
         <p:nvSpPr>
-          <p:cNvPr id="6" name="Text 4"/>
-          <p:cNvSpPr/>
-          <p:nvPr/>
-        </p:nvSpPr>
-        <p:spPr>
-          <a:xfrm>
-            <a:off x="914400" y="1463040"/>
-            <a:ext cx="4572000" cy="1463040"/>
+          <p:cNvPr id="8" name="Text 5"/>
+          <p:cNvSpPr/>
+          <p:nvPr/>
+        </p:nvSpPr>
+        <p:spPr>
+          <a:xfrm>
+            <a:off x="914400" y="3337560"/>
+            <a:ext cx="4572000" cy="1097280"/>
           </a:xfrm>
           <a:prstGeom prst="rect">
             <a:avLst/>
@@ -3369,9 +3416,9 @@
               <a:buNone/>
             </a:pPr>
             <a:r>
-              <a:rPr lang="en-US" sz="3000" b="1" i="1" dirty="0">
-                <a:solidFill>
-                  <a:srgbClr val="000000"/>
+              <a:rPr lang="en-US" sz="2600" b="1" i="1" dirty="0">
+                <a:solidFill>
+                  <a:srgbClr val="DAFF94"/>
                 </a:solidFill>
                 <a:latin typeface="Libre Baskerville" pitchFamily="34" charset="0"/>
                 <a:ea typeface="Libre Baskerville" pitchFamily="34" charset="-122"/>
@@ -3379,16 +3426,16 @@
               </a:rPr>
               <a:t>HIPER-</a:t>
             </a:r>
-            <a:endParaRPr lang="en-US" sz="3000" dirty="0"/>
+            <a:endParaRPr lang="en-US" sz="2600" dirty="0"/>
           </a:p>
           <a:p>
             <a:pPr indent="0" marL="0">
               <a:buNone/>
             </a:pPr>
             <a:r>
-              <a:rPr lang="en-US" sz="3000" b="1" i="1" dirty="0">
-                <a:solidFill>
-                  <a:srgbClr val="000000"/>
+              <a:rPr lang="en-US" sz="2600" b="1" i="1" dirty="0">
+                <a:solidFill>
+                  <a:srgbClr val="DAFF94"/>
                 </a:solidFill>
                 <a:latin typeface="Libre Baskerville" pitchFamily="34" charset="0"/>
                 <a:ea typeface="Libre Baskerville" pitchFamily="34" charset="-122"/>
@@ -3396,20 +3443,20 @@
               </a:rPr>
               <a:t>REALIDADE</a:t>
             </a:r>
-            <a:endParaRPr lang="en-US" sz="3000" dirty="0"/>
-          </a:p>
-        </p:txBody>
-      </p:sp>
-      <p:sp>
-        <p:nvSpPr>
-          <p:cNvPr id="7" name="Text 5"/>
-          <p:cNvSpPr/>
-          <p:nvPr/>
-        </p:nvSpPr>
-        <p:spPr>
-          <a:xfrm>
-            <a:off x="914400" y="3017520"/>
-            <a:ext cx="4572000" cy="1280160"/>
+            <a:endParaRPr lang="en-US" sz="2600" dirty="0"/>
+          </a:p>
+        </p:txBody>
+      </p:sp>
+      <p:sp>
+        <p:nvSpPr>
+          <p:cNvPr id="9" name="Text 6"/>
+          <p:cNvSpPr/>
+          <p:nvPr/>
+        </p:nvSpPr>
+        <p:spPr>
+          <a:xfrm>
+            <a:off x="914400" y="4434840"/>
+            <a:ext cx="4572000" cy="1097280"/>
           </a:xfrm>
           <a:prstGeom prst="rect">
             <a:avLst/>
@@ -3425,9 +3472,9 @@
               <a:buNone/>
             </a:pPr>
             <a:r>
-              <a:rPr lang="en-US" sz="1500" i="1" dirty="0">
-                <a:solidFill>
-                  <a:srgbClr val="222222"/>
+              <a:rPr lang="en-US" sz="1300" i="1" dirty="0">
+                <a:solidFill>
+                  <a:srgbClr val="FFFFFF"/>
                 </a:solidFill>
                 <a:latin typeface="Libre Baskerville" pitchFamily="34" charset="0"/>
                 <a:ea typeface="Libre Baskerville" pitchFamily="34" charset="-122"/>
@@ -3435,13 +3482,13 @@
               </a:rPr>
               <a:t>Na hiper-realidade, online ou offline, o que conta é a experiência.</a:t>
             </a:r>
-            <a:endParaRPr lang="en-US" sz="1500" dirty="0"/>
-          </a:p>
-        </p:txBody>
-      </p:sp>
-      <p:sp>
-        <p:nvSpPr>
-          <p:cNvPr id="8" name="Text 6"/>
+            <a:endParaRPr lang="en-US" sz="1300" dirty="0"/>
+          </a:p>
+        </p:txBody>
+      </p:sp>
+      <p:sp>
+        <p:nvSpPr>
+          <p:cNvPr id="10" name="Text 7"/>
           <p:cNvSpPr/>
           <p:nvPr/>
         </p:nvSpPr>
@@ -3480,7 +3527,7 @@
       </p:sp>
       <p:sp>
         <p:nvSpPr>
-          <p:cNvPr id="9" name="Text 7"/>
+          <p:cNvPr id="11" name="Text 8"/>
           <p:cNvSpPr/>
           <p:nvPr/>
         </p:nvSpPr>
@@ -3519,7 +3566,7 @@
       </p:sp>
       <p:sp>
         <p:nvSpPr>
-          <p:cNvPr id="10" name="Text 8"/>
+          <p:cNvPr id="12" name="Text 9"/>
           <p:cNvSpPr/>
           <p:nvPr/>
         </p:nvSpPr>
@@ -3558,14 +3605,14 @@
       </p:sp>
       <p:pic>
         <p:nvPicPr>
-          <p:cNvPr id="11" name="Image 0" descr="/home/user/data-manipulation-exercises/.claude/skills/brand-guidelines/assets/textures/arrow-lime.png">    </p:cNvPr>
+          <p:cNvPr id="13" name="Image 1" descr="/home/user/data-manipulation-exercises/.claude/skills/brand-guidelines/assets/textures/arrow-lime.png">    </p:cNvPr>
           <p:cNvPicPr>
             <a:picLocks noChangeAspect="1"/>
           </p:cNvPicPr>
           <p:nvPr/>
         </p:nvPicPr>
         <p:blipFill>
-          <a:blip r:embed="rId1"/>
+          <a:blip r:embed="rId2"/>
           <a:stretch>
             <a:fillRect/>
           </a:stretch>

--- a/entregas-agosto26/apresentacao-prospeccao-agosto26.pptx
+++ b/entregas-agosto26/apresentacao-prospeccao-agosto26.pptx
@@ -13,43 +13,40 @@
     <p:sldId id="261" r:id="rId7"/>
     <p:sldId id="262" r:id="rId8"/>
     <p:sldId id="263" r:id="rId9"/>
-    <p:sldId id="264" r:id="rId10"/>
-    <p:sldId id="265" r:id="rId11"/>
-    <p:sldId id="266" r:id="rId12"/>
   </p:sldIdLst>
   <p:notesMasterIdLst>
-    <p:notesMasterId r:id="rId13"/>
+    <p:notesMasterId r:id="rId10"/>
   </p:notesMasterIdLst>
   <p:sldSz cx="12192000" cy="6858000"/>
   <p:notesSz cx="6858000" cy="12192000"/>
   <p:embeddedFontLst>
     <p:embeddedFont>
       <p:font typeface="JetBrains Mono Medium"/>
-      <p:regular r:id="rId18"/>
-      <p:bold r:id="rId19"/>
-      <p:italic r:id="rId20"/>
-      <p:boldItalic r:id="rId21"/>
+      <p:regular r:id="rId15"/>
+      <p:bold r:id="rId16"/>
+      <p:italic r:id="rId17"/>
+      <p:boldItalic r:id="rId18"/>
     </p:embeddedFont>
     <p:embeddedFont>
       <p:font typeface="Urbanist"/>
-      <p:regular r:id="rId22"/>
-      <p:bold r:id="rId23"/>
-      <p:italic r:id="rId24"/>
-      <p:boldItalic r:id="rId25"/>
+      <p:regular r:id="rId19"/>
+      <p:bold r:id="rId20"/>
+      <p:italic r:id="rId21"/>
+      <p:boldItalic r:id="rId22"/>
     </p:embeddedFont>
     <p:embeddedFont>
       <p:font typeface="Libre Baskerville"/>
-      <p:regular r:id="rId26"/>
-      <p:bold r:id="rId27"/>
-      <p:italic r:id="rId28"/>
-      <p:boldItalic r:id="rId29"/>
+      <p:regular r:id="rId23"/>
+      <p:bold r:id="rId24"/>
+      <p:italic r:id="rId25"/>
+      <p:boldItalic r:id="rId26"/>
     </p:embeddedFont>
     <p:embeddedFont>
       <p:font typeface="Ubuntu Mono"/>
-      <p:regular r:id="rId30"/>
-      <p:bold r:id="rId31"/>
-      <p:italic r:id="rId32"/>
-      <p:boldItalic r:id="rId33"/>
+      <p:regular r:id="rId27"/>
+      <p:bold r:id="rId28"/>
+      <p:italic r:id="rId29"/>
+      <p:boldItalic r:id="rId30"/>
     </p:embeddedFont>
   </p:embeddedFontLst>
   <p:defaultTextStyle>
@@ -584,182 +581,6 @@
 </p:notes>
 </file>
 
-<file path=ppt/notesSlides/notesSlide10.xml><?xml version="1.0" encoding="utf-8"?>
-<p:notes xmlns:a="http://schemas.openxmlformats.org/drawingml/2006/main" xmlns:r="http://schemas.openxmlformats.org/officeDocument/2006/relationships" xmlns:p="http://schemas.openxmlformats.org/presentationml/2006/main">
-  <p:cSld>
-    <p:spTree>
-      <p:nvGrpSpPr>
-        <p:cNvPr id="1" name=""/>
-        <p:cNvGrpSpPr/>
-        <p:nvPr/>
-      </p:nvGrpSpPr>
-      <p:grpSpPr>
-        <a:xfrm>
-          <a:off x="0" y="0"/>
-          <a:ext cx="0" cy="0"/>
-          <a:chOff x="0" y="0"/>
-          <a:chExt cx="0" cy="0"/>
-        </a:xfrm>
-      </p:grpSpPr>
-      <p:sp>
-        <p:nvSpPr>
-          <p:cNvPr id="2" name="Slide Image Placeholder 1"/>
-          <p:cNvSpPr>
-            <a:spLocks noGrp="1" noRot="1" noChangeAspect="1"/>
-          </p:cNvSpPr>
-          <p:nvPr>
-            <p:ph type="sldImg"/>
-          </p:nvPr>
-        </p:nvSpPr>
-        <p:spPr/>
-      </p:sp>
-      <p:sp>
-        <p:nvSpPr>
-          <p:cNvPr id="3" name="Notes Placeholder 2"/>
-          <p:cNvSpPr>
-            <a:spLocks noGrp="1"/>
-          </p:cNvSpPr>
-          <p:nvPr>
-            <p:ph type="body" idx="1"/>
-          </p:nvPr>
-        </p:nvSpPr>
-        <p:spPr/>
-        <p:txBody>
-          <a:bodyPr/>
-          <a:lstStyle/>
-          <a:p>
-            <a:r>
-              <a:rPr lang="en-US" dirty="0"/>
-              <a:t/>
-            </a:r>
-            <a:endParaRPr lang="en-US" dirty="0"/>
-          </a:p>
-        </p:txBody>
-      </p:sp>
-      <p:sp>
-        <p:nvSpPr>
-          <p:cNvPr id="4" name="Slide Number Placeholder 3"/>
-          <p:cNvSpPr>
-            <a:spLocks noGrp="1"/>
-          </p:cNvSpPr>
-          <p:nvPr>
-            <p:ph type="sldNum" sz="quarter" idx="10"/>
-          </p:nvPr>
-        </p:nvSpPr>
-        <p:spPr/>
-        <p:txBody>
-          <a:bodyPr/>
-          <a:lstStyle/>
-          <a:p>
-            <a:fld id="{F7021451-1387-4CA6-816F-3879F97B5CBC}" type="slidenum">
-              <a:rPr lang="en-US"/>
-              <a:t>10</a:t>
-            </a:fld>
-            <a:endParaRPr lang="en-US"/>
-          </a:p>
-        </p:txBody>
-      </p:sp>
-    </p:spTree>
-    <p:extLst>
-      <p:ext uri="{BB962C8B-B14F-4D97-AF65-F5344CB8AC3E}">
-        <p14:creationId xmlns:p14="http://schemas.microsoft.com/office/powerpoint/2010/main" val="1024086991"/>
-      </p:ext>
-    </p:extLst>
-  </p:cSld>
-  <p:clrMapOvr>
-    <a:masterClrMapping/>
-  </p:clrMapOvr>
-</p:notes>
-</file>
-
-<file path=ppt/notesSlides/notesSlide11.xml><?xml version="1.0" encoding="utf-8"?>
-<p:notes xmlns:a="http://schemas.openxmlformats.org/drawingml/2006/main" xmlns:r="http://schemas.openxmlformats.org/officeDocument/2006/relationships" xmlns:p="http://schemas.openxmlformats.org/presentationml/2006/main">
-  <p:cSld>
-    <p:spTree>
-      <p:nvGrpSpPr>
-        <p:cNvPr id="1" name=""/>
-        <p:cNvGrpSpPr/>
-        <p:nvPr/>
-      </p:nvGrpSpPr>
-      <p:grpSpPr>
-        <a:xfrm>
-          <a:off x="0" y="0"/>
-          <a:ext cx="0" cy="0"/>
-          <a:chOff x="0" y="0"/>
-          <a:chExt cx="0" cy="0"/>
-        </a:xfrm>
-      </p:grpSpPr>
-      <p:sp>
-        <p:nvSpPr>
-          <p:cNvPr id="2" name="Slide Image Placeholder 1"/>
-          <p:cNvSpPr>
-            <a:spLocks noGrp="1" noRot="1" noChangeAspect="1"/>
-          </p:cNvSpPr>
-          <p:nvPr>
-            <p:ph type="sldImg"/>
-          </p:nvPr>
-        </p:nvSpPr>
-        <p:spPr/>
-      </p:sp>
-      <p:sp>
-        <p:nvSpPr>
-          <p:cNvPr id="3" name="Notes Placeholder 2"/>
-          <p:cNvSpPr>
-            <a:spLocks noGrp="1"/>
-          </p:cNvSpPr>
-          <p:nvPr>
-            <p:ph type="body" idx="1"/>
-          </p:nvPr>
-        </p:nvSpPr>
-        <p:spPr/>
-        <p:txBody>
-          <a:bodyPr/>
-          <a:lstStyle/>
-          <a:p>
-            <a:r>
-              <a:rPr lang="en-US" dirty="0"/>
-              <a:t/>
-            </a:r>
-            <a:endParaRPr lang="en-US" dirty="0"/>
-          </a:p>
-        </p:txBody>
-      </p:sp>
-      <p:sp>
-        <p:nvSpPr>
-          <p:cNvPr id="4" name="Slide Number Placeholder 3"/>
-          <p:cNvSpPr>
-            <a:spLocks noGrp="1"/>
-          </p:cNvSpPr>
-          <p:nvPr>
-            <p:ph type="sldNum" sz="quarter" idx="10"/>
-          </p:nvPr>
-        </p:nvSpPr>
-        <p:spPr/>
-        <p:txBody>
-          <a:bodyPr/>
-          <a:lstStyle/>
-          <a:p>
-            <a:fld id="{F7021451-1387-4CA6-816F-3879F97B5CBC}" type="slidenum">
-              <a:rPr lang="en-US"/>
-              <a:t>11</a:t>
-            </a:fld>
-            <a:endParaRPr lang="en-US"/>
-          </a:p>
-        </p:txBody>
-      </p:sp>
-    </p:spTree>
-    <p:extLst>
-      <p:ext uri="{BB962C8B-B14F-4D97-AF65-F5344CB8AC3E}">
-        <p14:creationId xmlns:p14="http://schemas.microsoft.com/office/powerpoint/2010/main" val="1024086991"/>
-      </p:ext>
-    </p:extLst>
-  </p:cSld>
-  <p:clrMapOvr>
-    <a:masterClrMapping/>
-  </p:clrMapOvr>
-</p:notes>
-</file>
-
 <file path=ppt/notesSlides/notesSlide2.xml><?xml version="1.0" encoding="utf-8"?>
 <p:notes xmlns:a="http://schemas.openxmlformats.org/drawingml/2006/main" xmlns:r="http://schemas.openxmlformats.org/officeDocument/2006/relationships" xmlns:p="http://schemas.openxmlformats.org/presentationml/2006/main">
   <p:cSld>
@@ -1358,94 +1179,6 @@
             <a:fld id="{F7021451-1387-4CA6-816F-3879F97B5CBC}" type="slidenum">
               <a:rPr lang="en-US"/>
               <a:t>8</a:t>
-            </a:fld>
-            <a:endParaRPr lang="en-US"/>
-          </a:p>
-        </p:txBody>
-      </p:sp>
-    </p:spTree>
-    <p:extLst>
-      <p:ext uri="{BB962C8B-B14F-4D97-AF65-F5344CB8AC3E}">
-        <p14:creationId xmlns:p14="http://schemas.microsoft.com/office/powerpoint/2010/main" val="1024086991"/>
-      </p:ext>
-    </p:extLst>
-  </p:cSld>
-  <p:clrMapOvr>
-    <a:masterClrMapping/>
-  </p:clrMapOvr>
-</p:notes>
-</file>
-
-<file path=ppt/notesSlides/notesSlide9.xml><?xml version="1.0" encoding="utf-8"?>
-<p:notes xmlns:a="http://schemas.openxmlformats.org/drawingml/2006/main" xmlns:r="http://schemas.openxmlformats.org/officeDocument/2006/relationships" xmlns:p="http://schemas.openxmlformats.org/presentationml/2006/main">
-  <p:cSld>
-    <p:spTree>
-      <p:nvGrpSpPr>
-        <p:cNvPr id="1" name=""/>
-        <p:cNvGrpSpPr/>
-        <p:nvPr/>
-      </p:nvGrpSpPr>
-      <p:grpSpPr>
-        <a:xfrm>
-          <a:off x="0" y="0"/>
-          <a:ext cx="0" cy="0"/>
-          <a:chOff x="0" y="0"/>
-          <a:chExt cx="0" cy="0"/>
-        </a:xfrm>
-      </p:grpSpPr>
-      <p:sp>
-        <p:nvSpPr>
-          <p:cNvPr id="2" name="Slide Image Placeholder 1"/>
-          <p:cNvSpPr>
-            <a:spLocks noGrp="1" noRot="1" noChangeAspect="1"/>
-          </p:cNvSpPr>
-          <p:nvPr>
-            <p:ph type="sldImg"/>
-          </p:nvPr>
-        </p:nvSpPr>
-        <p:spPr/>
-      </p:sp>
-      <p:sp>
-        <p:nvSpPr>
-          <p:cNvPr id="3" name="Notes Placeholder 2"/>
-          <p:cNvSpPr>
-            <a:spLocks noGrp="1"/>
-          </p:cNvSpPr>
-          <p:nvPr>
-            <p:ph type="body" idx="1"/>
-          </p:nvPr>
-        </p:nvSpPr>
-        <p:spPr/>
-        <p:txBody>
-          <a:bodyPr/>
-          <a:lstStyle/>
-          <a:p>
-            <a:r>
-              <a:rPr lang="en-US" dirty="0"/>
-              <a:t/>
-            </a:r>
-            <a:endParaRPr lang="en-US" dirty="0"/>
-          </a:p>
-        </p:txBody>
-      </p:sp>
-      <p:sp>
-        <p:nvSpPr>
-          <p:cNvPr id="4" name="Slide Number Placeholder 3"/>
-          <p:cNvSpPr>
-            <a:spLocks noGrp="1"/>
-          </p:cNvSpPr>
-          <p:nvPr>
-            <p:ph type="sldNum" sz="quarter" idx="10"/>
-          </p:nvPr>
-        </p:nvSpPr>
-        <p:spPr/>
-        <p:txBody>
-          <a:bodyPr/>
-          <a:lstStyle/>
-          <a:p>
-            <a:fld id="{F7021451-1387-4CA6-816F-3879F97B5CBC}" type="slidenum">
-              <a:rPr lang="en-US"/>
-              <a:t>9</a:t>
             </a:fld>
             <a:endParaRPr lang="en-US"/>
           </a:p>
@@ -3474,2321 +3207,6 @@
 </p:sld>
 </file>
 
-<file path=ppt/slides/slide10.xml><?xml version="1.0" encoding="utf-8"?>
-<p:sld xmlns:a="http://schemas.openxmlformats.org/drawingml/2006/main" xmlns:r="http://schemas.openxmlformats.org/officeDocument/2006/relationships" xmlns:p="http://schemas.openxmlformats.org/presentationml/2006/main">
-  <p:cSld name="Slide 10">
-    <p:bg>
-      <p:bgPr>
-        <a:solidFill>
-          <a:srgbClr val="000000"/>
-        </a:solidFill>
-      </p:bgPr>
-    </p:bg>
-    <p:spTree>
-      <p:nvGrpSpPr>
-        <p:cNvPr id="1" name=""/>
-        <p:cNvGrpSpPr/>
-        <p:nvPr/>
-      </p:nvGrpSpPr>
-      <p:grpSpPr>
-        <a:xfrm>
-          <a:off x="0" y="0"/>
-          <a:ext cx="0" cy="0"/>
-          <a:chOff x="0" y="0"/>
-          <a:chExt cx="0" cy="0"/>
-        </a:xfrm>
-      </p:grpSpPr>
-      <p:sp>
-        <p:nvSpPr>
-          <p:cNvPr id="2" name="Text 0"/>
-          <p:cNvSpPr/>
-          <p:nvPr/>
-        </p:nvSpPr>
-        <p:spPr>
-          <a:xfrm>
-            <a:off x="548640" y="411480"/>
-            <a:ext cx="7315200" cy="365760"/>
-          </a:xfrm>
-          <a:prstGeom prst="rect">
-            <a:avLst/>
-          </a:prstGeom>
-          <a:noFill/>
-          <a:ln/>
-        </p:spPr>
-        <p:txBody>
-          <a:bodyPr wrap="square" lIns="0" tIns="0" rIns="0" bIns="0" rtlCol="0" anchor="ctr"/>
-          <a:lstStyle/>
-          <a:p>
-            <a:pPr indent="0" marL="0">
-              <a:buNone/>
-            </a:pPr>
-            <a:r>
-              <a:rPr lang="en-US" sz="1200" dirty="0">
-                <a:solidFill>
-                  <a:srgbClr val="DAFF94"/>
-                </a:solidFill>
-                <a:latin typeface="JetBrains Mono" pitchFamily="34" charset="0"/>
-                <a:ea typeface="JetBrains Mono" pitchFamily="34" charset="-122"/>
-                <a:cs typeface="JetBrains Mono" pitchFamily="34" charset="-120"/>
-              </a:rPr>
-              <a:t>COMO TRABALHAMOS</a:t>
-            </a:r>
-            <a:endParaRPr lang="en-US" sz="1200" dirty="0"/>
-          </a:p>
-        </p:txBody>
-      </p:sp>
-      <p:sp>
-        <p:nvSpPr>
-          <p:cNvPr id="3" name="Shape 1"/>
-          <p:cNvSpPr/>
-          <p:nvPr/>
-        </p:nvSpPr>
-        <p:spPr>
-          <a:xfrm>
-            <a:off x="548640" y="2560320"/>
-            <a:ext cx="2499284" cy="1828800"/>
-          </a:xfrm>
-          <a:prstGeom prst="roundRect">
-            <a:avLst>
-              <a:gd name="adj" fmla="val 7000"/>
-            </a:avLst>
-          </a:prstGeom>
-          <a:solidFill>
-            <a:srgbClr val="141414"/>
-          </a:solidFill>
-          <a:ln w="9525">
-            <a:solidFill>
-              <a:srgbClr val="DAFF94"/>
-            </a:solidFill>
-            <a:prstDash val="solid"/>
-          </a:ln>
-        </p:spPr>
-      </p:sp>
-      <p:sp>
-        <p:nvSpPr>
-          <p:cNvPr id="4" name="Text 2"/>
-          <p:cNvSpPr/>
-          <p:nvPr/>
-        </p:nvSpPr>
-        <p:spPr>
-          <a:xfrm>
-            <a:off x="777240" y="2743200"/>
-            <a:ext cx="2042084" cy="548640"/>
-          </a:xfrm>
-          <a:prstGeom prst="rect">
-            <a:avLst/>
-          </a:prstGeom>
-          <a:noFill/>
-          <a:ln/>
-        </p:spPr>
-        <p:txBody>
-          <a:bodyPr wrap="square" lIns="0" tIns="0" rIns="0" bIns="0" rtlCol="0" anchor="ctr"/>
-          <a:lstStyle/>
-          <a:p>
-            <a:pPr indent="0" marL="0">
-              <a:buNone/>
-            </a:pPr>
-            <a:r>
-              <a:rPr lang="en-US" sz="1500" dirty="0">
-                <a:solidFill>
-                  <a:srgbClr val="DAFF94"/>
-                </a:solidFill>
-                <a:latin typeface="JetBrains Mono" pitchFamily="34" charset="0"/>
-                <a:ea typeface="JetBrains Mono" pitchFamily="34" charset="-122"/>
-                <a:cs typeface="JetBrains Mono" pitchFamily="34" charset="-120"/>
-              </a:rPr>
-              <a:t>01</a:t>
-            </a:r>
-            <a:endParaRPr lang="en-US" sz="1500" dirty="0"/>
-          </a:p>
-        </p:txBody>
-      </p:sp>
-      <p:sp>
-        <p:nvSpPr>
-          <p:cNvPr id="5" name="Text 3"/>
-          <p:cNvSpPr/>
-          <p:nvPr/>
-        </p:nvSpPr>
-        <p:spPr>
-          <a:xfrm>
-            <a:off x="777240" y="3246120"/>
-            <a:ext cx="2042084" cy="1005840"/>
-          </a:xfrm>
-          <a:prstGeom prst="rect">
-            <a:avLst/>
-          </a:prstGeom>
-          <a:noFill/>
-          <a:ln/>
-        </p:spPr>
-        <p:txBody>
-          <a:bodyPr wrap="square" lIns="0" tIns="0" rIns="0" bIns="0" rtlCol="0" anchor="t"/>
-          <a:lstStyle/>
-          <a:p>
-            <a:pPr indent="0" marL="0">
-              <a:buNone/>
-            </a:pPr>
-            <a:r>
-              <a:rPr lang="en-US" sz="1400" b="1" dirty="0">
-                <a:solidFill>
-                  <a:srgbClr val="FFFFFF"/>
-                </a:solidFill>
-                <a:latin typeface="Arial" pitchFamily="34" charset="0"/>
-                <a:ea typeface="Arial" pitchFamily="34" charset="-122"/>
-                <a:cs typeface="Arial" pitchFamily="34" charset="-120"/>
-              </a:rPr>
-              <a:t>Diagnóstico</a:t>
-            </a:r>
-            <a:endParaRPr lang="en-US" sz="1400" dirty="0"/>
-          </a:p>
-        </p:txBody>
-      </p:sp>
-      <p:sp>
-        <p:nvSpPr>
-          <p:cNvPr id="6" name="Shape 4"/>
-          <p:cNvSpPr/>
-          <p:nvPr/>
-        </p:nvSpPr>
-        <p:spPr>
-          <a:xfrm>
-            <a:off x="3413684" y="2560320"/>
-            <a:ext cx="2499284" cy="1828800"/>
-          </a:xfrm>
-          <a:prstGeom prst="roundRect">
-            <a:avLst>
-              <a:gd name="adj" fmla="val 7000"/>
-            </a:avLst>
-          </a:prstGeom>
-          <a:solidFill>
-            <a:srgbClr val="141414"/>
-          </a:solidFill>
-          <a:ln w="9525">
-            <a:solidFill>
-              <a:srgbClr val="DAFF94"/>
-            </a:solidFill>
-            <a:prstDash val="solid"/>
-          </a:ln>
-        </p:spPr>
-      </p:sp>
-      <p:sp>
-        <p:nvSpPr>
-          <p:cNvPr id="7" name="Text 5"/>
-          <p:cNvSpPr/>
-          <p:nvPr/>
-        </p:nvSpPr>
-        <p:spPr>
-          <a:xfrm>
-            <a:off x="3642284" y="2743200"/>
-            <a:ext cx="2042084" cy="548640"/>
-          </a:xfrm>
-          <a:prstGeom prst="rect">
-            <a:avLst/>
-          </a:prstGeom>
-          <a:noFill/>
-          <a:ln/>
-        </p:spPr>
-        <p:txBody>
-          <a:bodyPr wrap="square" lIns="0" tIns="0" rIns="0" bIns="0" rtlCol="0" anchor="ctr"/>
-          <a:lstStyle/>
-          <a:p>
-            <a:pPr indent="0" marL="0">
-              <a:buNone/>
-            </a:pPr>
-            <a:r>
-              <a:rPr lang="en-US" sz="1500" dirty="0">
-                <a:solidFill>
-                  <a:srgbClr val="DAFF94"/>
-                </a:solidFill>
-                <a:latin typeface="JetBrains Mono" pitchFamily="34" charset="0"/>
-                <a:ea typeface="JetBrains Mono" pitchFamily="34" charset="-122"/>
-                <a:cs typeface="JetBrains Mono" pitchFamily="34" charset="-120"/>
-              </a:rPr>
-              <a:t>02</a:t>
-            </a:r>
-            <a:endParaRPr lang="en-US" sz="1500" dirty="0"/>
-          </a:p>
-        </p:txBody>
-      </p:sp>
-      <p:sp>
-        <p:nvSpPr>
-          <p:cNvPr id="8" name="Text 6"/>
-          <p:cNvSpPr/>
-          <p:nvPr/>
-        </p:nvSpPr>
-        <p:spPr>
-          <a:xfrm>
-            <a:off x="3642284" y="3246120"/>
-            <a:ext cx="2042084" cy="1005840"/>
-          </a:xfrm>
-          <a:prstGeom prst="rect">
-            <a:avLst/>
-          </a:prstGeom>
-          <a:noFill/>
-          <a:ln/>
-        </p:spPr>
-        <p:txBody>
-          <a:bodyPr wrap="square" lIns="0" tIns="0" rIns="0" bIns="0" rtlCol="0" anchor="t"/>
-          <a:lstStyle/>
-          <a:p>
-            <a:pPr indent="0" marL="0">
-              <a:buNone/>
-            </a:pPr>
-            <a:r>
-              <a:rPr lang="en-US" sz="1400" b="1" dirty="0">
-                <a:solidFill>
-                  <a:srgbClr val="FFFFFF"/>
-                </a:solidFill>
-                <a:latin typeface="Arial" pitchFamily="34" charset="0"/>
-                <a:ea typeface="Arial" pitchFamily="34" charset="-122"/>
-                <a:cs typeface="Arial" pitchFamily="34" charset="-120"/>
-              </a:rPr>
-              <a:t>Estratégia</a:t>
-            </a:r>
-            <a:endParaRPr lang="en-US" sz="1400" dirty="0"/>
-          </a:p>
-        </p:txBody>
-      </p:sp>
-      <p:sp>
-        <p:nvSpPr>
-          <p:cNvPr id="9" name="Shape 7"/>
-          <p:cNvSpPr/>
-          <p:nvPr/>
-        </p:nvSpPr>
-        <p:spPr>
-          <a:xfrm>
-            <a:off x="6278728" y="2560320"/>
-            <a:ext cx="2499284" cy="1828800"/>
-          </a:xfrm>
-          <a:prstGeom prst="roundRect">
-            <a:avLst>
-              <a:gd name="adj" fmla="val 7000"/>
-            </a:avLst>
-          </a:prstGeom>
-          <a:solidFill>
-            <a:srgbClr val="141414"/>
-          </a:solidFill>
-          <a:ln w="9525">
-            <a:solidFill>
-              <a:srgbClr val="DAFF94"/>
-            </a:solidFill>
-            <a:prstDash val="solid"/>
-          </a:ln>
-        </p:spPr>
-      </p:sp>
-      <p:sp>
-        <p:nvSpPr>
-          <p:cNvPr id="10" name="Text 8"/>
-          <p:cNvSpPr/>
-          <p:nvPr/>
-        </p:nvSpPr>
-        <p:spPr>
-          <a:xfrm>
-            <a:off x="6507328" y="2743200"/>
-            <a:ext cx="2042084" cy="548640"/>
-          </a:xfrm>
-          <a:prstGeom prst="rect">
-            <a:avLst/>
-          </a:prstGeom>
-          <a:noFill/>
-          <a:ln/>
-        </p:spPr>
-        <p:txBody>
-          <a:bodyPr wrap="square" lIns="0" tIns="0" rIns="0" bIns="0" rtlCol="0" anchor="ctr"/>
-          <a:lstStyle/>
-          <a:p>
-            <a:pPr indent="0" marL="0">
-              <a:buNone/>
-            </a:pPr>
-            <a:r>
-              <a:rPr lang="en-US" sz="1500" dirty="0">
-                <a:solidFill>
-                  <a:srgbClr val="DAFF94"/>
-                </a:solidFill>
-                <a:latin typeface="JetBrains Mono" pitchFamily="34" charset="0"/>
-                <a:ea typeface="JetBrains Mono" pitchFamily="34" charset="-122"/>
-                <a:cs typeface="JetBrains Mono" pitchFamily="34" charset="-120"/>
-              </a:rPr>
-              <a:t>03</a:t>
-            </a:r>
-            <a:endParaRPr lang="en-US" sz="1500" dirty="0"/>
-          </a:p>
-        </p:txBody>
-      </p:sp>
-      <p:sp>
-        <p:nvSpPr>
-          <p:cNvPr id="11" name="Text 9"/>
-          <p:cNvSpPr/>
-          <p:nvPr/>
-        </p:nvSpPr>
-        <p:spPr>
-          <a:xfrm>
-            <a:off x="6507328" y="3246120"/>
-            <a:ext cx="2042084" cy="1005840"/>
-          </a:xfrm>
-          <a:prstGeom prst="rect">
-            <a:avLst/>
-          </a:prstGeom>
-          <a:noFill/>
-          <a:ln/>
-        </p:spPr>
-        <p:txBody>
-          <a:bodyPr wrap="square" lIns="0" tIns="0" rIns="0" bIns="0" rtlCol="0" anchor="t"/>
-          <a:lstStyle/>
-          <a:p>
-            <a:pPr indent="0" marL="0">
-              <a:buNone/>
-            </a:pPr>
-            <a:r>
-              <a:rPr lang="en-US" sz="1400" b="1" dirty="0">
-                <a:solidFill>
-                  <a:srgbClr val="FFFFFF"/>
-                </a:solidFill>
-                <a:latin typeface="Arial" pitchFamily="34" charset="0"/>
-                <a:ea typeface="Arial" pitchFamily="34" charset="-122"/>
-                <a:cs typeface="Arial" pitchFamily="34" charset="-120"/>
-              </a:rPr>
-              <a:t>Criação &amp; mídia</a:t>
-            </a:r>
-            <a:endParaRPr lang="en-US" sz="1400" dirty="0"/>
-          </a:p>
-        </p:txBody>
-      </p:sp>
-      <p:sp>
-        <p:nvSpPr>
-          <p:cNvPr id="12" name="Shape 10"/>
-          <p:cNvSpPr/>
-          <p:nvPr/>
-        </p:nvSpPr>
-        <p:spPr>
-          <a:xfrm>
-            <a:off x="9143771" y="2560320"/>
-            <a:ext cx="2499284" cy="1828800"/>
-          </a:xfrm>
-          <a:prstGeom prst="roundRect">
-            <a:avLst>
-              <a:gd name="adj" fmla="val 7000"/>
-            </a:avLst>
-          </a:prstGeom>
-          <a:solidFill>
-            <a:srgbClr val="141414"/>
-          </a:solidFill>
-          <a:ln w="9525">
-            <a:solidFill>
-              <a:srgbClr val="DAFF94"/>
-            </a:solidFill>
-            <a:prstDash val="solid"/>
-          </a:ln>
-        </p:spPr>
-      </p:sp>
-      <p:sp>
-        <p:nvSpPr>
-          <p:cNvPr id="13" name="Text 11"/>
-          <p:cNvSpPr/>
-          <p:nvPr/>
-        </p:nvSpPr>
-        <p:spPr>
-          <a:xfrm>
-            <a:off x="9372371" y="2743200"/>
-            <a:ext cx="2042084" cy="548640"/>
-          </a:xfrm>
-          <a:prstGeom prst="rect">
-            <a:avLst/>
-          </a:prstGeom>
-          <a:noFill/>
-          <a:ln/>
-        </p:spPr>
-        <p:txBody>
-          <a:bodyPr wrap="square" lIns="0" tIns="0" rIns="0" bIns="0" rtlCol="0" anchor="ctr"/>
-          <a:lstStyle/>
-          <a:p>
-            <a:pPr indent="0" marL="0">
-              <a:buNone/>
-            </a:pPr>
-            <a:r>
-              <a:rPr lang="en-US" sz="1500" dirty="0">
-                <a:solidFill>
-                  <a:srgbClr val="DAFF94"/>
-                </a:solidFill>
-                <a:latin typeface="JetBrains Mono" pitchFamily="34" charset="0"/>
-                <a:ea typeface="JetBrains Mono" pitchFamily="34" charset="-122"/>
-                <a:cs typeface="JetBrains Mono" pitchFamily="34" charset="-120"/>
-              </a:rPr>
-              <a:t>04</a:t>
-            </a:r>
-            <a:endParaRPr lang="en-US" sz="1500" dirty="0"/>
-          </a:p>
-        </p:txBody>
-      </p:sp>
-      <p:sp>
-        <p:nvSpPr>
-          <p:cNvPr id="14" name="Text 12"/>
-          <p:cNvSpPr/>
-          <p:nvPr/>
-        </p:nvSpPr>
-        <p:spPr>
-          <a:xfrm>
-            <a:off x="9372371" y="3246120"/>
-            <a:ext cx="2042084" cy="1005840"/>
-          </a:xfrm>
-          <a:prstGeom prst="rect">
-            <a:avLst/>
-          </a:prstGeom>
-          <a:noFill/>
-          <a:ln/>
-        </p:spPr>
-        <p:txBody>
-          <a:bodyPr wrap="square" lIns="0" tIns="0" rIns="0" bIns="0" rtlCol="0" anchor="t"/>
-          <a:lstStyle/>
-          <a:p>
-            <a:pPr indent="0" marL="0">
-              <a:buNone/>
-            </a:pPr>
-            <a:r>
-              <a:rPr lang="en-US" sz="1400" b="1" dirty="0">
-                <a:solidFill>
-                  <a:srgbClr val="FFFFFF"/>
-                </a:solidFill>
-                <a:latin typeface="Arial" pitchFamily="34" charset="0"/>
-                <a:ea typeface="Arial" pitchFamily="34" charset="-122"/>
-                <a:cs typeface="Arial" pitchFamily="34" charset="-120"/>
-              </a:rPr>
-              <a:t>.report mensal contínuo</a:t>
-            </a:r>
-            <a:endParaRPr lang="en-US" sz="1400" dirty="0"/>
-          </a:p>
-        </p:txBody>
-      </p:sp>
-    </p:spTree>
-  </p:cSld>
-  <p:clrMapOvr>
-    <a:masterClrMapping/>
-  </p:clrMapOvr>
-</p:sld>
-</file>
-
-<file path=ppt/slides/slide11.xml><?xml version="1.0" encoding="utf-8"?>
-<p:sld xmlns:a="http://schemas.openxmlformats.org/drawingml/2006/main" xmlns:r="http://schemas.openxmlformats.org/officeDocument/2006/relationships" xmlns:p="http://schemas.openxmlformats.org/presentationml/2006/main">
-  <p:cSld name="Slide 11">
-    <p:bg>
-      <p:bgPr>
-        <a:solidFill>
-          <a:srgbClr val="000000"/>
-        </a:solidFill>
-      </p:bgPr>
-    </p:bg>
-    <p:spTree>
-      <p:nvGrpSpPr>
-        <p:cNvPr id="1" name=""/>
-        <p:cNvGrpSpPr/>
-        <p:nvPr/>
-      </p:nvGrpSpPr>
-      <p:grpSpPr>
-        <a:xfrm>
-          <a:off x="0" y="0"/>
-          <a:ext cx="0" cy="0"/>
-          <a:chOff x="0" y="0"/>
-          <a:chExt cx="0" cy="0"/>
-        </a:xfrm>
-      </p:grpSpPr>
-      <p:sp>
-        <p:nvSpPr>
-          <p:cNvPr id="2" name="Text 0"/>
-          <p:cNvSpPr/>
-          <p:nvPr/>
-        </p:nvSpPr>
-        <p:spPr>
-          <a:xfrm>
-            <a:off x="777240" y="685800"/>
-            <a:ext cx="274320" cy="274320"/>
-          </a:xfrm>
-          <a:prstGeom prst="rect">
-            <a:avLst/>
-          </a:prstGeom>
-          <a:noFill/>
-          <a:ln/>
-        </p:spPr>
-        <p:txBody>
-          <a:bodyPr wrap="square" lIns="0" tIns="0" rIns="0" bIns="0" rtlCol="0" anchor="ctr"/>
-          <a:lstStyle/>
-          <a:p>
-            <a:pPr algn="ctr" indent="0" marL="0">
-              <a:buNone/>
-            </a:pPr>
-            <a:r>
-              <a:rPr lang="en-US" sz="1200" dirty="0">
-                <a:solidFill>
-                  <a:srgbClr val="333333"/>
-                </a:solidFill>
-                <a:latin typeface="Arial" pitchFamily="34" charset="0"/>
-                <a:ea typeface="Arial" pitchFamily="34" charset="-122"/>
-                <a:cs typeface="Arial" pitchFamily="34" charset="-120"/>
-              </a:rPr>
-              <a:t>+</a:t>
-            </a:r>
-            <a:endParaRPr lang="en-US" sz="1200" dirty="0"/>
-          </a:p>
-        </p:txBody>
-      </p:sp>
-      <p:sp>
-        <p:nvSpPr>
-          <p:cNvPr id="3" name="Text 1"/>
-          <p:cNvSpPr/>
-          <p:nvPr/>
-        </p:nvSpPr>
-        <p:spPr>
-          <a:xfrm>
-            <a:off x="2240280" y="685800"/>
-            <a:ext cx="274320" cy="274320"/>
-          </a:xfrm>
-          <a:prstGeom prst="rect">
-            <a:avLst/>
-          </a:prstGeom>
-          <a:noFill/>
-          <a:ln/>
-        </p:spPr>
-        <p:txBody>
-          <a:bodyPr wrap="square" lIns="0" tIns="0" rIns="0" bIns="0" rtlCol="0" anchor="ctr"/>
-          <a:lstStyle/>
-          <a:p>
-            <a:pPr algn="ctr" indent="0" marL="0">
-              <a:buNone/>
-            </a:pPr>
-            <a:r>
-              <a:rPr lang="en-US" sz="1200" dirty="0">
-                <a:solidFill>
-                  <a:srgbClr val="333333"/>
-                </a:solidFill>
-                <a:latin typeface="Arial" pitchFamily="34" charset="0"/>
-                <a:ea typeface="Arial" pitchFamily="34" charset="-122"/>
-                <a:cs typeface="Arial" pitchFamily="34" charset="-120"/>
-              </a:rPr>
-              <a:t>+</a:t>
-            </a:r>
-            <a:endParaRPr lang="en-US" sz="1200" dirty="0"/>
-          </a:p>
-        </p:txBody>
-      </p:sp>
-      <p:sp>
-        <p:nvSpPr>
-          <p:cNvPr id="4" name="Text 2"/>
-          <p:cNvSpPr/>
-          <p:nvPr/>
-        </p:nvSpPr>
-        <p:spPr>
-          <a:xfrm>
-            <a:off x="3703320" y="685800"/>
-            <a:ext cx="274320" cy="274320"/>
-          </a:xfrm>
-          <a:prstGeom prst="rect">
-            <a:avLst/>
-          </a:prstGeom>
-          <a:noFill/>
-          <a:ln/>
-        </p:spPr>
-        <p:txBody>
-          <a:bodyPr wrap="square" lIns="0" tIns="0" rIns="0" bIns="0" rtlCol="0" anchor="ctr"/>
-          <a:lstStyle/>
-          <a:p>
-            <a:pPr algn="ctr" indent="0" marL="0">
-              <a:buNone/>
-            </a:pPr>
-            <a:r>
-              <a:rPr lang="en-US" sz="1200" dirty="0">
-                <a:solidFill>
-                  <a:srgbClr val="333333"/>
-                </a:solidFill>
-                <a:latin typeface="Arial" pitchFamily="34" charset="0"/>
-                <a:ea typeface="Arial" pitchFamily="34" charset="-122"/>
-                <a:cs typeface="Arial" pitchFamily="34" charset="-120"/>
-              </a:rPr>
-              <a:t>+</a:t>
-            </a:r>
-            <a:endParaRPr lang="en-US" sz="1200" dirty="0"/>
-          </a:p>
-        </p:txBody>
-      </p:sp>
-      <p:sp>
-        <p:nvSpPr>
-          <p:cNvPr id="5" name="Text 3"/>
-          <p:cNvSpPr/>
-          <p:nvPr/>
-        </p:nvSpPr>
-        <p:spPr>
-          <a:xfrm>
-            <a:off x="5166360" y="685800"/>
-            <a:ext cx="274320" cy="274320"/>
-          </a:xfrm>
-          <a:prstGeom prst="rect">
-            <a:avLst/>
-          </a:prstGeom>
-          <a:noFill/>
-          <a:ln/>
-        </p:spPr>
-        <p:txBody>
-          <a:bodyPr wrap="square" lIns="0" tIns="0" rIns="0" bIns="0" rtlCol="0" anchor="ctr"/>
-          <a:lstStyle/>
-          <a:p>
-            <a:pPr algn="ctr" indent="0" marL="0">
-              <a:buNone/>
-            </a:pPr>
-            <a:r>
-              <a:rPr lang="en-US" sz="1200" dirty="0">
-                <a:solidFill>
-                  <a:srgbClr val="333333"/>
-                </a:solidFill>
-                <a:latin typeface="Arial" pitchFamily="34" charset="0"/>
-                <a:ea typeface="Arial" pitchFamily="34" charset="-122"/>
-                <a:cs typeface="Arial" pitchFamily="34" charset="-120"/>
-              </a:rPr>
-              <a:t>+</a:t>
-            </a:r>
-            <a:endParaRPr lang="en-US" sz="1200" dirty="0"/>
-          </a:p>
-        </p:txBody>
-      </p:sp>
-      <p:sp>
-        <p:nvSpPr>
-          <p:cNvPr id="6" name="Text 4"/>
-          <p:cNvSpPr/>
-          <p:nvPr/>
-        </p:nvSpPr>
-        <p:spPr>
-          <a:xfrm>
-            <a:off x="6629400" y="685800"/>
-            <a:ext cx="274320" cy="274320"/>
-          </a:xfrm>
-          <a:prstGeom prst="rect">
-            <a:avLst/>
-          </a:prstGeom>
-          <a:noFill/>
-          <a:ln/>
-        </p:spPr>
-        <p:txBody>
-          <a:bodyPr wrap="square" lIns="0" tIns="0" rIns="0" bIns="0" rtlCol="0" anchor="ctr"/>
-          <a:lstStyle/>
-          <a:p>
-            <a:pPr algn="ctr" indent="0" marL="0">
-              <a:buNone/>
-            </a:pPr>
-            <a:r>
-              <a:rPr lang="en-US" sz="1200" dirty="0">
-                <a:solidFill>
-                  <a:srgbClr val="333333"/>
-                </a:solidFill>
-                <a:latin typeface="Arial" pitchFamily="34" charset="0"/>
-                <a:ea typeface="Arial" pitchFamily="34" charset="-122"/>
-                <a:cs typeface="Arial" pitchFamily="34" charset="-120"/>
-              </a:rPr>
-              <a:t>+</a:t>
-            </a:r>
-            <a:endParaRPr lang="en-US" sz="1200" dirty="0"/>
-          </a:p>
-        </p:txBody>
-      </p:sp>
-      <p:sp>
-        <p:nvSpPr>
-          <p:cNvPr id="7" name="Text 5"/>
-          <p:cNvSpPr/>
-          <p:nvPr/>
-        </p:nvSpPr>
-        <p:spPr>
-          <a:xfrm>
-            <a:off x="8092440" y="685800"/>
-            <a:ext cx="274320" cy="274320"/>
-          </a:xfrm>
-          <a:prstGeom prst="rect">
-            <a:avLst/>
-          </a:prstGeom>
-          <a:noFill/>
-          <a:ln/>
-        </p:spPr>
-        <p:txBody>
-          <a:bodyPr wrap="square" lIns="0" tIns="0" rIns="0" bIns="0" rtlCol="0" anchor="ctr"/>
-          <a:lstStyle/>
-          <a:p>
-            <a:pPr algn="ctr" indent="0" marL="0">
-              <a:buNone/>
-            </a:pPr>
-            <a:r>
-              <a:rPr lang="en-US" sz="1200" dirty="0">
-                <a:solidFill>
-                  <a:srgbClr val="333333"/>
-                </a:solidFill>
-                <a:latin typeface="Arial" pitchFamily="34" charset="0"/>
-                <a:ea typeface="Arial" pitchFamily="34" charset="-122"/>
-                <a:cs typeface="Arial" pitchFamily="34" charset="-120"/>
-              </a:rPr>
-              <a:t>+</a:t>
-            </a:r>
-            <a:endParaRPr lang="en-US" sz="1200" dirty="0"/>
-          </a:p>
-        </p:txBody>
-      </p:sp>
-      <p:sp>
-        <p:nvSpPr>
-          <p:cNvPr id="8" name="Text 6"/>
-          <p:cNvSpPr/>
-          <p:nvPr/>
-        </p:nvSpPr>
-        <p:spPr>
-          <a:xfrm>
-            <a:off x="9555480" y="685800"/>
-            <a:ext cx="274320" cy="274320"/>
-          </a:xfrm>
-          <a:prstGeom prst="rect">
-            <a:avLst/>
-          </a:prstGeom>
-          <a:noFill/>
-          <a:ln/>
-        </p:spPr>
-        <p:txBody>
-          <a:bodyPr wrap="square" lIns="0" tIns="0" rIns="0" bIns="0" rtlCol="0" anchor="ctr"/>
-          <a:lstStyle/>
-          <a:p>
-            <a:pPr algn="ctr" indent="0" marL="0">
-              <a:buNone/>
-            </a:pPr>
-            <a:r>
-              <a:rPr lang="en-US" sz="1200" dirty="0">
-                <a:solidFill>
-                  <a:srgbClr val="333333"/>
-                </a:solidFill>
-                <a:latin typeface="Arial" pitchFamily="34" charset="0"/>
-                <a:ea typeface="Arial" pitchFamily="34" charset="-122"/>
-                <a:cs typeface="Arial" pitchFamily="34" charset="-120"/>
-              </a:rPr>
-              <a:t>+</a:t>
-            </a:r>
-            <a:endParaRPr lang="en-US" sz="1200" dirty="0"/>
-          </a:p>
-        </p:txBody>
-      </p:sp>
-      <p:sp>
-        <p:nvSpPr>
-          <p:cNvPr id="9" name="Text 7"/>
-          <p:cNvSpPr/>
-          <p:nvPr/>
-        </p:nvSpPr>
-        <p:spPr>
-          <a:xfrm>
-            <a:off x="11018520" y="685800"/>
-            <a:ext cx="274320" cy="274320"/>
-          </a:xfrm>
-          <a:prstGeom prst="rect">
-            <a:avLst/>
-          </a:prstGeom>
-          <a:noFill/>
-          <a:ln/>
-        </p:spPr>
-        <p:txBody>
-          <a:bodyPr wrap="square" lIns="0" tIns="0" rIns="0" bIns="0" rtlCol="0" anchor="ctr"/>
-          <a:lstStyle/>
-          <a:p>
-            <a:pPr algn="ctr" indent="0" marL="0">
-              <a:buNone/>
-            </a:pPr>
-            <a:r>
-              <a:rPr lang="en-US" sz="1200" dirty="0">
-                <a:solidFill>
-                  <a:srgbClr val="333333"/>
-                </a:solidFill>
-                <a:latin typeface="Arial" pitchFamily="34" charset="0"/>
-                <a:ea typeface="Arial" pitchFamily="34" charset="-122"/>
-                <a:cs typeface="Arial" pitchFamily="34" charset="-120"/>
-              </a:rPr>
-              <a:t>+</a:t>
-            </a:r>
-            <a:endParaRPr lang="en-US" sz="1200" dirty="0"/>
-          </a:p>
-        </p:txBody>
-      </p:sp>
-      <p:sp>
-        <p:nvSpPr>
-          <p:cNvPr id="10" name="Text 8"/>
-          <p:cNvSpPr/>
-          <p:nvPr/>
-        </p:nvSpPr>
-        <p:spPr>
-          <a:xfrm>
-            <a:off x="777240" y="1874520"/>
-            <a:ext cx="274320" cy="274320"/>
-          </a:xfrm>
-          <a:prstGeom prst="rect">
-            <a:avLst/>
-          </a:prstGeom>
-          <a:noFill/>
-          <a:ln/>
-        </p:spPr>
-        <p:txBody>
-          <a:bodyPr wrap="square" lIns="0" tIns="0" rIns="0" bIns="0" rtlCol="0" anchor="ctr"/>
-          <a:lstStyle/>
-          <a:p>
-            <a:pPr algn="ctr" indent="0" marL="0">
-              <a:buNone/>
-            </a:pPr>
-            <a:r>
-              <a:rPr lang="en-US" sz="1200" dirty="0">
-                <a:solidFill>
-                  <a:srgbClr val="333333"/>
-                </a:solidFill>
-                <a:latin typeface="Arial" pitchFamily="34" charset="0"/>
-                <a:ea typeface="Arial" pitchFamily="34" charset="-122"/>
-                <a:cs typeface="Arial" pitchFamily="34" charset="-120"/>
-              </a:rPr>
-              <a:t>+</a:t>
-            </a:r>
-            <a:endParaRPr lang="en-US" sz="1200" dirty="0"/>
-          </a:p>
-        </p:txBody>
-      </p:sp>
-      <p:sp>
-        <p:nvSpPr>
-          <p:cNvPr id="11" name="Text 9"/>
-          <p:cNvSpPr/>
-          <p:nvPr/>
-        </p:nvSpPr>
-        <p:spPr>
-          <a:xfrm>
-            <a:off x="2240280" y="1874520"/>
-            <a:ext cx="274320" cy="274320"/>
-          </a:xfrm>
-          <a:prstGeom prst="rect">
-            <a:avLst/>
-          </a:prstGeom>
-          <a:noFill/>
-          <a:ln/>
-        </p:spPr>
-        <p:txBody>
-          <a:bodyPr wrap="square" lIns="0" tIns="0" rIns="0" bIns="0" rtlCol="0" anchor="ctr"/>
-          <a:lstStyle/>
-          <a:p>
-            <a:pPr algn="ctr" indent="0" marL="0">
-              <a:buNone/>
-            </a:pPr>
-            <a:r>
-              <a:rPr lang="en-US" sz="1200" dirty="0">
-                <a:solidFill>
-                  <a:srgbClr val="333333"/>
-                </a:solidFill>
-                <a:latin typeface="Arial" pitchFamily="34" charset="0"/>
-                <a:ea typeface="Arial" pitchFamily="34" charset="-122"/>
-                <a:cs typeface="Arial" pitchFamily="34" charset="-120"/>
-              </a:rPr>
-              <a:t>+</a:t>
-            </a:r>
-            <a:endParaRPr lang="en-US" sz="1200" dirty="0"/>
-          </a:p>
-        </p:txBody>
-      </p:sp>
-      <p:sp>
-        <p:nvSpPr>
-          <p:cNvPr id="12" name="Text 10"/>
-          <p:cNvSpPr/>
-          <p:nvPr/>
-        </p:nvSpPr>
-        <p:spPr>
-          <a:xfrm>
-            <a:off x="3703320" y="1874520"/>
-            <a:ext cx="274320" cy="274320"/>
-          </a:xfrm>
-          <a:prstGeom prst="rect">
-            <a:avLst/>
-          </a:prstGeom>
-          <a:noFill/>
-          <a:ln/>
-        </p:spPr>
-        <p:txBody>
-          <a:bodyPr wrap="square" lIns="0" tIns="0" rIns="0" bIns="0" rtlCol="0" anchor="ctr"/>
-          <a:lstStyle/>
-          <a:p>
-            <a:pPr algn="ctr" indent="0" marL="0">
-              <a:buNone/>
-            </a:pPr>
-            <a:r>
-              <a:rPr lang="en-US" sz="1200" dirty="0">
-                <a:solidFill>
-                  <a:srgbClr val="333333"/>
-                </a:solidFill>
-                <a:latin typeface="Arial" pitchFamily="34" charset="0"/>
-                <a:ea typeface="Arial" pitchFamily="34" charset="-122"/>
-                <a:cs typeface="Arial" pitchFamily="34" charset="-120"/>
-              </a:rPr>
-              <a:t>+</a:t>
-            </a:r>
-            <a:endParaRPr lang="en-US" sz="1200" dirty="0"/>
-          </a:p>
-        </p:txBody>
-      </p:sp>
-      <p:sp>
-        <p:nvSpPr>
-          <p:cNvPr id="13" name="Text 11"/>
-          <p:cNvSpPr/>
-          <p:nvPr/>
-        </p:nvSpPr>
-        <p:spPr>
-          <a:xfrm>
-            <a:off x="5166360" y="1874520"/>
-            <a:ext cx="274320" cy="274320"/>
-          </a:xfrm>
-          <a:prstGeom prst="rect">
-            <a:avLst/>
-          </a:prstGeom>
-          <a:noFill/>
-          <a:ln/>
-        </p:spPr>
-        <p:txBody>
-          <a:bodyPr wrap="square" lIns="0" tIns="0" rIns="0" bIns="0" rtlCol="0" anchor="ctr"/>
-          <a:lstStyle/>
-          <a:p>
-            <a:pPr algn="ctr" indent="0" marL="0">
-              <a:buNone/>
-            </a:pPr>
-            <a:r>
-              <a:rPr lang="en-US" sz="1200" dirty="0">
-                <a:solidFill>
-                  <a:srgbClr val="333333"/>
-                </a:solidFill>
-                <a:latin typeface="Arial" pitchFamily="34" charset="0"/>
-                <a:ea typeface="Arial" pitchFamily="34" charset="-122"/>
-                <a:cs typeface="Arial" pitchFamily="34" charset="-120"/>
-              </a:rPr>
-              <a:t>+</a:t>
-            </a:r>
-            <a:endParaRPr lang="en-US" sz="1200" dirty="0"/>
-          </a:p>
-        </p:txBody>
-      </p:sp>
-      <p:sp>
-        <p:nvSpPr>
-          <p:cNvPr id="14" name="Text 12"/>
-          <p:cNvSpPr/>
-          <p:nvPr/>
-        </p:nvSpPr>
-        <p:spPr>
-          <a:xfrm>
-            <a:off x="6629400" y="1874520"/>
-            <a:ext cx="274320" cy="274320"/>
-          </a:xfrm>
-          <a:prstGeom prst="rect">
-            <a:avLst/>
-          </a:prstGeom>
-          <a:noFill/>
-          <a:ln/>
-        </p:spPr>
-        <p:txBody>
-          <a:bodyPr wrap="square" lIns="0" tIns="0" rIns="0" bIns="0" rtlCol="0" anchor="ctr"/>
-          <a:lstStyle/>
-          <a:p>
-            <a:pPr algn="ctr" indent="0" marL="0">
-              <a:buNone/>
-            </a:pPr>
-            <a:r>
-              <a:rPr lang="en-US" sz="1200" dirty="0">
-                <a:solidFill>
-                  <a:srgbClr val="333333"/>
-                </a:solidFill>
-                <a:latin typeface="Arial" pitchFamily="34" charset="0"/>
-                <a:ea typeface="Arial" pitchFamily="34" charset="-122"/>
-                <a:cs typeface="Arial" pitchFamily="34" charset="-120"/>
-              </a:rPr>
-              <a:t>+</a:t>
-            </a:r>
-            <a:endParaRPr lang="en-US" sz="1200" dirty="0"/>
-          </a:p>
-        </p:txBody>
-      </p:sp>
-      <p:sp>
-        <p:nvSpPr>
-          <p:cNvPr id="15" name="Text 13"/>
-          <p:cNvSpPr/>
-          <p:nvPr/>
-        </p:nvSpPr>
-        <p:spPr>
-          <a:xfrm>
-            <a:off x="8092440" y="1874520"/>
-            <a:ext cx="274320" cy="274320"/>
-          </a:xfrm>
-          <a:prstGeom prst="rect">
-            <a:avLst/>
-          </a:prstGeom>
-          <a:noFill/>
-          <a:ln/>
-        </p:spPr>
-        <p:txBody>
-          <a:bodyPr wrap="square" lIns="0" tIns="0" rIns="0" bIns="0" rtlCol="0" anchor="ctr"/>
-          <a:lstStyle/>
-          <a:p>
-            <a:pPr algn="ctr" indent="0" marL="0">
-              <a:buNone/>
-            </a:pPr>
-            <a:r>
-              <a:rPr lang="en-US" sz="1200" dirty="0">
-                <a:solidFill>
-                  <a:srgbClr val="333333"/>
-                </a:solidFill>
-                <a:latin typeface="Arial" pitchFamily="34" charset="0"/>
-                <a:ea typeface="Arial" pitchFamily="34" charset="-122"/>
-                <a:cs typeface="Arial" pitchFamily="34" charset="-120"/>
-              </a:rPr>
-              <a:t>+</a:t>
-            </a:r>
-            <a:endParaRPr lang="en-US" sz="1200" dirty="0"/>
-          </a:p>
-        </p:txBody>
-      </p:sp>
-      <p:sp>
-        <p:nvSpPr>
-          <p:cNvPr id="16" name="Text 14"/>
-          <p:cNvSpPr/>
-          <p:nvPr/>
-        </p:nvSpPr>
-        <p:spPr>
-          <a:xfrm>
-            <a:off x="9555480" y="1874520"/>
-            <a:ext cx="274320" cy="274320"/>
-          </a:xfrm>
-          <a:prstGeom prst="rect">
-            <a:avLst/>
-          </a:prstGeom>
-          <a:noFill/>
-          <a:ln/>
-        </p:spPr>
-        <p:txBody>
-          <a:bodyPr wrap="square" lIns="0" tIns="0" rIns="0" bIns="0" rtlCol="0" anchor="ctr"/>
-          <a:lstStyle/>
-          <a:p>
-            <a:pPr algn="ctr" indent="0" marL="0">
-              <a:buNone/>
-            </a:pPr>
-            <a:r>
-              <a:rPr lang="en-US" sz="1200" dirty="0">
-                <a:solidFill>
-                  <a:srgbClr val="333333"/>
-                </a:solidFill>
-                <a:latin typeface="Arial" pitchFamily="34" charset="0"/>
-                <a:ea typeface="Arial" pitchFamily="34" charset="-122"/>
-                <a:cs typeface="Arial" pitchFamily="34" charset="-120"/>
-              </a:rPr>
-              <a:t>+</a:t>
-            </a:r>
-            <a:endParaRPr lang="en-US" sz="1200" dirty="0"/>
-          </a:p>
-        </p:txBody>
-      </p:sp>
-      <p:sp>
-        <p:nvSpPr>
-          <p:cNvPr id="17" name="Text 15"/>
-          <p:cNvSpPr/>
-          <p:nvPr/>
-        </p:nvSpPr>
-        <p:spPr>
-          <a:xfrm>
-            <a:off x="11018520" y="1874520"/>
-            <a:ext cx="274320" cy="274320"/>
-          </a:xfrm>
-          <a:prstGeom prst="rect">
-            <a:avLst/>
-          </a:prstGeom>
-          <a:noFill/>
-          <a:ln/>
-        </p:spPr>
-        <p:txBody>
-          <a:bodyPr wrap="square" lIns="0" tIns="0" rIns="0" bIns="0" rtlCol="0" anchor="ctr"/>
-          <a:lstStyle/>
-          <a:p>
-            <a:pPr algn="ctr" indent="0" marL="0">
-              <a:buNone/>
-            </a:pPr>
-            <a:r>
-              <a:rPr lang="en-US" sz="1200" dirty="0">
-                <a:solidFill>
-                  <a:srgbClr val="333333"/>
-                </a:solidFill>
-                <a:latin typeface="Arial" pitchFamily="34" charset="0"/>
-                <a:ea typeface="Arial" pitchFamily="34" charset="-122"/>
-                <a:cs typeface="Arial" pitchFamily="34" charset="-120"/>
-              </a:rPr>
-              <a:t>+</a:t>
-            </a:r>
-            <a:endParaRPr lang="en-US" sz="1200" dirty="0"/>
-          </a:p>
-        </p:txBody>
-      </p:sp>
-      <p:sp>
-        <p:nvSpPr>
-          <p:cNvPr id="18" name="Text 16"/>
-          <p:cNvSpPr/>
-          <p:nvPr/>
-        </p:nvSpPr>
-        <p:spPr>
-          <a:xfrm>
-            <a:off x="777240" y="3063240"/>
-            <a:ext cx="274320" cy="274320"/>
-          </a:xfrm>
-          <a:prstGeom prst="rect">
-            <a:avLst/>
-          </a:prstGeom>
-          <a:noFill/>
-          <a:ln/>
-        </p:spPr>
-        <p:txBody>
-          <a:bodyPr wrap="square" lIns="0" tIns="0" rIns="0" bIns="0" rtlCol="0" anchor="ctr"/>
-          <a:lstStyle/>
-          <a:p>
-            <a:pPr algn="ctr" indent="0" marL="0">
-              <a:buNone/>
-            </a:pPr>
-            <a:r>
-              <a:rPr lang="en-US" sz="1200" dirty="0">
-                <a:solidFill>
-                  <a:srgbClr val="333333"/>
-                </a:solidFill>
-                <a:latin typeface="Arial" pitchFamily="34" charset="0"/>
-                <a:ea typeface="Arial" pitchFamily="34" charset="-122"/>
-                <a:cs typeface="Arial" pitchFamily="34" charset="-120"/>
-              </a:rPr>
-              <a:t>+</a:t>
-            </a:r>
-            <a:endParaRPr lang="en-US" sz="1200" dirty="0"/>
-          </a:p>
-        </p:txBody>
-      </p:sp>
-      <p:sp>
-        <p:nvSpPr>
-          <p:cNvPr id="19" name="Text 17"/>
-          <p:cNvSpPr/>
-          <p:nvPr/>
-        </p:nvSpPr>
-        <p:spPr>
-          <a:xfrm>
-            <a:off x="2240280" y="3063240"/>
-            <a:ext cx="274320" cy="274320"/>
-          </a:xfrm>
-          <a:prstGeom prst="rect">
-            <a:avLst/>
-          </a:prstGeom>
-          <a:noFill/>
-          <a:ln/>
-        </p:spPr>
-        <p:txBody>
-          <a:bodyPr wrap="square" lIns="0" tIns="0" rIns="0" bIns="0" rtlCol="0" anchor="ctr"/>
-          <a:lstStyle/>
-          <a:p>
-            <a:pPr algn="ctr" indent="0" marL="0">
-              <a:buNone/>
-            </a:pPr>
-            <a:r>
-              <a:rPr lang="en-US" sz="1200" dirty="0">
-                <a:solidFill>
-                  <a:srgbClr val="333333"/>
-                </a:solidFill>
-                <a:latin typeface="Arial" pitchFamily="34" charset="0"/>
-                <a:ea typeface="Arial" pitchFamily="34" charset="-122"/>
-                <a:cs typeface="Arial" pitchFamily="34" charset="-120"/>
-              </a:rPr>
-              <a:t>+</a:t>
-            </a:r>
-            <a:endParaRPr lang="en-US" sz="1200" dirty="0"/>
-          </a:p>
-        </p:txBody>
-      </p:sp>
-      <p:sp>
-        <p:nvSpPr>
-          <p:cNvPr id="20" name="Text 18"/>
-          <p:cNvSpPr/>
-          <p:nvPr/>
-        </p:nvSpPr>
-        <p:spPr>
-          <a:xfrm>
-            <a:off x="3703320" y="3063240"/>
-            <a:ext cx="274320" cy="274320"/>
-          </a:xfrm>
-          <a:prstGeom prst="rect">
-            <a:avLst/>
-          </a:prstGeom>
-          <a:noFill/>
-          <a:ln/>
-        </p:spPr>
-        <p:txBody>
-          <a:bodyPr wrap="square" lIns="0" tIns="0" rIns="0" bIns="0" rtlCol="0" anchor="ctr"/>
-          <a:lstStyle/>
-          <a:p>
-            <a:pPr algn="ctr" indent="0" marL="0">
-              <a:buNone/>
-            </a:pPr>
-            <a:r>
-              <a:rPr lang="en-US" sz="1200" dirty="0">
-                <a:solidFill>
-                  <a:srgbClr val="333333"/>
-                </a:solidFill>
-                <a:latin typeface="Arial" pitchFamily="34" charset="0"/>
-                <a:ea typeface="Arial" pitchFamily="34" charset="-122"/>
-                <a:cs typeface="Arial" pitchFamily="34" charset="-120"/>
-              </a:rPr>
-              <a:t>+</a:t>
-            </a:r>
-            <a:endParaRPr lang="en-US" sz="1200" dirty="0"/>
-          </a:p>
-        </p:txBody>
-      </p:sp>
-      <p:sp>
-        <p:nvSpPr>
-          <p:cNvPr id="21" name="Text 19"/>
-          <p:cNvSpPr/>
-          <p:nvPr/>
-        </p:nvSpPr>
-        <p:spPr>
-          <a:xfrm>
-            <a:off x="5166360" y="3063240"/>
-            <a:ext cx="274320" cy="274320"/>
-          </a:xfrm>
-          <a:prstGeom prst="rect">
-            <a:avLst/>
-          </a:prstGeom>
-          <a:noFill/>
-          <a:ln/>
-        </p:spPr>
-        <p:txBody>
-          <a:bodyPr wrap="square" lIns="0" tIns="0" rIns="0" bIns="0" rtlCol="0" anchor="ctr"/>
-          <a:lstStyle/>
-          <a:p>
-            <a:pPr algn="ctr" indent="0" marL="0">
-              <a:buNone/>
-            </a:pPr>
-            <a:r>
-              <a:rPr lang="en-US" sz="1200" dirty="0">
-                <a:solidFill>
-                  <a:srgbClr val="333333"/>
-                </a:solidFill>
-                <a:latin typeface="Arial" pitchFamily="34" charset="0"/>
-                <a:ea typeface="Arial" pitchFamily="34" charset="-122"/>
-                <a:cs typeface="Arial" pitchFamily="34" charset="-120"/>
-              </a:rPr>
-              <a:t>+</a:t>
-            </a:r>
-            <a:endParaRPr lang="en-US" sz="1200" dirty="0"/>
-          </a:p>
-        </p:txBody>
-      </p:sp>
-      <p:sp>
-        <p:nvSpPr>
-          <p:cNvPr id="22" name="Text 20"/>
-          <p:cNvSpPr/>
-          <p:nvPr/>
-        </p:nvSpPr>
-        <p:spPr>
-          <a:xfrm>
-            <a:off x="6629400" y="3063240"/>
-            <a:ext cx="274320" cy="274320"/>
-          </a:xfrm>
-          <a:prstGeom prst="rect">
-            <a:avLst/>
-          </a:prstGeom>
-          <a:noFill/>
-          <a:ln/>
-        </p:spPr>
-        <p:txBody>
-          <a:bodyPr wrap="square" lIns="0" tIns="0" rIns="0" bIns="0" rtlCol="0" anchor="ctr"/>
-          <a:lstStyle/>
-          <a:p>
-            <a:pPr algn="ctr" indent="0" marL="0">
-              <a:buNone/>
-            </a:pPr>
-            <a:r>
-              <a:rPr lang="en-US" sz="1200" dirty="0">
-                <a:solidFill>
-                  <a:srgbClr val="333333"/>
-                </a:solidFill>
-                <a:latin typeface="Arial" pitchFamily="34" charset="0"/>
-                <a:ea typeface="Arial" pitchFamily="34" charset="-122"/>
-                <a:cs typeface="Arial" pitchFamily="34" charset="-120"/>
-              </a:rPr>
-              <a:t>+</a:t>
-            </a:r>
-            <a:endParaRPr lang="en-US" sz="1200" dirty="0"/>
-          </a:p>
-        </p:txBody>
-      </p:sp>
-      <p:sp>
-        <p:nvSpPr>
-          <p:cNvPr id="23" name="Text 21"/>
-          <p:cNvSpPr/>
-          <p:nvPr/>
-        </p:nvSpPr>
-        <p:spPr>
-          <a:xfrm>
-            <a:off x="8092440" y="3063240"/>
-            <a:ext cx="274320" cy="274320"/>
-          </a:xfrm>
-          <a:prstGeom prst="rect">
-            <a:avLst/>
-          </a:prstGeom>
-          <a:noFill/>
-          <a:ln/>
-        </p:spPr>
-        <p:txBody>
-          <a:bodyPr wrap="square" lIns="0" tIns="0" rIns="0" bIns="0" rtlCol="0" anchor="ctr"/>
-          <a:lstStyle/>
-          <a:p>
-            <a:pPr algn="ctr" indent="0" marL="0">
-              <a:buNone/>
-            </a:pPr>
-            <a:r>
-              <a:rPr lang="en-US" sz="1200" dirty="0">
-                <a:solidFill>
-                  <a:srgbClr val="333333"/>
-                </a:solidFill>
-                <a:latin typeface="Arial" pitchFamily="34" charset="0"/>
-                <a:ea typeface="Arial" pitchFamily="34" charset="-122"/>
-                <a:cs typeface="Arial" pitchFamily="34" charset="-120"/>
-              </a:rPr>
-              <a:t>+</a:t>
-            </a:r>
-            <a:endParaRPr lang="en-US" sz="1200" dirty="0"/>
-          </a:p>
-        </p:txBody>
-      </p:sp>
-      <p:sp>
-        <p:nvSpPr>
-          <p:cNvPr id="24" name="Text 22"/>
-          <p:cNvSpPr/>
-          <p:nvPr/>
-        </p:nvSpPr>
-        <p:spPr>
-          <a:xfrm>
-            <a:off x="9555480" y="3063240"/>
-            <a:ext cx="274320" cy="274320"/>
-          </a:xfrm>
-          <a:prstGeom prst="rect">
-            <a:avLst/>
-          </a:prstGeom>
-          <a:noFill/>
-          <a:ln/>
-        </p:spPr>
-        <p:txBody>
-          <a:bodyPr wrap="square" lIns="0" tIns="0" rIns="0" bIns="0" rtlCol="0" anchor="ctr"/>
-          <a:lstStyle/>
-          <a:p>
-            <a:pPr algn="ctr" indent="0" marL="0">
-              <a:buNone/>
-            </a:pPr>
-            <a:r>
-              <a:rPr lang="en-US" sz="1200" dirty="0">
-                <a:solidFill>
-                  <a:srgbClr val="333333"/>
-                </a:solidFill>
-                <a:latin typeface="Arial" pitchFamily="34" charset="0"/>
-                <a:ea typeface="Arial" pitchFamily="34" charset="-122"/>
-                <a:cs typeface="Arial" pitchFamily="34" charset="-120"/>
-              </a:rPr>
-              <a:t>+</a:t>
-            </a:r>
-            <a:endParaRPr lang="en-US" sz="1200" dirty="0"/>
-          </a:p>
-        </p:txBody>
-      </p:sp>
-      <p:sp>
-        <p:nvSpPr>
-          <p:cNvPr id="25" name="Text 23"/>
-          <p:cNvSpPr/>
-          <p:nvPr/>
-        </p:nvSpPr>
-        <p:spPr>
-          <a:xfrm>
-            <a:off x="11018520" y="3063240"/>
-            <a:ext cx="274320" cy="274320"/>
-          </a:xfrm>
-          <a:prstGeom prst="rect">
-            <a:avLst/>
-          </a:prstGeom>
-          <a:noFill/>
-          <a:ln/>
-        </p:spPr>
-        <p:txBody>
-          <a:bodyPr wrap="square" lIns="0" tIns="0" rIns="0" bIns="0" rtlCol="0" anchor="ctr"/>
-          <a:lstStyle/>
-          <a:p>
-            <a:pPr algn="ctr" indent="0" marL="0">
-              <a:buNone/>
-            </a:pPr>
-            <a:r>
-              <a:rPr lang="en-US" sz="1200" dirty="0">
-                <a:solidFill>
-                  <a:srgbClr val="333333"/>
-                </a:solidFill>
-                <a:latin typeface="Arial" pitchFamily="34" charset="0"/>
-                <a:ea typeface="Arial" pitchFamily="34" charset="-122"/>
-                <a:cs typeface="Arial" pitchFamily="34" charset="-120"/>
-              </a:rPr>
-              <a:t>+</a:t>
-            </a:r>
-            <a:endParaRPr lang="en-US" sz="1200" dirty="0"/>
-          </a:p>
-        </p:txBody>
-      </p:sp>
-      <p:sp>
-        <p:nvSpPr>
-          <p:cNvPr id="26" name="Text 24"/>
-          <p:cNvSpPr/>
-          <p:nvPr/>
-        </p:nvSpPr>
-        <p:spPr>
-          <a:xfrm>
-            <a:off x="777240" y="4251960"/>
-            <a:ext cx="274320" cy="274320"/>
-          </a:xfrm>
-          <a:prstGeom prst="rect">
-            <a:avLst/>
-          </a:prstGeom>
-          <a:noFill/>
-          <a:ln/>
-        </p:spPr>
-        <p:txBody>
-          <a:bodyPr wrap="square" lIns="0" tIns="0" rIns="0" bIns="0" rtlCol="0" anchor="ctr"/>
-          <a:lstStyle/>
-          <a:p>
-            <a:pPr algn="ctr" indent="0" marL="0">
-              <a:buNone/>
-            </a:pPr>
-            <a:r>
-              <a:rPr lang="en-US" sz="1200" dirty="0">
-                <a:solidFill>
-                  <a:srgbClr val="333333"/>
-                </a:solidFill>
-                <a:latin typeface="Arial" pitchFamily="34" charset="0"/>
-                <a:ea typeface="Arial" pitchFamily="34" charset="-122"/>
-                <a:cs typeface="Arial" pitchFamily="34" charset="-120"/>
-              </a:rPr>
-              <a:t>+</a:t>
-            </a:r>
-            <a:endParaRPr lang="en-US" sz="1200" dirty="0"/>
-          </a:p>
-        </p:txBody>
-      </p:sp>
-      <p:sp>
-        <p:nvSpPr>
-          <p:cNvPr id="27" name="Text 25"/>
-          <p:cNvSpPr/>
-          <p:nvPr/>
-        </p:nvSpPr>
-        <p:spPr>
-          <a:xfrm>
-            <a:off x="2240280" y="4251960"/>
-            <a:ext cx="274320" cy="274320"/>
-          </a:xfrm>
-          <a:prstGeom prst="rect">
-            <a:avLst/>
-          </a:prstGeom>
-          <a:noFill/>
-          <a:ln/>
-        </p:spPr>
-        <p:txBody>
-          <a:bodyPr wrap="square" lIns="0" tIns="0" rIns="0" bIns="0" rtlCol="0" anchor="ctr"/>
-          <a:lstStyle/>
-          <a:p>
-            <a:pPr algn="ctr" indent="0" marL="0">
-              <a:buNone/>
-            </a:pPr>
-            <a:r>
-              <a:rPr lang="en-US" sz="1200" dirty="0">
-                <a:solidFill>
-                  <a:srgbClr val="333333"/>
-                </a:solidFill>
-                <a:latin typeface="Arial" pitchFamily="34" charset="0"/>
-                <a:ea typeface="Arial" pitchFamily="34" charset="-122"/>
-                <a:cs typeface="Arial" pitchFamily="34" charset="-120"/>
-              </a:rPr>
-              <a:t>+</a:t>
-            </a:r>
-            <a:endParaRPr lang="en-US" sz="1200" dirty="0"/>
-          </a:p>
-        </p:txBody>
-      </p:sp>
-      <p:sp>
-        <p:nvSpPr>
-          <p:cNvPr id="28" name="Text 26"/>
-          <p:cNvSpPr/>
-          <p:nvPr/>
-        </p:nvSpPr>
-        <p:spPr>
-          <a:xfrm>
-            <a:off x="3703320" y="4251960"/>
-            <a:ext cx="274320" cy="274320"/>
-          </a:xfrm>
-          <a:prstGeom prst="rect">
-            <a:avLst/>
-          </a:prstGeom>
-          <a:noFill/>
-          <a:ln/>
-        </p:spPr>
-        <p:txBody>
-          <a:bodyPr wrap="square" lIns="0" tIns="0" rIns="0" bIns="0" rtlCol="0" anchor="ctr"/>
-          <a:lstStyle/>
-          <a:p>
-            <a:pPr algn="ctr" indent="0" marL="0">
-              <a:buNone/>
-            </a:pPr>
-            <a:r>
-              <a:rPr lang="en-US" sz="1200" dirty="0">
-                <a:solidFill>
-                  <a:srgbClr val="333333"/>
-                </a:solidFill>
-                <a:latin typeface="Arial" pitchFamily="34" charset="0"/>
-                <a:ea typeface="Arial" pitchFamily="34" charset="-122"/>
-                <a:cs typeface="Arial" pitchFamily="34" charset="-120"/>
-              </a:rPr>
-              <a:t>+</a:t>
-            </a:r>
-            <a:endParaRPr lang="en-US" sz="1200" dirty="0"/>
-          </a:p>
-        </p:txBody>
-      </p:sp>
-      <p:sp>
-        <p:nvSpPr>
-          <p:cNvPr id="29" name="Text 27"/>
-          <p:cNvSpPr/>
-          <p:nvPr/>
-        </p:nvSpPr>
-        <p:spPr>
-          <a:xfrm>
-            <a:off x="5166360" y="4251960"/>
-            <a:ext cx="274320" cy="274320"/>
-          </a:xfrm>
-          <a:prstGeom prst="rect">
-            <a:avLst/>
-          </a:prstGeom>
-          <a:noFill/>
-          <a:ln/>
-        </p:spPr>
-        <p:txBody>
-          <a:bodyPr wrap="square" lIns="0" tIns="0" rIns="0" bIns="0" rtlCol="0" anchor="ctr"/>
-          <a:lstStyle/>
-          <a:p>
-            <a:pPr algn="ctr" indent="0" marL="0">
-              <a:buNone/>
-            </a:pPr>
-            <a:r>
-              <a:rPr lang="en-US" sz="1200" dirty="0">
-                <a:solidFill>
-                  <a:srgbClr val="333333"/>
-                </a:solidFill>
-                <a:latin typeface="Arial" pitchFamily="34" charset="0"/>
-                <a:ea typeface="Arial" pitchFamily="34" charset="-122"/>
-                <a:cs typeface="Arial" pitchFamily="34" charset="-120"/>
-              </a:rPr>
-              <a:t>+</a:t>
-            </a:r>
-            <a:endParaRPr lang="en-US" sz="1200" dirty="0"/>
-          </a:p>
-        </p:txBody>
-      </p:sp>
-      <p:sp>
-        <p:nvSpPr>
-          <p:cNvPr id="30" name="Text 28"/>
-          <p:cNvSpPr/>
-          <p:nvPr/>
-        </p:nvSpPr>
-        <p:spPr>
-          <a:xfrm>
-            <a:off x="6629400" y="4251960"/>
-            <a:ext cx="274320" cy="274320"/>
-          </a:xfrm>
-          <a:prstGeom prst="rect">
-            <a:avLst/>
-          </a:prstGeom>
-          <a:noFill/>
-          <a:ln/>
-        </p:spPr>
-        <p:txBody>
-          <a:bodyPr wrap="square" lIns="0" tIns="0" rIns="0" bIns="0" rtlCol="0" anchor="ctr"/>
-          <a:lstStyle/>
-          <a:p>
-            <a:pPr algn="ctr" indent="0" marL="0">
-              <a:buNone/>
-            </a:pPr>
-            <a:r>
-              <a:rPr lang="en-US" sz="1200" dirty="0">
-                <a:solidFill>
-                  <a:srgbClr val="333333"/>
-                </a:solidFill>
-                <a:latin typeface="Arial" pitchFamily="34" charset="0"/>
-                <a:ea typeface="Arial" pitchFamily="34" charset="-122"/>
-                <a:cs typeface="Arial" pitchFamily="34" charset="-120"/>
-              </a:rPr>
-              <a:t>+</a:t>
-            </a:r>
-            <a:endParaRPr lang="en-US" sz="1200" dirty="0"/>
-          </a:p>
-        </p:txBody>
-      </p:sp>
-      <p:sp>
-        <p:nvSpPr>
-          <p:cNvPr id="31" name="Text 29"/>
-          <p:cNvSpPr/>
-          <p:nvPr/>
-        </p:nvSpPr>
-        <p:spPr>
-          <a:xfrm>
-            <a:off x="8092440" y="4251960"/>
-            <a:ext cx="274320" cy="274320"/>
-          </a:xfrm>
-          <a:prstGeom prst="rect">
-            <a:avLst/>
-          </a:prstGeom>
-          <a:noFill/>
-          <a:ln/>
-        </p:spPr>
-        <p:txBody>
-          <a:bodyPr wrap="square" lIns="0" tIns="0" rIns="0" bIns="0" rtlCol="0" anchor="ctr"/>
-          <a:lstStyle/>
-          <a:p>
-            <a:pPr algn="ctr" indent="0" marL="0">
-              <a:buNone/>
-            </a:pPr>
-            <a:r>
-              <a:rPr lang="en-US" sz="1200" dirty="0">
-                <a:solidFill>
-                  <a:srgbClr val="333333"/>
-                </a:solidFill>
-                <a:latin typeface="Arial" pitchFamily="34" charset="0"/>
-                <a:ea typeface="Arial" pitchFamily="34" charset="-122"/>
-                <a:cs typeface="Arial" pitchFamily="34" charset="-120"/>
-              </a:rPr>
-              <a:t>+</a:t>
-            </a:r>
-            <a:endParaRPr lang="en-US" sz="1200" dirty="0"/>
-          </a:p>
-        </p:txBody>
-      </p:sp>
-      <p:sp>
-        <p:nvSpPr>
-          <p:cNvPr id="32" name="Text 30"/>
-          <p:cNvSpPr/>
-          <p:nvPr/>
-        </p:nvSpPr>
-        <p:spPr>
-          <a:xfrm>
-            <a:off x="9555480" y="4251960"/>
-            <a:ext cx="274320" cy="274320"/>
-          </a:xfrm>
-          <a:prstGeom prst="rect">
-            <a:avLst/>
-          </a:prstGeom>
-          <a:noFill/>
-          <a:ln/>
-        </p:spPr>
-        <p:txBody>
-          <a:bodyPr wrap="square" lIns="0" tIns="0" rIns="0" bIns="0" rtlCol="0" anchor="ctr"/>
-          <a:lstStyle/>
-          <a:p>
-            <a:pPr algn="ctr" indent="0" marL="0">
-              <a:buNone/>
-            </a:pPr>
-            <a:r>
-              <a:rPr lang="en-US" sz="1200" dirty="0">
-                <a:solidFill>
-                  <a:srgbClr val="333333"/>
-                </a:solidFill>
-                <a:latin typeface="Arial" pitchFamily="34" charset="0"/>
-                <a:ea typeface="Arial" pitchFamily="34" charset="-122"/>
-                <a:cs typeface="Arial" pitchFamily="34" charset="-120"/>
-              </a:rPr>
-              <a:t>+</a:t>
-            </a:r>
-            <a:endParaRPr lang="en-US" sz="1200" dirty="0"/>
-          </a:p>
-        </p:txBody>
-      </p:sp>
-      <p:sp>
-        <p:nvSpPr>
-          <p:cNvPr id="33" name="Text 31"/>
-          <p:cNvSpPr/>
-          <p:nvPr/>
-        </p:nvSpPr>
-        <p:spPr>
-          <a:xfrm>
-            <a:off x="11018520" y="4251960"/>
-            <a:ext cx="274320" cy="274320"/>
-          </a:xfrm>
-          <a:prstGeom prst="rect">
-            <a:avLst/>
-          </a:prstGeom>
-          <a:noFill/>
-          <a:ln/>
-        </p:spPr>
-        <p:txBody>
-          <a:bodyPr wrap="square" lIns="0" tIns="0" rIns="0" bIns="0" rtlCol="0" anchor="ctr"/>
-          <a:lstStyle/>
-          <a:p>
-            <a:pPr algn="ctr" indent="0" marL="0">
-              <a:buNone/>
-            </a:pPr>
-            <a:r>
-              <a:rPr lang="en-US" sz="1200" dirty="0">
-                <a:solidFill>
-                  <a:srgbClr val="333333"/>
-                </a:solidFill>
-                <a:latin typeface="Arial" pitchFamily="34" charset="0"/>
-                <a:ea typeface="Arial" pitchFamily="34" charset="-122"/>
-                <a:cs typeface="Arial" pitchFamily="34" charset="-120"/>
-              </a:rPr>
-              <a:t>+</a:t>
-            </a:r>
-            <a:endParaRPr lang="en-US" sz="1200" dirty="0"/>
-          </a:p>
-        </p:txBody>
-      </p:sp>
-      <p:sp>
-        <p:nvSpPr>
-          <p:cNvPr id="34" name="Text 32"/>
-          <p:cNvSpPr/>
-          <p:nvPr/>
-        </p:nvSpPr>
-        <p:spPr>
-          <a:xfrm>
-            <a:off x="777240" y="5440680"/>
-            <a:ext cx="274320" cy="274320"/>
-          </a:xfrm>
-          <a:prstGeom prst="rect">
-            <a:avLst/>
-          </a:prstGeom>
-          <a:noFill/>
-          <a:ln/>
-        </p:spPr>
-        <p:txBody>
-          <a:bodyPr wrap="square" lIns="0" tIns="0" rIns="0" bIns="0" rtlCol="0" anchor="ctr"/>
-          <a:lstStyle/>
-          <a:p>
-            <a:pPr algn="ctr" indent="0" marL="0">
-              <a:buNone/>
-            </a:pPr>
-            <a:r>
-              <a:rPr lang="en-US" sz="1200" dirty="0">
-                <a:solidFill>
-                  <a:srgbClr val="333333"/>
-                </a:solidFill>
-                <a:latin typeface="Arial" pitchFamily="34" charset="0"/>
-                <a:ea typeface="Arial" pitchFamily="34" charset="-122"/>
-                <a:cs typeface="Arial" pitchFamily="34" charset="-120"/>
-              </a:rPr>
-              <a:t>+</a:t>
-            </a:r>
-            <a:endParaRPr lang="en-US" sz="1200" dirty="0"/>
-          </a:p>
-        </p:txBody>
-      </p:sp>
-      <p:sp>
-        <p:nvSpPr>
-          <p:cNvPr id="35" name="Text 33"/>
-          <p:cNvSpPr/>
-          <p:nvPr/>
-        </p:nvSpPr>
-        <p:spPr>
-          <a:xfrm>
-            <a:off x="2240280" y="5440680"/>
-            <a:ext cx="274320" cy="274320"/>
-          </a:xfrm>
-          <a:prstGeom prst="rect">
-            <a:avLst/>
-          </a:prstGeom>
-          <a:noFill/>
-          <a:ln/>
-        </p:spPr>
-        <p:txBody>
-          <a:bodyPr wrap="square" lIns="0" tIns="0" rIns="0" bIns="0" rtlCol="0" anchor="ctr"/>
-          <a:lstStyle/>
-          <a:p>
-            <a:pPr algn="ctr" indent="0" marL="0">
-              <a:buNone/>
-            </a:pPr>
-            <a:r>
-              <a:rPr lang="en-US" sz="1200" dirty="0">
-                <a:solidFill>
-                  <a:srgbClr val="333333"/>
-                </a:solidFill>
-                <a:latin typeface="Arial" pitchFamily="34" charset="0"/>
-                <a:ea typeface="Arial" pitchFamily="34" charset="-122"/>
-                <a:cs typeface="Arial" pitchFamily="34" charset="-120"/>
-              </a:rPr>
-              <a:t>+</a:t>
-            </a:r>
-            <a:endParaRPr lang="en-US" sz="1200" dirty="0"/>
-          </a:p>
-        </p:txBody>
-      </p:sp>
-      <p:sp>
-        <p:nvSpPr>
-          <p:cNvPr id="36" name="Text 34"/>
-          <p:cNvSpPr/>
-          <p:nvPr/>
-        </p:nvSpPr>
-        <p:spPr>
-          <a:xfrm>
-            <a:off x="3703320" y="5440680"/>
-            <a:ext cx="274320" cy="274320"/>
-          </a:xfrm>
-          <a:prstGeom prst="rect">
-            <a:avLst/>
-          </a:prstGeom>
-          <a:noFill/>
-          <a:ln/>
-        </p:spPr>
-        <p:txBody>
-          <a:bodyPr wrap="square" lIns="0" tIns="0" rIns="0" bIns="0" rtlCol="0" anchor="ctr"/>
-          <a:lstStyle/>
-          <a:p>
-            <a:pPr algn="ctr" indent="0" marL="0">
-              <a:buNone/>
-            </a:pPr>
-            <a:r>
-              <a:rPr lang="en-US" sz="1200" dirty="0">
-                <a:solidFill>
-                  <a:srgbClr val="333333"/>
-                </a:solidFill>
-                <a:latin typeface="Arial" pitchFamily="34" charset="0"/>
-                <a:ea typeface="Arial" pitchFamily="34" charset="-122"/>
-                <a:cs typeface="Arial" pitchFamily="34" charset="-120"/>
-              </a:rPr>
-              <a:t>+</a:t>
-            </a:r>
-            <a:endParaRPr lang="en-US" sz="1200" dirty="0"/>
-          </a:p>
-        </p:txBody>
-      </p:sp>
-      <p:sp>
-        <p:nvSpPr>
-          <p:cNvPr id="37" name="Text 35"/>
-          <p:cNvSpPr/>
-          <p:nvPr/>
-        </p:nvSpPr>
-        <p:spPr>
-          <a:xfrm>
-            <a:off x="5166360" y="5440680"/>
-            <a:ext cx="274320" cy="274320"/>
-          </a:xfrm>
-          <a:prstGeom prst="rect">
-            <a:avLst/>
-          </a:prstGeom>
-          <a:noFill/>
-          <a:ln/>
-        </p:spPr>
-        <p:txBody>
-          <a:bodyPr wrap="square" lIns="0" tIns="0" rIns="0" bIns="0" rtlCol="0" anchor="ctr"/>
-          <a:lstStyle/>
-          <a:p>
-            <a:pPr algn="ctr" indent="0" marL="0">
-              <a:buNone/>
-            </a:pPr>
-            <a:r>
-              <a:rPr lang="en-US" sz="1200" dirty="0">
-                <a:solidFill>
-                  <a:srgbClr val="333333"/>
-                </a:solidFill>
-                <a:latin typeface="Arial" pitchFamily="34" charset="0"/>
-                <a:ea typeface="Arial" pitchFamily="34" charset="-122"/>
-                <a:cs typeface="Arial" pitchFamily="34" charset="-120"/>
-              </a:rPr>
-              <a:t>+</a:t>
-            </a:r>
-            <a:endParaRPr lang="en-US" sz="1200" dirty="0"/>
-          </a:p>
-        </p:txBody>
-      </p:sp>
-      <p:sp>
-        <p:nvSpPr>
-          <p:cNvPr id="38" name="Text 36"/>
-          <p:cNvSpPr/>
-          <p:nvPr/>
-        </p:nvSpPr>
-        <p:spPr>
-          <a:xfrm>
-            <a:off x="6629400" y="5440680"/>
-            <a:ext cx="274320" cy="274320"/>
-          </a:xfrm>
-          <a:prstGeom prst="rect">
-            <a:avLst/>
-          </a:prstGeom>
-          <a:noFill/>
-          <a:ln/>
-        </p:spPr>
-        <p:txBody>
-          <a:bodyPr wrap="square" lIns="0" tIns="0" rIns="0" bIns="0" rtlCol="0" anchor="ctr"/>
-          <a:lstStyle/>
-          <a:p>
-            <a:pPr algn="ctr" indent="0" marL="0">
-              <a:buNone/>
-            </a:pPr>
-            <a:r>
-              <a:rPr lang="en-US" sz="1200" dirty="0">
-                <a:solidFill>
-                  <a:srgbClr val="333333"/>
-                </a:solidFill>
-                <a:latin typeface="Arial" pitchFamily="34" charset="0"/>
-                <a:ea typeface="Arial" pitchFamily="34" charset="-122"/>
-                <a:cs typeface="Arial" pitchFamily="34" charset="-120"/>
-              </a:rPr>
-              <a:t>+</a:t>
-            </a:r>
-            <a:endParaRPr lang="en-US" sz="1200" dirty="0"/>
-          </a:p>
-        </p:txBody>
-      </p:sp>
-      <p:sp>
-        <p:nvSpPr>
-          <p:cNvPr id="39" name="Text 37"/>
-          <p:cNvSpPr/>
-          <p:nvPr/>
-        </p:nvSpPr>
-        <p:spPr>
-          <a:xfrm>
-            <a:off x="8092440" y="5440680"/>
-            <a:ext cx="274320" cy="274320"/>
-          </a:xfrm>
-          <a:prstGeom prst="rect">
-            <a:avLst/>
-          </a:prstGeom>
-          <a:noFill/>
-          <a:ln/>
-        </p:spPr>
-        <p:txBody>
-          <a:bodyPr wrap="square" lIns="0" tIns="0" rIns="0" bIns="0" rtlCol="0" anchor="ctr"/>
-          <a:lstStyle/>
-          <a:p>
-            <a:pPr algn="ctr" indent="0" marL="0">
-              <a:buNone/>
-            </a:pPr>
-            <a:r>
-              <a:rPr lang="en-US" sz="1200" dirty="0">
-                <a:solidFill>
-                  <a:srgbClr val="333333"/>
-                </a:solidFill>
-                <a:latin typeface="Arial" pitchFamily="34" charset="0"/>
-                <a:ea typeface="Arial" pitchFamily="34" charset="-122"/>
-                <a:cs typeface="Arial" pitchFamily="34" charset="-120"/>
-              </a:rPr>
-              <a:t>+</a:t>
-            </a:r>
-            <a:endParaRPr lang="en-US" sz="1200" dirty="0"/>
-          </a:p>
-        </p:txBody>
-      </p:sp>
-      <p:sp>
-        <p:nvSpPr>
-          <p:cNvPr id="40" name="Text 38"/>
-          <p:cNvSpPr/>
-          <p:nvPr/>
-        </p:nvSpPr>
-        <p:spPr>
-          <a:xfrm>
-            <a:off x="9555480" y="5440680"/>
-            <a:ext cx="274320" cy="274320"/>
-          </a:xfrm>
-          <a:prstGeom prst="rect">
-            <a:avLst/>
-          </a:prstGeom>
-          <a:noFill/>
-          <a:ln/>
-        </p:spPr>
-        <p:txBody>
-          <a:bodyPr wrap="square" lIns="0" tIns="0" rIns="0" bIns="0" rtlCol="0" anchor="ctr"/>
-          <a:lstStyle/>
-          <a:p>
-            <a:pPr algn="ctr" indent="0" marL="0">
-              <a:buNone/>
-            </a:pPr>
-            <a:r>
-              <a:rPr lang="en-US" sz="1200" dirty="0">
-                <a:solidFill>
-                  <a:srgbClr val="333333"/>
-                </a:solidFill>
-                <a:latin typeface="Arial" pitchFamily="34" charset="0"/>
-                <a:ea typeface="Arial" pitchFamily="34" charset="-122"/>
-                <a:cs typeface="Arial" pitchFamily="34" charset="-120"/>
-              </a:rPr>
-              <a:t>+</a:t>
-            </a:r>
-            <a:endParaRPr lang="en-US" sz="1200" dirty="0"/>
-          </a:p>
-        </p:txBody>
-      </p:sp>
-      <p:sp>
-        <p:nvSpPr>
-          <p:cNvPr id="41" name="Text 39"/>
-          <p:cNvSpPr/>
-          <p:nvPr/>
-        </p:nvSpPr>
-        <p:spPr>
-          <a:xfrm>
-            <a:off x="11018520" y="5440680"/>
-            <a:ext cx="274320" cy="274320"/>
-          </a:xfrm>
-          <a:prstGeom prst="rect">
-            <a:avLst/>
-          </a:prstGeom>
-          <a:noFill/>
-          <a:ln/>
-        </p:spPr>
-        <p:txBody>
-          <a:bodyPr wrap="square" lIns="0" tIns="0" rIns="0" bIns="0" rtlCol="0" anchor="ctr"/>
-          <a:lstStyle/>
-          <a:p>
-            <a:pPr algn="ctr" indent="0" marL="0">
-              <a:buNone/>
-            </a:pPr>
-            <a:r>
-              <a:rPr lang="en-US" sz="1200" dirty="0">
-                <a:solidFill>
-                  <a:srgbClr val="333333"/>
-                </a:solidFill>
-                <a:latin typeface="Arial" pitchFamily="34" charset="0"/>
-                <a:ea typeface="Arial" pitchFamily="34" charset="-122"/>
-                <a:cs typeface="Arial" pitchFamily="34" charset="-120"/>
-              </a:rPr>
-              <a:t>+</a:t>
-            </a:r>
-            <a:endParaRPr lang="en-US" sz="1200" dirty="0"/>
-          </a:p>
-        </p:txBody>
-      </p:sp>
-      <p:pic>
-        <p:nvPicPr>
-          <p:cNvPr id="42" name="Image 0" descr="/home/user/data-manipulation-exercises/.claude/skills/brand-guidelines/assets/textures/arrow-lime.png">    </p:cNvPr>
-          <p:cNvPicPr>
-            <a:picLocks noChangeAspect="1"/>
-          </p:cNvPicPr>
-          <p:nvPr/>
-        </p:nvPicPr>
-        <p:blipFill>
-          <a:blip r:embed="rId1"/>
-          <a:stretch>
-            <a:fillRect/>
-          </a:stretch>
-        </p:blipFill>
-        <p:spPr>
-          <a:xfrm rot="16200000">
-            <a:off x="320040" y="320040"/>
-            <a:ext cx="292608" cy="292608"/>
-          </a:xfrm>
-          <a:prstGeom prst="rect">
-            <a:avLst/>
-          </a:prstGeom>
-        </p:spPr>
-      </p:pic>
-      <p:pic>
-        <p:nvPicPr>
-          <p:cNvPr id="43" name="Image 1" descr="/home/user/data-manipulation-exercises/.claude/skills/brand-guidelines/assets/textures/arrow-lime.png">    </p:cNvPr>
-          <p:cNvPicPr>
-            <a:picLocks noChangeAspect="1"/>
-          </p:cNvPicPr>
-          <p:nvPr/>
-        </p:nvPicPr>
-        <p:blipFill>
-          <a:blip r:embed="rId2"/>
-          <a:stretch>
-            <a:fillRect/>
-          </a:stretch>
-        </p:blipFill>
-        <p:spPr>
-          <a:xfrm>
-            <a:off x="11579047" y="320040"/>
-            <a:ext cx="292608" cy="292608"/>
-          </a:xfrm>
-          <a:prstGeom prst="rect">
-            <a:avLst/>
-          </a:prstGeom>
-        </p:spPr>
-      </p:pic>
-      <p:pic>
-        <p:nvPicPr>
-          <p:cNvPr id="44" name="Image 2" descr="/home/user/data-manipulation-exercises/.claude/skills/brand-guidelines/assets/textures/arrow-lime.png">    </p:cNvPr>
-          <p:cNvPicPr>
-            <a:picLocks noChangeAspect="1"/>
-          </p:cNvPicPr>
-          <p:nvPr/>
-        </p:nvPicPr>
-        <p:blipFill>
-          <a:blip r:embed="rId3"/>
-          <a:stretch>
-            <a:fillRect/>
-          </a:stretch>
-        </p:blipFill>
-        <p:spPr>
-          <a:xfrm rot="10800000">
-            <a:off x="320040" y="6245352"/>
-            <a:ext cx="292608" cy="292608"/>
-          </a:xfrm>
-          <a:prstGeom prst="rect">
-            <a:avLst/>
-          </a:prstGeom>
-        </p:spPr>
-      </p:pic>
-      <p:pic>
-        <p:nvPicPr>
-          <p:cNvPr id="45" name="Image 3" descr="/home/user/data-manipulation-exercises/.claude/skills/brand-guidelines/assets/textures/arrow-lime.png">    </p:cNvPr>
-          <p:cNvPicPr>
-            <a:picLocks noChangeAspect="1"/>
-          </p:cNvPicPr>
-          <p:nvPr/>
-        </p:nvPicPr>
-        <p:blipFill>
-          <a:blip r:embed="rId4"/>
-          <a:stretch>
-            <a:fillRect/>
-          </a:stretch>
-        </p:blipFill>
-        <p:spPr>
-          <a:xfrm rot="5400000">
-            <a:off x="11579047" y="6245352"/>
-            <a:ext cx="292608" cy="292608"/>
-          </a:xfrm>
-          <a:prstGeom prst="rect">
-            <a:avLst/>
-          </a:prstGeom>
-        </p:spPr>
-      </p:pic>
-      <p:sp>
-        <p:nvSpPr>
-          <p:cNvPr id="46" name="Text 40"/>
-          <p:cNvSpPr/>
-          <p:nvPr/>
-        </p:nvSpPr>
-        <p:spPr>
-          <a:xfrm>
-            <a:off x="731520" y="2011680"/>
-            <a:ext cx="10728655" cy="2377440"/>
-          </a:xfrm>
-          <a:prstGeom prst="rect">
-            <a:avLst/>
-          </a:prstGeom>
-          <a:noFill/>
-          <a:ln/>
-        </p:spPr>
-        <p:txBody>
-          <a:bodyPr wrap="square" lIns="0" tIns="0" rIns="0" bIns="0" rtlCol="0" anchor="ctr"/>
-          <a:lstStyle/>
-          <a:p>
-            <a:pPr indent="0" marL="0">
-              <a:buNone/>
-            </a:pPr>
-            <a:r>
-              <a:rPr lang="en-US" sz="3000" b="1" i="1" dirty="0">
-                <a:solidFill>
-                  <a:srgbClr val="FFFFFF"/>
-                </a:solidFill>
-                <a:latin typeface="Libre Baskerville" pitchFamily="34" charset="0"/>
-                <a:ea typeface="Libre Baskerville" pitchFamily="34" charset="-122"/>
-                <a:cs typeface="Libre Baskerville" pitchFamily="34" charset="-120"/>
-              </a:rPr>
-              <a:t>Vamos conversar sobre o que</a:t>
-            </a:r>
-            <a:endParaRPr lang="en-US" sz="3000" dirty="0"/>
-          </a:p>
-          <a:p>
-            <a:pPr indent="0" marL="0">
-              <a:buNone/>
-            </a:pPr>
-            <a:r>
-              <a:rPr lang="en-US" sz="3000" b="1" i="1" dirty="0">
-                <a:solidFill>
-                  <a:srgbClr val="FFFFFF"/>
-                </a:solidFill>
-                <a:latin typeface="Libre Baskerville" pitchFamily="34" charset="0"/>
-                <a:ea typeface="Libre Baskerville" pitchFamily="34" charset="-122"/>
-                <a:cs typeface="Libre Baskerville" pitchFamily="34" charset="-120"/>
-              </a:rPr>
-              <a:t>essas tendências significam</a:t>
-            </a:r>
-            <a:endParaRPr lang="en-US" sz="3000" dirty="0"/>
-          </a:p>
-          <a:p>
-            <a:pPr indent="0" marL="0">
-              <a:buNone/>
-            </a:pPr>
-            <a:r>
-              <a:rPr lang="en-US" sz="3000" b="1" i="1" dirty="0">
-                <a:solidFill>
-                  <a:srgbClr val="FFFFFF"/>
-                </a:solidFill>
-                <a:latin typeface="Libre Baskerville" pitchFamily="34" charset="0"/>
-                <a:ea typeface="Libre Baskerville" pitchFamily="34" charset="-122"/>
-                <a:cs typeface="Libre Baskerville" pitchFamily="34" charset="-120"/>
-              </a:rPr>
-              <a:t>pra sua marca?</a:t>
-            </a:r>
-            <a:endParaRPr lang="en-US" sz="3000" dirty="0"/>
-          </a:p>
-        </p:txBody>
-      </p:sp>
-      <p:sp>
-        <p:nvSpPr>
-          <p:cNvPr id="47" name="Text 41"/>
-          <p:cNvSpPr/>
-          <p:nvPr/>
-        </p:nvSpPr>
-        <p:spPr>
-          <a:xfrm>
-            <a:off x="731520" y="4754880"/>
-            <a:ext cx="7315200" cy="457200"/>
-          </a:xfrm>
-          <a:prstGeom prst="rect">
-            <a:avLst/>
-          </a:prstGeom>
-          <a:noFill/>
-          <a:ln/>
-        </p:spPr>
-        <p:txBody>
-          <a:bodyPr wrap="square" lIns="0" tIns="0" rIns="0" bIns="0" rtlCol="0" anchor="ctr"/>
-          <a:lstStyle/>
-          <a:p>
-            <a:pPr indent="0" marL="0">
-              <a:buNone/>
-            </a:pPr>
-            <a:r>
-              <a:rPr lang="en-US" sz="1300" dirty="0">
-                <a:solidFill>
-                  <a:srgbClr val="DAFF94"/>
-                </a:solidFill>
-                <a:latin typeface="JetBrains Mono" pitchFamily="34" charset="0"/>
-                <a:ea typeface="JetBrains Mono" pitchFamily="34" charset="-122"/>
-                <a:cs typeface="JetBrains Mono" pitchFamily="34" charset="-120"/>
-              </a:rPr>
-              <a:t>fala com a gente → @arpejo</a:t>
-            </a:r>
-            <a:endParaRPr lang="en-US" sz="1300" dirty="0"/>
-          </a:p>
-        </p:txBody>
-      </p:sp>
-      <p:pic>
-        <p:nvPicPr>
-          <p:cNvPr id="48" name="Image 4" descr="/home/user/data-manipulation-exercises/.claude/skills/arpejo-report-desdobramento/assets/arpejo-report-logo.png">    </p:cNvPr>
-          <p:cNvPicPr>
-            <a:picLocks noChangeAspect="1"/>
-          </p:cNvPicPr>
-          <p:nvPr/>
-        </p:nvPicPr>
-        <p:blipFill>
-          <a:blip r:embed="rId5"/>
-          <a:stretch>
-            <a:fillRect/>
-          </a:stretch>
-        </p:blipFill>
-        <p:spPr>
-          <a:xfrm>
-            <a:off x="731520" y="5669280"/>
-            <a:ext cx="2194560" cy="657842"/>
-          </a:xfrm>
-          <a:prstGeom prst="rect">
-            <a:avLst/>
-          </a:prstGeom>
-        </p:spPr>
-      </p:pic>
-    </p:spTree>
-  </p:cSld>
-  <p:clrMapOvr>
-    <a:masterClrMapping/>
-  </p:clrMapOvr>
-</p:sld>
-</file>
-
 <file path=ppt/slides/slide2.xml><?xml version="1.0" encoding="utf-8"?>
 <p:sld xmlns:a="http://schemas.openxmlformats.org/drawingml/2006/main" xmlns:r="http://schemas.openxmlformats.org/officeDocument/2006/relationships" xmlns:p="http://schemas.openxmlformats.org/presentationml/2006/main">
   <p:cSld name="Slide 2">
@@ -9396,935 +6814,6 @@
     <p:bg>
       <p:bgPr>
         <a:solidFill>
-          <a:srgbClr val="FF7C51"/>
-        </a:solidFill>
-      </p:bgPr>
-    </p:bg>
-    <p:spTree>
-      <p:nvGrpSpPr>
-        <p:cNvPr id="1" name=""/>
-        <p:cNvGrpSpPr/>
-        <p:nvPr/>
-      </p:nvGrpSpPr>
-      <p:grpSpPr>
-        <a:xfrm>
-          <a:off x="0" y="0"/>
-          <a:ext cx="0" cy="0"/>
-          <a:chOff x="0" y="0"/>
-          <a:chExt cx="0" cy="0"/>
-        </a:xfrm>
-      </p:grpSpPr>
-      <p:sp>
-        <p:nvSpPr>
-          <p:cNvPr id="2" name="Text 0"/>
-          <p:cNvSpPr/>
-          <p:nvPr/>
-        </p:nvSpPr>
-        <p:spPr>
-          <a:xfrm>
-            <a:off x="548640" y="411480"/>
-            <a:ext cx="7315200" cy="365760"/>
-          </a:xfrm>
-          <a:prstGeom prst="rect">
-            <a:avLst/>
-          </a:prstGeom>
-          <a:noFill/>
-          <a:ln/>
-        </p:spPr>
-        <p:txBody>
-          <a:bodyPr wrap="square" lIns="0" tIns="0" rIns="0" bIns="0" rtlCol="0" anchor="ctr"/>
-          <a:lstStyle/>
-          <a:p>
-            <a:pPr indent="0" marL="0">
-              <a:buNone/>
-            </a:pPr>
-            <a:r>
-              <a:rPr lang="en-US" sz="1200" dirty="0">
-                <a:solidFill>
-                  <a:srgbClr val="000000"/>
-                </a:solidFill>
-                <a:latin typeface="JetBrains Mono" pitchFamily="34" charset="0"/>
-                <a:ea typeface="JetBrains Mono" pitchFamily="34" charset="-122"/>
-                <a:cs typeface="JetBrains Mono" pitchFamily="34" charset="-120"/>
-              </a:rPr>
-              <a:t>QUEM CONFIA NA GENTE</a:t>
-            </a:r>
-            <a:endParaRPr lang="en-US" sz="1200" dirty="0"/>
-          </a:p>
-        </p:txBody>
-      </p:sp>
-      <p:sp>
-        <p:nvSpPr>
-          <p:cNvPr id="3" name="Text 1"/>
-          <p:cNvSpPr/>
-          <p:nvPr/>
-        </p:nvSpPr>
-        <p:spPr>
-          <a:xfrm>
-            <a:off x="548640" y="914400"/>
-            <a:ext cx="11094415" cy="1188720"/>
-          </a:xfrm>
-          <a:prstGeom prst="rect">
-            <a:avLst/>
-          </a:prstGeom>
-          <a:noFill/>
-          <a:ln/>
-        </p:spPr>
-        <p:txBody>
-          <a:bodyPr wrap="square" lIns="0" tIns="0" rIns="0" bIns="0" rtlCol="0" anchor="ctr"/>
-          <a:lstStyle/>
-          <a:p>
-            <a:pPr indent="0" marL="0">
-              <a:buNone/>
-            </a:pPr>
-            <a:r>
-              <a:rPr lang="en-US" sz="2400" b="1" i="1" dirty="0">
-                <a:solidFill>
-                  <a:srgbClr val="000000"/>
-                </a:solidFill>
-                <a:latin typeface="Libre Baskerville" pitchFamily="34" charset="0"/>
-                <a:ea typeface="Libre Baskerville" pitchFamily="34" charset="-122"/>
-                <a:cs typeface="Libre Baskerville" pitchFamily="34" charset="-120"/>
-              </a:rPr>
-              <a:t>Marcas que já construíram</a:t>
-            </a:r>
-            <a:endParaRPr lang="en-US" sz="2400" dirty="0"/>
-          </a:p>
-          <a:p>
-            <a:pPr indent="0" marL="0">
-              <a:buNone/>
-            </a:pPr>
-            <a:r>
-              <a:rPr lang="en-US" sz="2400" b="1" i="1" dirty="0">
-                <a:solidFill>
-                  <a:srgbClr val="000000"/>
-                </a:solidFill>
-                <a:latin typeface="Libre Baskerville" pitchFamily="34" charset="0"/>
-                <a:ea typeface="Libre Baskerville" pitchFamily="34" charset="-122"/>
-                <a:cs typeface="Libre Baskerville" pitchFamily="34" charset="-120"/>
-              </a:rPr>
-              <a:t>direcionais sólidos com a Arpejo.</a:t>
-            </a:r>
-            <a:endParaRPr lang="en-US" sz="2400" dirty="0"/>
-          </a:p>
-        </p:txBody>
-      </p:sp>
-      <p:sp>
-        <p:nvSpPr>
-          <p:cNvPr id="4" name="Shape 2"/>
-          <p:cNvSpPr/>
-          <p:nvPr/>
-        </p:nvSpPr>
-        <p:spPr>
-          <a:xfrm>
-            <a:off x="548640" y="2286000"/>
-            <a:ext cx="11094415" cy="4023360"/>
-          </a:xfrm>
-          <a:prstGeom prst="roundRect">
-            <a:avLst>
-              <a:gd name="adj" fmla="val 4091"/>
-            </a:avLst>
-          </a:prstGeom>
-          <a:solidFill>
-            <a:srgbClr val="000000"/>
-          </a:solidFill>
-          <a:ln/>
-        </p:spPr>
-      </p:sp>
-      <p:sp>
-        <p:nvSpPr>
-          <p:cNvPr id="5" name="Text 3"/>
-          <p:cNvSpPr/>
-          <p:nvPr/>
-        </p:nvSpPr>
-        <p:spPr>
-          <a:xfrm>
-            <a:off x="914400" y="2560320"/>
-            <a:ext cx="2407844" cy="694944"/>
-          </a:xfrm>
-          <a:prstGeom prst="rect">
-            <a:avLst/>
-          </a:prstGeom>
-          <a:noFill/>
-          <a:ln/>
-        </p:spPr>
-        <p:txBody>
-          <a:bodyPr wrap="square" lIns="0" tIns="0" rIns="0" bIns="0" rtlCol="0" anchor="ctr"/>
-          <a:lstStyle/>
-          <a:p>
-            <a:pPr indent="0" marL="0">
-              <a:buNone/>
-            </a:pPr>
-            <a:r>
-              <a:rPr lang="en-US" sz="1200" dirty="0">
-                <a:solidFill>
-                  <a:srgbClr val="DAFF94"/>
-                </a:solidFill>
-                <a:latin typeface="JetBrains Mono" pitchFamily="34" charset="0"/>
-                <a:ea typeface="JetBrains Mono" pitchFamily="34" charset="-122"/>
-                <a:cs typeface="JetBrains Mono" pitchFamily="34" charset="-120"/>
-              </a:rPr>
-              <a:t>Santa Massa</a:t>
-            </a:r>
-            <a:endParaRPr lang="en-US" sz="1200" dirty="0"/>
-          </a:p>
-        </p:txBody>
-      </p:sp>
-      <p:sp>
-        <p:nvSpPr>
-          <p:cNvPr id="6" name="Text 4"/>
-          <p:cNvSpPr/>
-          <p:nvPr/>
-        </p:nvSpPr>
-        <p:spPr>
-          <a:xfrm>
-            <a:off x="3505124" y="2560320"/>
-            <a:ext cx="2407844" cy="694944"/>
-          </a:xfrm>
-          <a:prstGeom prst="rect">
-            <a:avLst/>
-          </a:prstGeom>
-          <a:noFill/>
-          <a:ln/>
-        </p:spPr>
-        <p:txBody>
-          <a:bodyPr wrap="square" lIns="0" tIns="0" rIns="0" bIns="0" rtlCol="0" anchor="ctr"/>
-          <a:lstStyle/>
-          <a:p>
-            <a:pPr indent="0" marL="0">
-              <a:buNone/>
-            </a:pPr>
-            <a:r>
-              <a:rPr lang="en-US" sz="1200" dirty="0">
-                <a:solidFill>
-                  <a:srgbClr val="DAFF94"/>
-                </a:solidFill>
-                <a:latin typeface="JetBrains Mono" pitchFamily="34" charset="0"/>
-                <a:ea typeface="JetBrains Mono" pitchFamily="34" charset="-122"/>
-                <a:cs typeface="JetBrains Mono" pitchFamily="34" charset="-120"/>
-              </a:rPr>
-              <a:t>Solito Alimentos</a:t>
-            </a:r>
-            <a:endParaRPr lang="en-US" sz="1200" dirty="0"/>
-          </a:p>
-        </p:txBody>
-      </p:sp>
-      <p:sp>
-        <p:nvSpPr>
-          <p:cNvPr id="7" name="Text 5"/>
-          <p:cNvSpPr/>
-          <p:nvPr/>
-        </p:nvSpPr>
-        <p:spPr>
-          <a:xfrm>
-            <a:off x="6095848" y="2560320"/>
-            <a:ext cx="2407844" cy="694944"/>
-          </a:xfrm>
-          <a:prstGeom prst="rect">
-            <a:avLst/>
-          </a:prstGeom>
-          <a:noFill/>
-          <a:ln/>
-        </p:spPr>
-        <p:txBody>
-          <a:bodyPr wrap="square" lIns="0" tIns="0" rIns="0" bIns="0" rtlCol="0" anchor="ctr"/>
-          <a:lstStyle/>
-          <a:p>
-            <a:pPr indent="0" marL="0">
-              <a:buNone/>
-            </a:pPr>
-            <a:r>
-              <a:rPr lang="en-US" sz="1200" dirty="0">
-                <a:solidFill>
-                  <a:srgbClr val="DAFF94"/>
-                </a:solidFill>
-                <a:latin typeface="JetBrains Mono" pitchFamily="34" charset="0"/>
-                <a:ea typeface="JetBrains Mono" pitchFamily="34" charset="-122"/>
-                <a:cs typeface="JetBrains Mono" pitchFamily="34" charset="-120"/>
-              </a:rPr>
-              <a:t>Equatorial Energia</a:t>
-            </a:r>
-            <a:endParaRPr lang="en-US" sz="1200" dirty="0"/>
-          </a:p>
-        </p:txBody>
-      </p:sp>
-      <p:sp>
-        <p:nvSpPr>
-          <p:cNvPr id="8" name="Text 6"/>
-          <p:cNvSpPr/>
-          <p:nvPr/>
-        </p:nvSpPr>
-        <p:spPr>
-          <a:xfrm>
-            <a:off x="8686571" y="2560320"/>
-            <a:ext cx="2407844" cy="694944"/>
-          </a:xfrm>
-          <a:prstGeom prst="rect">
-            <a:avLst/>
-          </a:prstGeom>
-          <a:noFill/>
-          <a:ln/>
-        </p:spPr>
-        <p:txBody>
-          <a:bodyPr wrap="square" lIns="0" tIns="0" rIns="0" bIns="0" rtlCol="0" anchor="ctr"/>
-          <a:lstStyle/>
-          <a:p>
-            <a:pPr indent="0" marL="0">
-              <a:buNone/>
-            </a:pPr>
-            <a:r>
-              <a:rPr lang="en-US" sz="1200" dirty="0">
-                <a:solidFill>
-                  <a:srgbClr val="DAFF94"/>
-                </a:solidFill>
-                <a:latin typeface="JetBrains Mono" pitchFamily="34" charset="0"/>
-                <a:ea typeface="JetBrains Mono" pitchFamily="34" charset="-122"/>
-                <a:cs typeface="JetBrains Mono" pitchFamily="34" charset="-120"/>
-              </a:rPr>
-              <a:t>Lwart</a:t>
-            </a:r>
-            <a:endParaRPr lang="en-US" sz="1200" dirty="0"/>
-          </a:p>
-        </p:txBody>
-      </p:sp>
-      <p:sp>
-        <p:nvSpPr>
-          <p:cNvPr id="9" name="Text 7"/>
-          <p:cNvSpPr/>
-          <p:nvPr/>
-        </p:nvSpPr>
-        <p:spPr>
-          <a:xfrm>
-            <a:off x="914400" y="3255264"/>
-            <a:ext cx="2407844" cy="694944"/>
-          </a:xfrm>
-          <a:prstGeom prst="rect">
-            <a:avLst/>
-          </a:prstGeom>
-          <a:noFill/>
-          <a:ln/>
-        </p:spPr>
-        <p:txBody>
-          <a:bodyPr wrap="square" lIns="0" tIns="0" rIns="0" bIns="0" rtlCol="0" anchor="ctr"/>
-          <a:lstStyle/>
-          <a:p>
-            <a:pPr indent="0" marL="0">
-              <a:buNone/>
-            </a:pPr>
-            <a:r>
-              <a:rPr lang="en-US" sz="1200" dirty="0">
-                <a:solidFill>
-                  <a:srgbClr val="DAFF94"/>
-                </a:solidFill>
-                <a:latin typeface="JetBrains Mono" pitchFamily="34" charset="0"/>
-                <a:ea typeface="JetBrains Mono" pitchFamily="34" charset="-122"/>
-                <a:cs typeface="JetBrains Mono" pitchFamily="34" charset="-120"/>
-              </a:rPr>
-              <a:t>Educação Adventista</a:t>
-            </a:r>
-            <a:endParaRPr lang="en-US" sz="1200" dirty="0"/>
-          </a:p>
-        </p:txBody>
-      </p:sp>
-      <p:sp>
-        <p:nvSpPr>
-          <p:cNvPr id="10" name="Text 8"/>
-          <p:cNvSpPr/>
-          <p:nvPr/>
-        </p:nvSpPr>
-        <p:spPr>
-          <a:xfrm>
-            <a:off x="3505124" y="3255264"/>
-            <a:ext cx="2407844" cy="694944"/>
-          </a:xfrm>
-          <a:prstGeom prst="rect">
-            <a:avLst/>
-          </a:prstGeom>
-          <a:noFill/>
-          <a:ln/>
-        </p:spPr>
-        <p:txBody>
-          <a:bodyPr wrap="square" lIns="0" tIns="0" rIns="0" bIns="0" rtlCol="0" anchor="ctr"/>
-          <a:lstStyle/>
-          <a:p>
-            <a:pPr indent="0" marL="0">
-              <a:buNone/>
-            </a:pPr>
-            <a:r>
-              <a:rPr lang="en-US" sz="1200" dirty="0">
-                <a:solidFill>
-                  <a:srgbClr val="DAFF94"/>
-                </a:solidFill>
-                <a:latin typeface="JetBrains Mono" pitchFamily="34" charset="0"/>
-                <a:ea typeface="JetBrains Mono" pitchFamily="34" charset="-122"/>
-                <a:cs typeface="JetBrains Mono" pitchFamily="34" charset="-120"/>
-              </a:rPr>
-              <a:t>Unna</a:t>
-            </a:r>
-            <a:endParaRPr lang="en-US" sz="1200" dirty="0"/>
-          </a:p>
-        </p:txBody>
-      </p:sp>
-      <p:sp>
-        <p:nvSpPr>
-          <p:cNvPr id="11" name="Text 9"/>
-          <p:cNvSpPr/>
-          <p:nvPr/>
-        </p:nvSpPr>
-        <p:spPr>
-          <a:xfrm>
-            <a:off x="6095848" y="3255264"/>
-            <a:ext cx="2407844" cy="694944"/>
-          </a:xfrm>
-          <a:prstGeom prst="rect">
-            <a:avLst/>
-          </a:prstGeom>
-          <a:noFill/>
-          <a:ln/>
-        </p:spPr>
-        <p:txBody>
-          <a:bodyPr wrap="square" lIns="0" tIns="0" rIns="0" bIns="0" rtlCol="0" anchor="ctr"/>
-          <a:lstStyle/>
-          <a:p>
-            <a:pPr indent="0" marL="0">
-              <a:buNone/>
-            </a:pPr>
-            <a:r>
-              <a:rPr lang="en-US" sz="1200" dirty="0">
-                <a:solidFill>
-                  <a:srgbClr val="DAFF94"/>
-                </a:solidFill>
-                <a:latin typeface="JetBrains Mono" pitchFamily="34" charset="0"/>
-                <a:ea typeface="JetBrains Mono" pitchFamily="34" charset="-122"/>
-                <a:cs typeface="JetBrains Mono" pitchFamily="34" charset="-120"/>
-              </a:rPr>
-              <a:t>Óttima</a:t>
-            </a:r>
-            <a:endParaRPr lang="en-US" sz="1200" dirty="0"/>
-          </a:p>
-        </p:txBody>
-      </p:sp>
-      <p:sp>
-        <p:nvSpPr>
-          <p:cNvPr id="12" name="Text 10"/>
-          <p:cNvSpPr/>
-          <p:nvPr/>
-        </p:nvSpPr>
-        <p:spPr>
-          <a:xfrm>
-            <a:off x="8686571" y="3255264"/>
-            <a:ext cx="2407844" cy="694944"/>
-          </a:xfrm>
-          <a:prstGeom prst="rect">
-            <a:avLst/>
-          </a:prstGeom>
-          <a:noFill/>
-          <a:ln/>
-        </p:spPr>
-        <p:txBody>
-          <a:bodyPr wrap="square" lIns="0" tIns="0" rIns="0" bIns="0" rtlCol="0" anchor="ctr"/>
-          <a:lstStyle/>
-          <a:p>
-            <a:pPr indent="0" marL="0">
-              <a:buNone/>
-            </a:pPr>
-            <a:r>
-              <a:rPr lang="en-US" sz="1200" dirty="0">
-                <a:solidFill>
-                  <a:srgbClr val="DAFF94"/>
-                </a:solidFill>
-                <a:latin typeface="JetBrains Mono" pitchFamily="34" charset="0"/>
-                <a:ea typeface="JetBrains Mono" pitchFamily="34" charset="-122"/>
-                <a:cs typeface="JetBrains Mono" pitchFamily="34" charset="-120"/>
-              </a:rPr>
-              <a:t>Nutrive</a:t>
-            </a:r>
-            <a:endParaRPr lang="en-US" sz="1200" dirty="0"/>
-          </a:p>
-        </p:txBody>
-      </p:sp>
-      <p:sp>
-        <p:nvSpPr>
-          <p:cNvPr id="13" name="Text 11"/>
-          <p:cNvSpPr/>
-          <p:nvPr/>
-        </p:nvSpPr>
-        <p:spPr>
-          <a:xfrm>
-            <a:off x="914400" y="3950208"/>
-            <a:ext cx="2407844" cy="694944"/>
-          </a:xfrm>
-          <a:prstGeom prst="rect">
-            <a:avLst/>
-          </a:prstGeom>
-          <a:noFill/>
-          <a:ln/>
-        </p:spPr>
-        <p:txBody>
-          <a:bodyPr wrap="square" lIns="0" tIns="0" rIns="0" bIns="0" rtlCol="0" anchor="ctr"/>
-          <a:lstStyle/>
-          <a:p>
-            <a:pPr indent="0" marL="0">
-              <a:buNone/>
-            </a:pPr>
-            <a:r>
-              <a:rPr lang="en-US" sz="1200" dirty="0">
-                <a:solidFill>
-                  <a:srgbClr val="DAFF94"/>
-                </a:solidFill>
-                <a:latin typeface="JetBrains Mono" pitchFamily="34" charset="0"/>
-                <a:ea typeface="JetBrains Mono" pitchFamily="34" charset="-122"/>
-                <a:cs typeface="JetBrains Mono" pitchFamily="34" charset="-120"/>
-              </a:rPr>
-              <a:t>Performa Natural</a:t>
-            </a:r>
-            <a:endParaRPr lang="en-US" sz="1200" dirty="0"/>
-          </a:p>
-        </p:txBody>
-      </p:sp>
-      <p:sp>
-        <p:nvSpPr>
-          <p:cNvPr id="14" name="Text 12"/>
-          <p:cNvSpPr/>
-          <p:nvPr/>
-        </p:nvSpPr>
-        <p:spPr>
-          <a:xfrm>
-            <a:off x="3505124" y="3950208"/>
-            <a:ext cx="2407844" cy="694944"/>
-          </a:xfrm>
-          <a:prstGeom prst="rect">
-            <a:avLst/>
-          </a:prstGeom>
-          <a:noFill/>
-          <a:ln/>
-        </p:spPr>
-        <p:txBody>
-          <a:bodyPr wrap="square" lIns="0" tIns="0" rIns="0" bIns="0" rtlCol="0" anchor="ctr"/>
-          <a:lstStyle/>
-          <a:p>
-            <a:pPr indent="0" marL="0">
-              <a:buNone/>
-            </a:pPr>
-            <a:r>
-              <a:rPr lang="en-US" sz="1200" dirty="0">
-                <a:solidFill>
-                  <a:srgbClr val="DAFF94"/>
-                </a:solidFill>
-                <a:latin typeface="JetBrains Mono" pitchFamily="34" charset="0"/>
-                <a:ea typeface="JetBrains Mono" pitchFamily="34" charset="-122"/>
-                <a:cs typeface="JetBrains Mono" pitchFamily="34" charset="-120"/>
-              </a:rPr>
-              <a:t>Formica</a:t>
-            </a:r>
-            <a:endParaRPr lang="en-US" sz="1200" dirty="0"/>
-          </a:p>
-        </p:txBody>
-      </p:sp>
-      <p:sp>
-        <p:nvSpPr>
-          <p:cNvPr id="15" name="Text 13"/>
-          <p:cNvSpPr/>
-          <p:nvPr/>
-        </p:nvSpPr>
-        <p:spPr>
-          <a:xfrm>
-            <a:off x="6095848" y="3950208"/>
-            <a:ext cx="2407844" cy="694944"/>
-          </a:xfrm>
-          <a:prstGeom prst="rect">
-            <a:avLst/>
-          </a:prstGeom>
-          <a:noFill/>
-          <a:ln/>
-        </p:spPr>
-        <p:txBody>
-          <a:bodyPr wrap="square" lIns="0" tIns="0" rIns="0" bIns="0" rtlCol="0" anchor="ctr"/>
-          <a:lstStyle/>
-          <a:p>
-            <a:pPr indent="0" marL="0">
-              <a:buNone/>
-            </a:pPr>
-            <a:r>
-              <a:rPr lang="en-US" sz="1200" dirty="0">
-                <a:solidFill>
-                  <a:srgbClr val="DAFF94"/>
-                </a:solidFill>
-                <a:latin typeface="JetBrains Mono" pitchFamily="34" charset="0"/>
-                <a:ea typeface="JetBrains Mono" pitchFamily="34" charset="-122"/>
-                <a:cs typeface="JetBrains Mono" pitchFamily="34" charset="-120"/>
-              </a:rPr>
-              <a:t>Grupo Formitex</a:t>
-            </a:r>
-            <a:endParaRPr lang="en-US" sz="1200" dirty="0"/>
-          </a:p>
-        </p:txBody>
-      </p:sp>
-      <p:sp>
-        <p:nvSpPr>
-          <p:cNvPr id="16" name="Text 14"/>
-          <p:cNvSpPr/>
-          <p:nvPr/>
-        </p:nvSpPr>
-        <p:spPr>
-          <a:xfrm>
-            <a:off x="8686571" y="3950208"/>
-            <a:ext cx="2407844" cy="694944"/>
-          </a:xfrm>
-          <a:prstGeom prst="rect">
-            <a:avLst/>
-          </a:prstGeom>
-          <a:noFill/>
-          <a:ln/>
-        </p:spPr>
-        <p:txBody>
-          <a:bodyPr wrap="square" lIns="0" tIns="0" rIns="0" bIns="0" rtlCol="0" anchor="ctr"/>
-          <a:lstStyle/>
-          <a:p>
-            <a:pPr indent="0" marL="0">
-              <a:buNone/>
-            </a:pPr>
-            <a:r>
-              <a:rPr lang="en-US" sz="1200" dirty="0">
-                <a:solidFill>
-                  <a:srgbClr val="DAFF94"/>
-                </a:solidFill>
-                <a:latin typeface="JetBrains Mono" pitchFamily="34" charset="0"/>
-                <a:ea typeface="JetBrains Mono" pitchFamily="34" charset="-122"/>
-                <a:cs typeface="JetBrains Mono" pitchFamily="34" charset="-120"/>
-              </a:rPr>
-              <a:t>Donmario Sementes</a:t>
-            </a:r>
-            <a:endParaRPr lang="en-US" sz="1200" dirty="0"/>
-          </a:p>
-        </p:txBody>
-      </p:sp>
-      <p:sp>
-        <p:nvSpPr>
-          <p:cNvPr id="17" name="Text 15"/>
-          <p:cNvSpPr/>
-          <p:nvPr/>
-        </p:nvSpPr>
-        <p:spPr>
-          <a:xfrm>
-            <a:off x="914400" y="4645152"/>
-            <a:ext cx="2407844" cy="694944"/>
-          </a:xfrm>
-          <a:prstGeom prst="rect">
-            <a:avLst/>
-          </a:prstGeom>
-          <a:noFill/>
-          <a:ln/>
-        </p:spPr>
-        <p:txBody>
-          <a:bodyPr wrap="square" lIns="0" tIns="0" rIns="0" bIns="0" rtlCol="0" anchor="ctr"/>
-          <a:lstStyle/>
-          <a:p>
-            <a:pPr indent="0" marL="0">
-              <a:buNone/>
-            </a:pPr>
-            <a:r>
-              <a:rPr lang="en-US" sz="1200" dirty="0">
-                <a:solidFill>
-                  <a:srgbClr val="DAFF94"/>
-                </a:solidFill>
-                <a:latin typeface="JetBrains Mono" pitchFamily="34" charset="0"/>
-                <a:ea typeface="JetBrains Mono" pitchFamily="34" charset="-122"/>
-                <a:cs typeface="JetBrains Mono" pitchFamily="34" charset="-120"/>
-              </a:rPr>
-              <a:t>ZF</a:t>
-            </a:r>
-            <a:endParaRPr lang="en-US" sz="1200" dirty="0"/>
-          </a:p>
-        </p:txBody>
-      </p:sp>
-      <p:sp>
-        <p:nvSpPr>
-          <p:cNvPr id="18" name="Text 16"/>
-          <p:cNvSpPr/>
-          <p:nvPr/>
-        </p:nvSpPr>
-        <p:spPr>
-          <a:xfrm>
-            <a:off x="3505124" y="4645152"/>
-            <a:ext cx="2407844" cy="694944"/>
-          </a:xfrm>
-          <a:prstGeom prst="rect">
-            <a:avLst/>
-          </a:prstGeom>
-          <a:noFill/>
-          <a:ln/>
-        </p:spPr>
-        <p:txBody>
-          <a:bodyPr wrap="square" lIns="0" tIns="0" rIns="0" bIns="0" rtlCol="0" anchor="ctr"/>
-          <a:lstStyle/>
-          <a:p>
-            <a:pPr indent="0" marL="0">
-              <a:buNone/>
-            </a:pPr>
-            <a:r>
-              <a:rPr lang="en-US" sz="1200" dirty="0">
-                <a:solidFill>
-                  <a:srgbClr val="DAFF94"/>
-                </a:solidFill>
-                <a:latin typeface="JetBrains Mono" pitchFamily="34" charset="0"/>
-                <a:ea typeface="JetBrains Mono" pitchFamily="34" charset="-122"/>
-                <a:cs typeface="JetBrains Mono" pitchFamily="34" charset="-120"/>
-              </a:rPr>
-              <a:t>Mendorato</a:t>
-            </a:r>
-            <a:endParaRPr lang="en-US" sz="1200" dirty="0"/>
-          </a:p>
-        </p:txBody>
-      </p:sp>
-      <p:sp>
-        <p:nvSpPr>
-          <p:cNvPr id="19" name="Text 17"/>
-          <p:cNvSpPr/>
-          <p:nvPr/>
-        </p:nvSpPr>
-        <p:spPr>
-          <a:xfrm>
-            <a:off x="6095848" y="4645152"/>
-            <a:ext cx="2407844" cy="694944"/>
-          </a:xfrm>
-          <a:prstGeom prst="rect">
-            <a:avLst/>
-          </a:prstGeom>
-          <a:noFill/>
-          <a:ln/>
-        </p:spPr>
-        <p:txBody>
-          <a:bodyPr wrap="square" lIns="0" tIns="0" rIns="0" bIns="0" rtlCol="0" anchor="ctr"/>
-          <a:lstStyle/>
-          <a:p>
-            <a:pPr indent="0" marL="0">
-              <a:buNone/>
-            </a:pPr>
-            <a:r>
-              <a:rPr lang="en-US" sz="1200" dirty="0">
-                <a:solidFill>
-                  <a:srgbClr val="DAFF94"/>
-                </a:solidFill>
-                <a:latin typeface="JetBrains Mono" pitchFamily="34" charset="0"/>
-                <a:ea typeface="JetBrains Mono" pitchFamily="34" charset="-122"/>
-                <a:cs typeface="JetBrains Mono" pitchFamily="34" charset="-120"/>
-              </a:rPr>
-              <a:t>Crokíssimo</a:t>
-            </a:r>
-            <a:endParaRPr lang="en-US" sz="1200" dirty="0"/>
-          </a:p>
-        </p:txBody>
-      </p:sp>
-      <p:sp>
-        <p:nvSpPr>
-          <p:cNvPr id="20" name="Text 18"/>
-          <p:cNvSpPr/>
-          <p:nvPr/>
-        </p:nvSpPr>
-        <p:spPr>
-          <a:xfrm>
-            <a:off x="8686571" y="4645152"/>
-            <a:ext cx="2407844" cy="694944"/>
-          </a:xfrm>
-          <a:prstGeom prst="rect">
-            <a:avLst/>
-          </a:prstGeom>
-          <a:noFill/>
-          <a:ln/>
-        </p:spPr>
-        <p:txBody>
-          <a:bodyPr wrap="square" lIns="0" tIns="0" rIns="0" bIns="0" rtlCol="0" anchor="ctr"/>
-          <a:lstStyle/>
-          <a:p>
-            <a:pPr indent="0" marL="0">
-              <a:buNone/>
-            </a:pPr>
-            <a:r>
-              <a:rPr lang="en-US" sz="1200" dirty="0">
-                <a:solidFill>
-                  <a:srgbClr val="DAFF94"/>
-                </a:solidFill>
-                <a:latin typeface="JetBrains Mono" pitchFamily="34" charset="0"/>
-                <a:ea typeface="JetBrains Mono" pitchFamily="34" charset="-122"/>
-                <a:cs typeface="JetBrains Mono" pitchFamily="34" charset="-120"/>
-              </a:rPr>
-              <a:t>Unimed Campinas</a:t>
-            </a:r>
-            <a:endParaRPr lang="en-US" sz="1200" dirty="0"/>
-          </a:p>
-        </p:txBody>
-      </p:sp>
-      <p:sp>
-        <p:nvSpPr>
-          <p:cNvPr id="21" name="Text 19"/>
-          <p:cNvSpPr/>
-          <p:nvPr/>
-        </p:nvSpPr>
-        <p:spPr>
-          <a:xfrm>
-            <a:off x="914400" y="5340096"/>
-            <a:ext cx="2407844" cy="694944"/>
-          </a:xfrm>
-          <a:prstGeom prst="rect">
-            <a:avLst/>
-          </a:prstGeom>
-          <a:noFill/>
-          <a:ln/>
-        </p:spPr>
-        <p:txBody>
-          <a:bodyPr wrap="square" lIns="0" tIns="0" rIns="0" bIns="0" rtlCol="0" anchor="ctr"/>
-          <a:lstStyle/>
-          <a:p>
-            <a:pPr indent="0" marL="0">
-              <a:buNone/>
-            </a:pPr>
-            <a:r>
-              <a:rPr lang="en-US" sz="1200" dirty="0">
-                <a:solidFill>
-                  <a:srgbClr val="DAFF94"/>
-                </a:solidFill>
-                <a:latin typeface="JetBrains Mono" pitchFamily="34" charset="0"/>
-                <a:ea typeface="JetBrains Mono" pitchFamily="34" charset="-122"/>
-                <a:cs typeface="JetBrains Mono" pitchFamily="34" charset="-120"/>
-              </a:rPr>
-              <a:t>Quallity Pró Saúde</a:t>
-            </a:r>
-            <a:endParaRPr lang="en-US" sz="1200" dirty="0"/>
-          </a:p>
-        </p:txBody>
-      </p:sp>
-      <p:sp>
-        <p:nvSpPr>
-          <p:cNvPr id="22" name="Text 20"/>
-          <p:cNvSpPr/>
-          <p:nvPr/>
-        </p:nvSpPr>
-        <p:spPr>
-          <a:xfrm>
-            <a:off x="3505124" y="5340096"/>
-            <a:ext cx="2407844" cy="694944"/>
-          </a:xfrm>
-          <a:prstGeom prst="rect">
-            <a:avLst/>
-          </a:prstGeom>
-          <a:noFill/>
-          <a:ln/>
-        </p:spPr>
-        <p:txBody>
-          <a:bodyPr wrap="square" lIns="0" tIns="0" rIns="0" bIns="0" rtlCol="0" anchor="ctr"/>
-          <a:lstStyle/>
-          <a:p>
-            <a:pPr indent="0" marL="0">
-              <a:buNone/>
-            </a:pPr>
-            <a:r>
-              <a:rPr lang="en-US" sz="1200" dirty="0">
-                <a:solidFill>
-                  <a:srgbClr val="DAFF94"/>
-                </a:solidFill>
-                <a:latin typeface="JetBrains Mono" pitchFamily="34" charset="0"/>
-                <a:ea typeface="JetBrains Mono" pitchFamily="34" charset="-122"/>
-                <a:cs typeface="JetBrains Mono" pitchFamily="34" charset="-120"/>
-              </a:rPr>
-              <a:t>Delphi</a:t>
-            </a:r>
-            <a:endParaRPr lang="en-US" sz="1200" dirty="0"/>
-          </a:p>
-        </p:txBody>
-      </p:sp>
-      <p:sp>
-        <p:nvSpPr>
-          <p:cNvPr id="23" name="Text 21"/>
-          <p:cNvSpPr/>
-          <p:nvPr/>
-        </p:nvSpPr>
-        <p:spPr>
-          <a:xfrm>
-            <a:off x="6095848" y="5340096"/>
-            <a:ext cx="2407844" cy="694944"/>
-          </a:xfrm>
-          <a:prstGeom prst="rect">
-            <a:avLst/>
-          </a:prstGeom>
-          <a:noFill/>
-          <a:ln/>
-        </p:spPr>
-        <p:txBody>
-          <a:bodyPr wrap="square" lIns="0" tIns="0" rIns="0" bIns="0" rtlCol="0" anchor="ctr"/>
-          <a:lstStyle/>
-          <a:p>
-            <a:pPr indent="0" marL="0">
-              <a:buNone/>
-            </a:pPr>
-            <a:r>
-              <a:rPr lang="en-US" sz="1200" dirty="0">
-                <a:solidFill>
-                  <a:srgbClr val="DAFF94"/>
-                </a:solidFill>
-                <a:latin typeface="JetBrains Mono" pitchFamily="34" charset="0"/>
-                <a:ea typeface="JetBrains Mono" pitchFamily="34" charset="-122"/>
-                <a:cs typeface="JetBrains Mono" pitchFamily="34" charset="-120"/>
-              </a:rPr>
-              <a:t>PagueVeloz by Serasa</a:t>
-            </a:r>
-            <a:endParaRPr lang="en-US" sz="1200" dirty="0"/>
-          </a:p>
-        </p:txBody>
-      </p:sp>
-      <p:sp>
-        <p:nvSpPr>
-          <p:cNvPr id="24" name="Text 22"/>
-          <p:cNvSpPr/>
-          <p:nvPr/>
-        </p:nvSpPr>
-        <p:spPr>
-          <a:xfrm>
-            <a:off x="8686571" y="5340096"/>
-            <a:ext cx="2407844" cy="694944"/>
-          </a:xfrm>
-          <a:prstGeom prst="rect">
-            <a:avLst/>
-          </a:prstGeom>
-          <a:noFill/>
-          <a:ln/>
-        </p:spPr>
-        <p:txBody>
-          <a:bodyPr wrap="square" lIns="0" tIns="0" rIns="0" bIns="0" rtlCol="0" anchor="ctr"/>
-          <a:lstStyle/>
-          <a:p>
-            <a:pPr indent="0" marL="0">
-              <a:buNone/>
-            </a:pPr>
-            <a:r>
-              <a:rPr lang="en-US" sz="1200" dirty="0">
-                <a:solidFill>
-                  <a:srgbClr val="DAFF94"/>
-                </a:solidFill>
-                <a:latin typeface="JetBrains Mono" pitchFamily="34" charset="0"/>
-                <a:ea typeface="JetBrains Mono" pitchFamily="34" charset="-122"/>
-                <a:cs typeface="JetBrains Mono" pitchFamily="34" charset="-120"/>
-              </a:rPr>
-              <a:t>Desktop</a:t>
-            </a:r>
-            <a:endParaRPr lang="en-US" sz="1200" dirty="0"/>
-          </a:p>
-        </p:txBody>
-      </p:sp>
-    </p:spTree>
-  </p:cSld>
-  <p:clrMapOvr>
-    <a:masterClrMapping/>
-  </p:clrMapOvr>
-</p:sld>
-</file>
-
-<file path=ppt/slides/slide7.xml><?xml version="1.0" encoding="utf-8"?>
-<p:sld xmlns:a="http://schemas.openxmlformats.org/drawingml/2006/main" xmlns:r="http://schemas.openxmlformats.org/officeDocument/2006/relationships" xmlns:p="http://schemas.openxmlformats.org/presentationml/2006/main">
-  <p:cSld name="Slide 7">
-    <p:bg>
-      <p:bgPr>
-        <a:solidFill>
           <a:srgbClr val="000000"/>
         </a:solidFill>
       </p:bgPr>
@@ -10351,6 +6840,1566 @@
         </p:nvSpPr>
         <p:spPr>
           <a:xfrm>
+            <a:off x="777240" y="685800"/>
+            <a:ext cx="274320" cy="274320"/>
+          </a:xfrm>
+          <a:prstGeom prst="rect">
+            <a:avLst/>
+          </a:prstGeom>
+          <a:noFill/>
+          <a:ln/>
+        </p:spPr>
+        <p:txBody>
+          <a:bodyPr wrap="square" lIns="0" tIns="0" rIns="0" bIns="0" rtlCol="0" anchor="ctr"/>
+          <a:lstStyle/>
+          <a:p>
+            <a:pPr algn="ctr" indent="0" marL="0">
+              <a:buNone/>
+            </a:pPr>
+            <a:r>
+              <a:rPr lang="en-US" sz="1200" dirty="0">
+                <a:solidFill>
+                  <a:srgbClr val="333333"/>
+                </a:solidFill>
+                <a:latin typeface="Arial" pitchFamily="34" charset="0"/>
+                <a:ea typeface="Arial" pitchFamily="34" charset="-122"/>
+                <a:cs typeface="Arial" pitchFamily="34" charset="-120"/>
+              </a:rPr>
+              <a:t>+</a:t>
+            </a:r>
+            <a:endParaRPr lang="en-US" sz="1200" dirty="0"/>
+          </a:p>
+        </p:txBody>
+      </p:sp>
+      <p:sp>
+        <p:nvSpPr>
+          <p:cNvPr id="3" name="Text 1"/>
+          <p:cNvSpPr/>
+          <p:nvPr/>
+        </p:nvSpPr>
+        <p:spPr>
+          <a:xfrm>
+            <a:off x="2240280" y="685800"/>
+            <a:ext cx="274320" cy="274320"/>
+          </a:xfrm>
+          <a:prstGeom prst="rect">
+            <a:avLst/>
+          </a:prstGeom>
+          <a:noFill/>
+          <a:ln/>
+        </p:spPr>
+        <p:txBody>
+          <a:bodyPr wrap="square" lIns="0" tIns="0" rIns="0" bIns="0" rtlCol="0" anchor="ctr"/>
+          <a:lstStyle/>
+          <a:p>
+            <a:pPr algn="ctr" indent="0" marL="0">
+              <a:buNone/>
+            </a:pPr>
+            <a:r>
+              <a:rPr lang="en-US" sz="1200" dirty="0">
+                <a:solidFill>
+                  <a:srgbClr val="333333"/>
+                </a:solidFill>
+                <a:latin typeface="Arial" pitchFamily="34" charset="0"/>
+                <a:ea typeface="Arial" pitchFamily="34" charset="-122"/>
+                <a:cs typeface="Arial" pitchFamily="34" charset="-120"/>
+              </a:rPr>
+              <a:t>+</a:t>
+            </a:r>
+            <a:endParaRPr lang="en-US" sz="1200" dirty="0"/>
+          </a:p>
+        </p:txBody>
+      </p:sp>
+      <p:sp>
+        <p:nvSpPr>
+          <p:cNvPr id="4" name="Text 2"/>
+          <p:cNvSpPr/>
+          <p:nvPr/>
+        </p:nvSpPr>
+        <p:spPr>
+          <a:xfrm>
+            <a:off x="3703320" y="685800"/>
+            <a:ext cx="274320" cy="274320"/>
+          </a:xfrm>
+          <a:prstGeom prst="rect">
+            <a:avLst/>
+          </a:prstGeom>
+          <a:noFill/>
+          <a:ln/>
+        </p:spPr>
+        <p:txBody>
+          <a:bodyPr wrap="square" lIns="0" tIns="0" rIns="0" bIns="0" rtlCol="0" anchor="ctr"/>
+          <a:lstStyle/>
+          <a:p>
+            <a:pPr algn="ctr" indent="0" marL="0">
+              <a:buNone/>
+            </a:pPr>
+            <a:r>
+              <a:rPr lang="en-US" sz="1200" dirty="0">
+                <a:solidFill>
+                  <a:srgbClr val="333333"/>
+                </a:solidFill>
+                <a:latin typeface="Arial" pitchFamily="34" charset="0"/>
+                <a:ea typeface="Arial" pitchFamily="34" charset="-122"/>
+                <a:cs typeface="Arial" pitchFamily="34" charset="-120"/>
+              </a:rPr>
+              <a:t>+</a:t>
+            </a:r>
+            <a:endParaRPr lang="en-US" sz="1200" dirty="0"/>
+          </a:p>
+        </p:txBody>
+      </p:sp>
+      <p:sp>
+        <p:nvSpPr>
+          <p:cNvPr id="5" name="Text 3"/>
+          <p:cNvSpPr/>
+          <p:nvPr/>
+        </p:nvSpPr>
+        <p:spPr>
+          <a:xfrm>
+            <a:off x="5166360" y="685800"/>
+            <a:ext cx="274320" cy="274320"/>
+          </a:xfrm>
+          <a:prstGeom prst="rect">
+            <a:avLst/>
+          </a:prstGeom>
+          <a:noFill/>
+          <a:ln/>
+        </p:spPr>
+        <p:txBody>
+          <a:bodyPr wrap="square" lIns="0" tIns="0" rIns="0" bIns="0" rtlCol="0" anchor="ctr"/>
+          <a:lstStyle/>
+          <a:p>
+            <a:pPr algn="ctr" indent="0" marL="0">
+              <a:buNone/>
+            </a:pPr>
+            <a:r>
+              <a:rPr lang="en-US" sz="1200" dirty="0">
+                <a:solidFill>
+                  <a:srgbClr val="333333"/>
+                </a:solidFill>
+                <a:latin typeface="Arial" pitchFamily="34" charset="0"/>
+                <a:ea typeface="Arial" pitchFamily="34" charset="-122"/>
+                <a:cs typeface="Arial" pitchFamily="34" charset="-120"/>
+              </a:rPr>
+              <a:t>+</a:t>
+            </a:r>
+            <a:endParaRPr lang="en-US" sz="1200" dirty="0"/>
+          </a:p>
+        </p:txBody>
+      </p:sp>
+      <p:sp>
+        <p:nvSpPr>
+          <p:cNvPr id="6" name="Text 4"/>
+          <p:cNvSpPr/>
+          <p:nvPr/>
+        </p:nvSpPr>
+        <p:spPr>
+          <a:xfrm>
+            <a:off x="6629400" y="685800"/>
+            <a:ext cx="274320" cy="274320"/>
+          </a:xfrm>
+          <a:prstGeom prst="rect">
+            <a:avLst/>
+          </a:prstGeom>
+          <a:noFill/>
+          <a:ln/>
+        </p:spPr>
+        <p:txBody>
+          <a:bodyPr wrap="square" lIns="0" tIns="0" rIns="0" bIns="0" rtlCol="0" anchor="ctr"/>
+          <a:lstStyle/>
+          <a:p>
+            <a:pPr algn="ctr" indent="0" marL="0">
+              <a:buNone/>
+            </a:pPr>
+            <a:r>
+              <a:rPr lang="en-US" sz="1200" dirty="0">
+                <a:solidFill>
+                  <a:srgbClr val="333333"/>
+                </a:solidFill>
+                <a:latin typeface="Arial" pitchFamily="34" charset="0"/>
+                <a:ea typeface="Arial" pitchFamily="34" charset="-122"/>
+                <a:cs typeface="Arial" pitchFamily="34" charset="-120"/>
+              </a:rPr>
+              <a:t>+</a:t>
+            </a:r>
+            <a:endParaRPr lang="en-US" sz="1200" dirty="0"/>
+          </a:p>
+        </p:txBody>
+      </p:sp>
+      <p:sp>
+        <p:nvSpPr>
+          <p:cNvPr id="7" name="Text 5"/>
+          <p:cNvSpPr/>
+          <p:nvPr/>
+        </p:nvSpPr>
+        <p:spPr>
+          <a:xfrm>
+            <a:off x="8092440" y="685800"/>
+            <a:ext cx="274320" cy="274320"/>
+          </a:xfrm>
+          <a:prstGeom prst="rect">
+            <a:avLst/>
+          </a:prstGeom>
+          <a:noFill/>
+          <a:ln/>
+        </p:spPr>
+        <p:txBody>
+          <a:bodyPr wrap="square" lIns="0" tIns="0" rIns="0" bIns="0" rtlCol="0" anchor="ctr"/>
+          <a:lstStyle/>
+          <a:p>
+            <a:pPr algn="ctr" indent="0" marL="0">
+              <a:buNone/>
+            </a:pPr>
+            <a:r>
+              <a:rPr lang="en-US" sz="1200" dirty="0">
+                <a:solidFill>
+                  <a:srgbClr val="333333"/>
+                </a:solidFill>
+                <a:latin typeface="Arial" pitchFamily="34" charset="0"/>
+                <a:ea typeface="Arial" pitchFamily="34" charset="-122"/>
+                <a:cs typeface="Arial" pitchFamily="34" charset="-120"/>
+              </a:rPr>
+              <a:t>+</a:t>
+            </a:r>
+            <a:endParaRPr lang="en-US" sz="1200" dirty="0"/>
+          </a:p>
+        </p:txBody>
+      </p:sp>
+      <p:sp>
+        <p:nvSpPr>
+          <p:cNvPr id="8" name="Text 6"/>
+          <p:cNvSpPr/>
+          <p:nvPr/>
+        </p:nvSpPr>
+        <p:spPr>
+          <a:xfrm>
+            <a:off x="9555480" y="685800"/>
+            <a:ext cx="274320" cy="274320"/>
+          </a:xfrm>
+          <a:prstGeom prst="rect">
+            <a:avLst/>
+          </a:prstGeom>
+          <a:noFill/>
+          <a:ln/>
+        </p:spPr>
+        <p:txBody>
+          <a:bodyPr wrap="square" lIns="0" tIns="0" rIns="0" bIns="0" rtlCol="0" anchor="ctr"/>
+          <a:lstStyle/>
+          <a:p>
+            <a:pPr algn="ctr" indent="0" marL="0">
+              <a:buNone/>
+            </a:pPr>
+            <a:r>
+              <a:rPr lang="en-US" sz="1200" dirty="0">
+                <a:solidFill>
+                  <a:srgbClr val="333333"/>
+                </a:solidFill>
+                <a:latin typeface="Arial" pitchFamily="34" charset="0"/>
+                <a:ea typeface="Arial" pitchFamily="34" charset="-122"/>
+                <a:cs typeface="Arial" pitchFamily="34" charset="-120"/>
+              </a:rPr>
+              <a:t>+</a:t>
+            </a:r>
+            <a:endParaRPr lang="en-US" sz="1200" dirty="0"/>
+          </a:p>
+        </p:txBody>
+      </p:sp>
+      <p:sp>
+        <p:nvSpPr>
+          <p:cNvPr id="9" name="Text 7"/>
+          <p:cNvSpPr/>
+          <p:nvPr/>
+        </p:nvSpPr>
+        <p:spPr>
+          <a:xfrm>
+            <a:off x="11018520" y="685800"/>
+            <a:ext cx="274320" cy="274320"/>
+          </a:xfrm>
+          <a:prstGeom prst="rect">
+            <a:avLst/>
+          </a:prstGeom>
+          <a:noFill/>
+          <a:ln/>
+        </p:spPr>
+        <p:txBody>
+          <a:bodyPr wrap="square" lIns="0" tIns="0" rIns="0" bIns="0" rtlCol="0" anchor="ctr"/>
+          <a:lstStyle/>
+          <a:p>
+            <a:pPr algn="ctr" indent="0" marL="0">
+              <a:buNone/>
+            </a:pPr>
+            <a:r>
+              <a:rPr lang="en-US" sz="1200" dirty="0">
+                <a:solidFill>
+                  <a:srgbClr val="333333"/>
+                </a:solidFill>
+                <a:latin typeface="Arial" pitchFamily="34" charset="0"/>
+                <a:ea typeface="Arial" pitchFamily="34" charset="-122"/>
+                <a:cs typeface="Arial" pitchFamily="34" charset="-120"/>
+              </a:rPr>
+              <a:t>+</a:t>
+            </a:r>
+            <a:endParaRPr lang="en-US" sz="1200" dirty="0"/>
+          </a:p>
+        </p:txBody>
+      </p:sp>
+      <p:sp>
+        <p:nvSpPr>
+          <p:cNvPr id="10" name="Text 8"/>
+          <p:cNvSpPr/>
+          <p:nvPr/>
+        </p:nvSpPr>
+        <p:spPr>
+          <a:xfrm>
+            <a:off x="777240" y="1874520"/>
+            <a:ext cx="274320" cy="274320"/>
+          </a:xfrm>
+          <a:prstGeom prst="rect">
+            <a:avLst/>
+          </a:prstGeom>
+          <a:noFill/>
+          <a:ln/>
+        </p:spPr>
+        <p:txBody>
+          <a:bodyPr wrap="square" lIns="0" tIns="0" rIns="0" bIns="0" rtlCol="0" anchor="ctr"/>
+          <a:lstStyle/>
+          <a:p>
+            <a:pPr algn="ctr" indent="0" marL="0">
+              <a:buNone/>
+            </a:pPr>
+            <a:r>
+              <a:rPr lang="en-US" sz="1200" dirty="0">
+                <a:solidFill>
+                  <a:srgbClr val="333333"/>
+                </a:solidFill>
+                <a:latin typeface="Arial" pitchFamily="34" charset="0"/>
+                <a:ea typeface="Arial" pitchFamily="34" charset="-122"/>
+                <a:cs typeface="Arial" pitchFamily="34" charset="-120"/>
+              </a:rPr>
+              <a:t>+</a:t>
+            </a:r>
+            <a:endParaRPr lang="en-US" sz="1200" dirty="0"/>
+          </a:p>
+        </p:txBody>
+      </p:sp>
+      <p:sp>
+        <p:nvSpPr>
+          <p:cNvPr id="11" name="Text 9"/>
+          <p:cNvSpPr/>
+          <p:nvPr/>
+        </p:nvSpPr>
+        <p:spPr>
+          <a:xfrm>
+            <a:off x="2240280" y="1874520"/>
+            <a:ext cx="274320" cy="274320"/>
+          </a:xfrm>
+          <a:prstGeom prst="rect">
+            <a:avLst/>
+          </a:prstGeom>
+          <a:noFill/>
+          <a:ln/>
+        </p:spPr>
+        <p:txBody>
+          <a:bodyPr wrap="square" lIns="0" tIns="0" rIns="0" bIns="0" rtlCol="0" anchor="ctr"/>
+          <a:lstStyle/>
+          <a:p>
+            <a:pPr algn="ctr" indent="0" marL="0">
+              <a:buNone/>
+            </a:pPr>
+            <a:r>
+              <a:rPr lang="en-US" sz="1200" dirty="0">
+                <a:solidFill>
+                  <a:srgbClr val="333333"/>
+                </a:solidFill>
+                <a:latin typeface="Arial" pitchFamily="34" charset="0"/>
+                <a:ea typeface="Arial" pitchFamily="34" charset="-122"/>
+                <a:cs typeface="Arial" pitchFamily="34" charset="-120"/>
+              </a:rPr>
+              <a:t>+</a:t>
+            </a:r>
+            <a:endParaRPr lang="en-US" sz="1200" dirty="0"/>
+          </a:p>
+        </p:txBody>
+      </p:sp>
+      <p:sp>
+        <p:nvSpPr>
+          <p:cNvPr id="12" name="Text 10"/>
+          <p:cNvSpPr/>
+          <p:nvPr/>
+        </p:nvSpPr>
+        <p:spPr>
+          <a:xfrm>
+            <a:off x="3703320" y="1874520"/>
+            <a:ext cx="274320" cy="274320"/>
+          </a:xfrm>
+          <a:prstGeom prst="rect">
+            <a:avLst/>
+          </a:prstGeom>
+          <a:noFill/>
+          <a:ln/>
+        </p:spPr>
+        <p:txBody>
+          <a:bodyPr wrap="square" lIns="0" tIns="0" rIns="0" bIns="0" rtlCol="0" anchor="ctr"/>
+          <a:lstStyle/>
+          <a:p>
+            <a:pPr algn="ctr" indent="0" marL="0">
+              <a:buNone/>
+            </a:pPr>
+            <a:r>
+              <a:rPr lang="en-US" sz="1200" dirty="0">
+                <a:solidFill>
+                  <a:srgbClr val="333333"/>
+                </a:solidFill>
+                <a:latin typeface="Arial" pitchFamily="34" charset="0"/>
+                <a:ea typeface="Arial" pitchFamily="34" charset="-122"/>
+                <a:cs typeface="Arial" pitchFamily="34" charset="-120"/>
+              </a:rPr>
+              <a:t>+</a:t>
+            </a:r>
+            <a:endParaRPr lang="en-US" sz="1200" dirty="0"/>
+          </a:p>
+        </p:txBody>
+      </p:sp>
+      <p:sp>
+        <p:nvSpPr>
+          <p:cNvPr id="13" name="Text 11"/>
+          <p:cNvSpPr/>
+          <p:nvPr/>
+        </p:nvSpPr>
+        <p:spPr>
+          <a:xfrm>
+            <a:off x="5166360" y="1874520"/>
+            <a:ext cx="274320" cy="274320"/>
+          </a:xfrm>
+          <a:prstGeom prst="rect">
+            <a:avLst/>
+          </a:prstGeom>
+          <a:noFill/>
+          <a:ln/>
+        </p:spPr>
+        <p:txBody>
+          <a:bodyPr wrap="square" lIns="0" tIns="0" rIns="0" bIns="0" rtlCol="0" anchor="ctr"/>
+          <a:lstStyle/>
+          <a:p>
+            <a:pPr algn="ctr" indent="0" marL="0">
+              <a:buNone/>
+            </a:pPr>
+            <a:r>
+              <a:rPr lang="en-US" sz="1200" dirty="0">
+                <a:solidFill>
+                  <a:srgbClr val="333333"/>
+                </a:solidFill>
+                <a:latin typeface="Arial" pitchFamily="34" charset="0"/>
+                <a:ea typeface="Arial" pitchFamily="34" charset="-122"/>
+                <a:cs typeface="Arial" pitchFamily="34" charset="-120"/>
+              </a:rPr>
+              <a:t>+</a:t>
+            </a:r>
+            <a:endParaRPr lang="en-US" sz="1200" dirty="0"/>
+          </a:p>
+        </p:txBody>
+      </p:sp>
+      <p:sp>
+        <p:nvSpPr>
+          <p:cNvPr id="14" name="Text 12"/>
+          <p:cNvSpPr/>
+          <p:nvPr/>
+        </p:nvSpPr>
+        <p:spPr>
+          <a:xfrm>
+            <a:off x="6629400" y="1874520"/>
+            <a:ext cx="274320" cy="274320"/>
+          </a:xfrm>
+          <a:prstGeom prst="rect">
+            <a:avLst/>
+          </a:prstGeom>
+          <a:noFill/>
+          <a:ln/>
+        </p:spPr>
+        <p:txBody>
+          <a:bodyPr wrap="square" lIns="0" tIns="0" rIns="0" bIns="0" rtlCol="0" anchor="ctr"/>
+          <a:lstStyle/>
+          <a:p>
+            <a:pPr algn="ctr" indent="0" marL="0">
+              <a:buNone/>
+            </a:pPr>
+            <a:r>
+              <a:rPr lang="en-US" sz="1200" dirty="0">
+                <a:solidFill>
+                  <a:srgbClr val="333333"/>
+                </a:solidFill>
+                <a:latin typeface="Arial" pitchFamily="34" charset="0"/>
+                <a:ea typeface="Arial" pitchFamily="34" charset="-122"/>
+                <a:cs typeface="Arial" pitchFamily="34" charset="-120"/>
+              </a:rPr>
+              <a:t>+</a:t>
+            </a:r>
+            <a:endParaRPr lang="en-US" sz="1200" dirty="0"/>
+          </a:p>
+        </p:txBody>
+      </p:sp>
+      <p:sp>
+        <p:nvSpPr>
+          <p:cNvPr id="15" name="Text 13"/>
+          <p:cNvSpPr/>
+          <p:nvPr/>
+        </p:nvSpPr>
+        <p:spPr>
+          <a:xfrm>
+            <a:off x="8092440" y="1874520"/>
+            <a:ext cx="274320" cy="274320"/>
+          </a:xfrm>
+          <a:prstGeom prst="rect">
+            <a:avLst/>
+          </a:prstGeom>
+          <a:noFill/>
+          <a:ln/>
+        </p:spPr>
+        <p:txBody>
+          <a:bodyPr wrap="square" lIns="0" tIns="0" rIns="0" bIns="0" rtlCol="0" anchor="ctr"/>
+          <a:lstStyle/>
+          <a:p>
+            <a:pPr algn="ctr" indent="0" marL="0">
+              <a:buNone/>
+            </a:pPr>
+            <a:r>
+              <a:rPr lang="en-US" sz="1200" dirty="0">
+                <a:solidFill>
+                  <a:srgbClr val="333333"/>
+                </a:solidFill>
+                <a:latin typeface="Arial" pitchFamily="34" charset="0"/>
+                <a:ea typeface="Arial" pitchFamily="34" charset="-122"/>
+                <a:cs typeface="Arial" pitchFamily="34" charset="-120"/>
+              </a:rPr>
+              <a:t>+</a:t>
+            </a:r>
+            <a:endParaRPr lang="en-US" sz="1200" dirty="0"/>
+          </a:p>
+        </p:txBody>
+      </p:sp>
+      <p:sp>
+        <p:nvSpPr>
+          <p:cNvPr id="16" name="Text 14"/>
+          <p:cNvSpPr/>
+          <p:nvPr/>
+        </p:nvSpPr>
+        <p:spPr>
+          <a:xfrm>
+            <a:off x="9555480" y="1874520"/>
+            <a:ext cx="274320" cy="274320"/>
+          </a:xfrm>
+          <a:prstGeom prst="rect">
+            <a:avLst/>
+          </a:prstGeom>
+          <a:noFill/>
+          <a:ln/>
+        </p:spPr>
+        <p:txBody>
+          <a:bodyPr wrap="square" lIns="0" tIns="0" rIns="0" bIns="0" rtlCol="0" anchor="ctr"/>
+          <a:lstStyle/>
+          <a:p>
+            <a:pPr algn="ctr" indent="0" marL="0">
+              <a:buNone/>
+            </a:pPr>
+            <a:r>
+              <a:rPr lang="en-US" sz="1200" dirty="0">
+                <a:solidFill>
+                  <a:srgbClr val="333333"/>
+                </a:solidFill>
+                <a:latin typeface="Arial" pitchFamily="34" charset="0"/>
+                <a:ea typeface="Arial" pitchFamily="34" charset="-122"/>
+                <a:cs typeface="Arial" pitchFamily="34" charset="-120"/>
+              </a:rPr>
+              <a:t>+</a:t>
+            </a:r>
+            <a:endParaRPr lang="en-US" sz="1200" dirty="0"/>
+          </a:p>
+        </p:txBody>
+      </p:sp>
+      <p:sp>
+        <p:nvSpPr>
+          <p:cNvPr id="17" name="Text 15"/>
+          <p:cNvSpPr/>
+          <p:nvPr/>
+        </p:nvSpPr>
+        <p:spPr>
+          <a:xfrm>
+            <a:off x="11018520" y="1874520"/>
+            <a:ext cx="274320" cy="274320"/>
+          </a:xfrm>
+          <a:prstGeom prst="rect">
+            <a:avLst/>
+          </a:prstGeom>
+          <a:noFill/>
+          <a:ln/>
+        </p:spPr>
+        <p:txBody>
+          <a:bodyPr wrap="square" lIns="0" tIns="0" rIns="0" bIns="0" rtlCol="0" anchor="ctr"/>
+          <a:lstStyle/>
+          <a:p>
+            <a:pPr algn="ctr" indent="0" marL="0">
+              <a:buNone/>
+            </a:pPr>
+            <a:r>
+              <a:rPr lang="en-US" sz="1200" dirty="0">
+                <a:solidFill>
+                  <a:srgbClr val="333333"/>
+                </a:solidFill>
+                <a:latin typeface="Arial" pitchFamily="34" charset="0"/>
+                <a:ea typeface="Arial" pitchFamily="34" charset="-122"/>
+                <a:cs typeface="Arial" pitchFamily="34" charset="-120"/>
+              </a:rPr>
+              <a:t>+</a:t>
+            </a:r>
+            <a:endParaRPr lang="en-US" sz="1200" dirty="0"/>
+          </a:p>
+        </p:txBody>
+      </p:sp>
+      <p:sp>
+        <p:nvSpPr>
+          <p:cNvPr id="18" name="Text 16"/>
+          <p:cNvSpPr/>
+          <p:nvPr/>
+        </p:nvSpPr>
+        <p:spPr>
+          <a:xfrm>
+            <a:off x="777240" y="3063240"/>
+            <a:ext cx="274320" cy="274320"/>
+          </a:xfrm>
+          <a:prstGeom prst="rect">
+            <a:avLst/>
+          </a:prstGeom>
+          <a:noFill/>
+          <a:ln/>
+        </p:spPr>
+        <p:txBody>
+          <a:bodyPr wrap="square" lIns="0" tIns="0" rIns="0" bIns="0" rtlCol="0" anchor="ctr"/>
+          <a:lstStyle/>
+          <a:p>
+            <a:pPr algn="ctr" indent="0" marL="0">
+              <a:buNone/>
+            </a:pPr>
+            <a:r>
+              <a:rPr lang="en-US" sz="1200" dirty="0">
+                <a:solidFill>
+                  <a:srgbClr val="333333"/>
+                </a:solidFill>
+                <a:latin typeface="Arial" pitchFamily="34" charset="0"/>
+                <a:ea typeface="Arial" pitchFamily="34" charset="-122"/>
+                <a:cs typeface="Arial" pitchFamily="34" charset="-120"/>
+              </a:rPr>
+              <a:t>+</a:t>
+            </a:r>
+            <a:endParaRPr lang="en-US" sz="1200" dirty="0"/>
+          </a:p>
+        </p:txBody>
+      </p:sp>
+      <p:sp>
+        <p:nvSpPr>
+          <p:cNvPr id="19" name="Text 17"/>
+          <p:cNvSpPr/>
+          <p:nvPr/>
+        </p:nvSpPr>
+        <p:spPr>
+          <a:xfrm>
+            <a:off x="2240280" y="3063240"/>
+            <a:ext cx="274320" cy="274320"/>
+          </a:xfrm>
+          <a:prstGeom prst="rect">
+            <a:avLst/>
+          </a:prstGeom>
+          <a:noFill/>
+          <a:ln/>
+        </p:spPr>
+        <p:txBody>
+          <a:bodyPr wrap="square" lIns="0" tIns="0" rIns="0" bIns="0" rtlCol="0" anchor="ctr"/>
+          <a:lstStyle/>
+          <a:p>
+            <a:pPr algn="ctr" indent="0" marL="0">
+              <a:buNone/>
+            </a:pPr>
+            <a:r>
+              <a:rPr lang="en-US" sz="1200" dirty="0">
+                <a:solidFill>
+                  <a:srgbClr val="333333"/>
+                </a:solidFill>
+                <a:latin typeface="Arial" pitchFamily="34" charset="0"/>
+                <a:ea typeface="Arial" pitchFamily="34" charset="-122"/>
+                <a:cs typeface="Arial" pitchFamily="34" charset="-120"/>
+              </a:rPr>
+              <a:t>+</a:t>
+            </a:r>
+            <a:endParaRPr lang="en-US" sz="1200" dirty="0"/>
+          </a:p>
+        </p:txBody>
+      </p:sp>
+      <p:sp>
+        <p:nvSpPr>
+          <p:cNvPr id="20" name="Text 18"/>
+          <p:cNvSpPr/>
+          <p:nvPr/>
+        </p:nvSpPr>
+        <p:spPr>
+          <a:xfrm>
+            <a:off x="3703320" y="3063240"/>
+            <a:ext cx="274320" cy="274320"/>
+          </a:xfrm>
+          <a:prstGeom prst="rect">
+            <a:avLst/>
+          </a:prstGeom>
+          <a:noFill/>
+          <a:ln/>
+        </p:spPr>
+        <p:txBody>
+          <a:bodyPr wrap="square" lIns="0" tIns="0" rIns="0" bIns="0" rtlCol="0" anchor="ctr"/>
+          <a:lstStyle/>
+          <a:p>
+            <a:pPr algn="ctr" indent="0" marL="0">
+              <a:buNone/>
+            </a:pPr>
+            <a:r>
+              <a:rPr lang="en-US" sz="1200" dirty="0">
+                <a:solidFill>
+                  <a:srgbClr val="333333"/>
+                </a:solidFill>
+                <a:latin typeface="Arial" pitchFamily="34" charset="0"/>
+                <a:ea typeface="Arial" pitchFamily="34" charset="-122"/>
+                <a:cs typeface="Arial" pitchFamily="34" charset="-120"/>
+              </a:rPr>
+              <a:t>+</a:t>
+            </a:r>
+            <a:endParaRPr lang="en-US" sz="1200" dirty="0"/>
+          </a:p>
+        </p:txBody>
+      </p:sp>
+      <p:sp>
+        <p:nvSpPr>
+          <p:cNvPr id="21" name="Text 19"/>
+          <p:cNvSpPr/>
+          <p:nvPr/>
+        </p:nvSpPr>
+        <p:spPr>
+          <a:xfrm>
+            <a:off x="5166360" y="3063240"/>
+            <a:ext cx="274320" cy="274320"/>
+          </a:xfrm>
+          <a:prstGeom prst="rect">
+            <a:avLst/>
+          </a:prstGeom>
+          <a:noFill/>
+          <a:ln/>
+        </p:spPr>
+        <p:txBody>
+          <a:bodyPr wrap="square" lIns="0" tIns="0" rIns="0" bIns="0" rtlCol="0" anchor="ctr"/>
+          <a:lstStyle/>
+          <a:p>
+            <a:pPr algn="ctr" indent="0" marL="0">
+              <a:buNone/>
+            </a:pPr>
+            <a:r>
+              <a:rPr lang="en-US" sz="1200" dirty="0">
+                <a:solidFill>
+                  <a:srgbClr val="333333"/>
+                </a:solidFill>
+                <a:latin typeface="Arial" pitchFamily="34" charset="0"/>
+                <a:ea typeface="Arial" pitchFamily="34" charset="-122"/>
+                <a:cs typeface="Arial" pitchFamily="34" charset="-120"/>
+              </a:rPr>
+              <a:t>+</a:t>
+            </a:r>
+            <a:endParaRPr lang="en-US" sz="1200" dirty="0"/>
+          </a:p>
+        </p:txBody>
+      </p:sp>
+      <p:sp>
+        <p:nvSpPr>
+          <p:cNvPr id="22" name="Text 20"/>
+          <p:cNvSpPr/>
+          <p:nvPr/>
+        </p:nvSpPr>
+        <p:spPr>
+          <a:xfrm>
+            <a:off x="6629400" y="3063240"/>
+            <a:ext cx="274320" cy="274320"/>
+          </a:xfrm>
+          <a:prstGeom prst="rect">
+            <a:avLst/>
+          </a:prstGeom>
+          <a:noFill/>
+          <a:ln/>
+        </p:spPr>
+        <p:txBody>
+          <a:bodyPr wrap="square" lIns="0" tIns="0" rIns="0" bIns="0" rtlCol="0" anchor="ctr"/>
+          <a:lstStyle/>
+          <a:p>
+            <a:pPr algn="ctr" indent="0" marL="0">
+              <a:buNone/>
+            </a:pPr>
+            <a:r>
+              <a:rPr lang="en-US" sz="1200" dirty="0">
+                <a:solidFill>
+                  <a:srgbClr val="333333"/>
+                </a:solidFill>
+                <a:latin typeface="Arial" pitchFamily="34" charset="0"/>
+                <a:ea typeface="Arial" pitchFamily="34" charset="-122"/>
+                <a:cs typeface="Arial" pitchFamily="34" charset="-120"/>
+              </a:rPr>
+              <a:t>+</a:t>
+            </a:r>
+            <a:endParaRPr lang="en-US" sz="1200" dirty="0"/>
+          </a:p>
+        </p:txBody>
+      </p:sp>
+      <p:sp>
+        <p:nvSpPr>
+          <p:cNvPr id="23" name="Text 21"/>
+          <p:cNvSpPr/>
+          <p:nvPr/>
+        </p:nvSpPr>
+        <p:spPr>
+          <a:xfrm>
+            <a:off x="8092440" y="3063240"/>
+            <a:ext cx="274320" cy="274320"/>
+          </a:xfrm>
+          <a:prstGeom prst="rect">
+            <a:avLst/>
+          </a:prstGeom>
+          <a:noFill/>
+          <a:ln/>
+        </p:spPr>
+        <p:txBody>
+          <a:bodyPr wrap="square" lIns="0" tIns="0" rIns="0" bIns="0" rtlCol="0" anchor="ctr"/>
+          <a:lstStyle/>
+          <a:p>
+            <a:pPr algn="ctr" indent="0" marL="0">
+              <a:buNone/>
+            </a:pPr>
+            <a:r>
+              <a:rPr lang="en-US" sz="1200" dirty="0">
+                <a:solidFill>
+                  <a:srgbClr val="333333"/>
+                </a:solidFill>
+                <a:latin typeface="Arial" pitchFamily="34" charset="0"/>
+                <a:ea typeface="Arial" pitchFamily="34" charset="-122"/>
+                <a:cs typeface="Arial" pitchFamily="34" charset="-120"/>
+              </a:rPr>
+              <a:t>+</a:t>
+            </a:r>
+            <a:endParaRPr lang="en-US" sz="1200" dirty="0"/>
+          </a:p>
+        </p:txBody>
+      </p:sp>
+      <p:sp>
+        <p:nvSpPr>
+          <p:cNvPr id="24" name="Text 22"/>
+          <p:cNvSpPr/>
+          <p:nvPr/>
+        </p:nvSpPr>
+        <p:spPr>
+          <a:xfrm>
+            <a:off x="9555480" y="3063240"/>
+            <a:ext cx="274320" cy="274320"/>
+          </a:xfrm>
+          <a:prstGeom prst="rect">
+            <a:avLst/>
+          </a:prstGeom>
+          <a:noFill/>
+          <a:ln/>
+        </p:spPr>
+        <p:txBody>
+          <a:bodyPr wrap="square" lIns="0" tIns="0" rIns="0" bIns="0" rtlCol="0" anchor="ctr"/>
+          <a:lstStyle/>
+          <a:p>
+            <a:pPr algn="ctr" indent="0" marL="0">
+              <a:buNone/>
+            </a:pPr>
+            <a:r>
+              <a:rPr lang="en-US" sz="1200" dirty="0">
+                <a:solidFill>
+                  <a:srgbClr val="333333"/>
+                </a:solidFill>
+                <a:latin typeface="Arial" pitchFamily="34" charset="0"/>
+                <a:ea typeface="Arial" pitchFamily="34" charset="-122"/>
+                <a:cs typeface="Arial" pitchFamily="34" charset="-120"/>
+              </a:rPr>
+              <a:t>+</a:t>
+            </a:r>
+            <a:endParaRPr lang="en-US" sz="1200" dirty="0"/>
+          </a:p>
+        </p:txBody>
+      </p:sp>
+      <p:sp>
+        <p:nvSpPr>
+          <p:cNvPr id="25" name="Text 23"/>
+          <p:cNvSpPr/>
+          <p:nvPr/>
+        </p:nvSpPr>
+        <p:spPr>
+          <a:xfrm>
+            <a:off x="11018520" y="3063240"/>
+            <a:ext cx="274320" cy="274320"/>
+          </a:xfrm>
+          <a:prstGeom prst="rect">
+            <a:avLst/>
+          </a:prstGeom>
+          <a:noFill/>
+          <a:ln/>
+        </p:spPr>
+        <p:txBody>
+          <a:bodyPr wrap="square" lIns="0" tIns="0" rIns="0" bIns="0" rtlCol="0" anchor="ctr"/>
+          <a:lstStyle/>
+          <a:p>
+            <a:pPr algn="ctr" indent="0" marL="0">
+              <a:buNone/>
+            </a:pPr>
+            <a:r>
+              <a:rPr lang="en-US" sz="1200" dirty="0">
+                <a:solidFill>
+                  <a:srgbClr val="333333"/>
+                </a:solidFill>
+                <a:latin typeface="Arial" pitchFamily="34" charset="0"/>
+                <a:ea typeface="Arial" pitchFamily="34" charset="-122"/>
+                <a:cs typeface="Arial" pitchFamily="34" charset="-120"/>
+              </a:rPr>
+              <a:t>+</a:t>
+            </a:r>
+            <a:endParaRPr lang="en-US" sz="1200" dirty="0"/>
+          </a:p>
+        </p:txBody>
+      </p:sp>
+      <p:sp>
+        <p:nvSpPr>
+          <p:cNvPr id="26" name="Text 24"/>
+          <p:cNvSpPr/>
+          <p:nvPr/>
+        </p:nvSpPr>
+        <p:spPr>
+          <a:xfrm>
+            <a:off x="777240" y="4251960"/>
+            <a:ext cx="274320" cy="274320"/>
+          </a:xfrm>
+          <a:prstGeom prst="rect">
+            <a:avLst/>
+          </a:prstGeom>
+          <a:noFill/>
+          <a:ln/>
+        </p:spPr>
+        <p:txBody>
+          <a:bodyPr wrap="square" lIns="0" tIns="0" rIns="0" bIns="0" rtlCol="0" anchor="ctr"/>
+          <a:lstStyle/>
+          <a:p>
+            <a:pPr algn="ctr" indent="0" marL="0">
+              <a:buNone/>
+            </a:pPr>
+            <a:r>
+              <a:rPr lang="en-US" sz="1200" dirty="0">
+                <a:solidFill>
+                  <a:srgbClr val="333333"/>
+                </a:solidFill>
+                <a:latin typeface="Arial" pitchFamily="34" charset="0"/>
+                <a:ea typeface="Arial" pitchFamily="34" charset="-122"/>
+                <a:cs typeface="Arial" pitchFamily="34" charset="-120"/>
+              </a:rPr>
+              <a:t>+</a:t>
+            </a:r>
+            <a:endParaRPr lang="en-US" sz="1200" dirty="0"/>
+          </a:p>
+        </p:txBody>
+      </p:sp>
+      <p:sp>
+        <p:nvSpPr>
+          <p:cNvPr id="27" name="Text 25"/>
+          <p:cNvSpPr/>
+          <p:nvPr/>
+        </p:nvSpPr>
+        <p:spPr>
+          <a:xfrm>
+            <a:off x="2240280" y="4251960"/>
+            <a:ext cx="274320" cy="274320"/>
+          </a:xfrm>
+          <a:prstGeom prst="rect">
+            <a:avLst/>
+          </a:prstGeom>
+          <a:noFill/>
+          <a:ln/>
+        </p:spPr>
+        <p:txBody>
+          <a:bodyPr wrap="square" lIns="0" tIns="0" rIns="0" bIns="0" rtlCol="0" anchor="ctr"/>
+          <a:lstStyle/>
+          <a:p>
+            <a:pPr algn="ctr" indent="0" marL="0">
+              <a:buNone/>
+            </a:pPr>
+            <a:r>
+              <a:rPr lang="en-US" sz="1200" dirty="0">
+                <a:solidFill>
+                  <a:srgbClr val="333333"/>
+                </a:solidFill>
+                <a:latin typeface="Arial" pitchFamily="34" charset="0"/>
+                <a:ea typeface="Arial" pitchFamily="34" charset="-122"/>
+                <a:cs typeface="Arial" pitchFamily="34" charset="-120"/>
+              </a:rPr>
+              <a:t>+</a:t>
+            </a:r>
+            <a:endParaRPr lang="en-US" sz="1200" dirty="0"/>
+          </a:p>
+        </p:txBody>
+      </p:sp>
+      <p:sp>
+        <p:nvSpPr>
+          <p:cNvPr id="28" name="Text 26"/>
+          <p:cNvSpPr/>
+          <p:nvPr/>
+        </p:nvSpPr>
+        <p:spPr>
+          <a:xfrm>
+            <a:off x="3703320" y="4251960"/>
+            <a:ext cx="274320" cy="274320"/>
+          </a:xfrm>
+          <a:prstGeom prst="rect">
+            <a:avLst/>
+          </a:prstGeom>
+          <a:noFill/>
+          <a:ln/>
+        </p:spPr>
+        <p:txBody>
+          <a:bodyPr wrap="square" lIns="0" tIns="0" rIns="0" bIns="0" rtlCol="0" anchor="ctr"/>
+          <a:lstStyle/>
+          <a:p>
+            <a:pPr algn="ctr" indent="0" marL="0">
+              <a:buNone/>
+            </a:pPr>
+            <a:r>
+              <a:rPr lang="en-US" sz="1200" dirty="0">
+                <a:solidFill>
+                  <a:srgbClr val="333333"/>
+                </a:solidFill>
+                <a:latin typeface="Arial" pitchFamily="34" charset="0"/>
+                <a:ea typeface="Arial" pitchFamily="34" charset="-122"/>
+                <a:cs typeface="Arial" pitchFamily="34" charset="-120"/>
+              </a:rPr>
+              <a:t>+</a:t>
+            </a:r>
+            <a:endParaRPr lang="en-US" sz="1200" dirty="0"/>
+          </a:p>
+        </p:txBody>
+      </p:sp>
+      <p:sp>
+        <p:nvSpPr>
+          <p:cNvPr id="29" name="Text 27"/>
+          <p:cNvSpPr/>
+          <p:nvPr/>
+        </p:nvSpPr>
+        <p:spPr>
+          <a:xfrm>
+            <a:off x="5166360" y="4251960"/>
+            <a:ext cx="274320" cy="274320"/>
+          </a:xfrm>
+          <a:prstGeom prst="rect">
+            <a:avLst/>
+          </a:prstGeom>
+          <a:noFill/>
+          <a:ln/>
+        </p:spPr>
+        <p:txBody>
+          <a:bodyPr wrap="square" lIns="0" tIns="0" rIns="0" bIns="0" rtlCol="0" anchor="ctr"/>
+          <a:lstStyle/>
+          <a:p>
+            <a:pPr algn="ctr" indent="0" marL="0">
+              <a:buNone/>
+            </a:pPr>
+            <a:r>
+              <a:rPr lang="en-US" sz="1200" dirty="0">
+                <a:solidFill>
+                  <a:srgbClr val="333333"/>
+                </a:solidFill>
+                <a:latin typeface="Arial" pitchFamily="34" charset="0"/>
+                <a:ea typeface="Arial" pitchFamily="34" charset="-122"/>
+                <a:cs typeface="Arial" pitchFamily="34" charset="-120"/>
+              </a:rPr>
+              <a:t>+</a:t>
+            </a:r>
+            <a:endParaRPr lang="en-US" sz="1200" dirty="0"/>
+          </a:p>
+        </p:txBody>
+      </p:sp>
+      <p:sp>
+        <p:nvSpPr>
+          <p:cNvPr id="30" name="Text 28"/>
+          <p:cNvSpPr/>
+          <p:nvPr/>
+        </p:nvSpPr>
+        <p:spPr>
+          <a:xfrm>
+            <a:off x="6629400" y="4251960"/>
+            <a:ext cx="274320" cy="274320"/>
+          </a:xfrm>
+          <a:prstGeom prst="rect">
+            <a:avLst/>
+          </a:prstGeom>
+          <a:noFill/>
+          <a:ln/>
+        </p:spPr>
+        <p:txBody>
+          <a:bodyPr wrap="square" lIns="0" tIns="0" rIns="0" bIns="0" rtlCol="0" anchor="ctr"/>
+          <a:lstStyle/>
+          <a:p>
+            <a:pPr algn="ctr" indent="0" marL="0">
+              <a:buNone/>
+            </a:pPr>
+            <a:r>
+              <a:rPr lang="en-US" sz="1200" dirty="0">
+                <a:solidFill>
+                  <a:srgbClr val="333333"/>
+                </a:solidFill>
+                <a:latin typeface="Arial" pitchFamily="34" charset="0"/>
+                <a:ea typeface="Arial" pitchFamily="34" charset="-122"/>
+                <a:cs typeface="Arial" pitchFamily="34" charset="-120"/>
+              </a:rPr>
+              <a:t>+</a:t>
+            </a:r>
+            <a:endParaRPr lang="en-US" sz="1200" dirty="0"/>
+          </a:p>
+        </p:txBody>
+      </p:sp>
+      <p:sp>
+        <p:nvSpPr>
+          <p:cNvPr id="31" name="Text 29"/>
+          <p:cNvSpPr/>
+          <p:nvPr/>
+        </p:nvSpPr>
+        <p:spPr>
+          <a:xfrm>
+            <a:off x="8092440" y="4251960"/>
+            <a:ext cx="274320" cy="274320"/>
+          </a:xfrm>
+          <a:prstGeom prst="rect">
+            <a:avLst/>
+          </a:prstGeom>
+          <a:noFill/>
+          <a:ln/>
+        </p:spPr>
+        <p:txBody>
+          <a:bodyPr wrap="square" lIns="0" tIns="0" rIns="0" bIns="0" rtlCol="0" anchor="ctr"/>
+          <a:lstStyle/>
+          <a:p>
+            <a:pPr algn="ctr" indent="0" marL="0">
+              <a:buNone/>
+            </a:pPr>
+            <a:r>
+              <a:rPr lang="en-US" sz="1200" dirty="0">
+                <a:solidFill>
+                  <a:srgbClr val="333333"/>
+                </a:solidFill>
+                <a:latin typeface="Arial" pitchFamily="34" charset="0"/>
+                <a:ea typeface="Arial" pitchFamily="34" charset="-122"/>
+                <a:cs typeface="Arial" pitchFamily="34" charset="-120"/>
+              </a:rPr>
+              <a:t>+</a:t>
+            </a:r>
+            <a:endParaRPr lang="en-US" sz="1200" dirty="0"/>
+          </a:p>
+        </p:txBody>
+      </p:sp>
+      <p:sp>
+        <p:nvSpPr>
+          <p:cNvPr id="32" name="Text 30"/>
+          <p:cNvSpPr/>
+          <p:nvPr/>
+        </p:nvSpPr>
+        <p:spPr>
+          <a:xfrm>
+            <a:off x="9555480" y="4251960"/>
+            <a:ext cx="274320" cy="274320"/>
+          </a:xfrm>
+          <a:prstGeom prst="rect">
+            <a:avLst/>
+          </a:prstGeom>
+          <a:noFill/>
+          <a:ln/>
+        </p:spPr>
+        <p:txBody>
+          <a:bodyPr wrap="square" lIns="0" tIns="0" rIns="0" bIns="0" rtlCol="0" anchor="ctr"/>
+          <a:lstStyle/>
+          <a:p>
+            <a:pPr algn="ctr" indent="0" marL="0">
+              <a:buNone/>
+            </a:pPr>
+            <a:r>
+              <a:rPr lang="en-US" sz="1200" dirty="0">
+                <a:solidFill>
+                  <a:srgbClr val="333333"/>
+                </a:solidFill>
+                <a:latin typeface="Arial" pitchFamily="34" charset="0"/>
+                <a:ea typeface="Arial" pitchFamily="34" charset="-122"/>
+                <a:cs typeface="Arial" pitchFamily="34" charset="-120"/>
+              </a:rPr>
+              <a:t>+</a:t>
+            </a:r>
+            <a:endParaRPr lang="en-US" sz="1200" dirty="0"/>
+          </a:p>
+        </p:txBody>
+      </p:sp>
+      <p:sp>
+        <p:nvSpPr>
+          <p:cNvPr id="33" name="Text 31"/>
+          <p:cNvSpPr/>
+          <p:nvPr/>
+        </p:nvSpPr>
+        <p:spPr>
+          <a:xfrm>
+            <a:off x="11018520" y="4251960"/>
+            <a:ext cx="274320" cy="274320"/>
+          </a:xfrm>
+          <a:prstGeom prst="rect">
+            <a:avLst/>
+          </a:prstGeom>
+          <a:noFill/>
+          <a:ln/>
+        </p:spPr>
+        <p:txBody>
+          <a:bodyPr wrap="square" lIns="0" tIns="0" rIns="0" bIns="0" rtlCol="0" anchor="ctr"/>
+          <a:lstStyle/>
+          <a:p>
+            <a:pPr algn="ctr" indent="0" marL="0">
+              <a:buNone/>
+            </a:pPr>
+            <a:r>
+              <a:rPr lang="en-US" sz="1200" dirty="0">
+                <a:solidFill>
+                  <a:srgbClr val="333333"/>
+                </a:solidFill>
+                <a:latin typeface="Arial" pitchFamily="34" charset="0"/>
+                <a:ea typeface="Arial" pitchFamily="34" charset="-122"/>
+                <a:cs typeface="Arial" pitchFamily="34" charset="-120"/>
+              </a:rPr>
+              <a:t>+</a:t>
+            </a:r>
+            <a:endParaRPr lang="en-US" sz="1200" dirty="0"/>
+          </a:p>
+        </p:txBody>
+      </p:sp>
+      <p:sp>
+        <p:nvSpPr>
+          <p:cNvPr id="34" name="Text 32"/>
+          <p:cNvSpPr/>
+          <p:nvPr/>
+        </p:nvSpPr>
+        <p:spPr>
+          <a:xfrm>
+            <a:off x="777240" y="5440680"/>
+            <a:ext cx="274320" cy="274320"/>
+          </a:xfrm>
+          <a:prstGeom prst="rect">
+            <a:avLst/>
+          </a:prstGeom>
+          <a:noFill/>
+          <a:ln/>
+        </p:spPr>
+        <p:txBody>
+          <a:bodyPr wrap="square" lIns="0" tIns="0" rIns="0" bIns="0" rtlCol="0" anchor="ctr"/>
+          <a:lstStyle/>
+          <a:p>
+            <a:pPr algn="ctr" indent="0" marL="0">
+              <a:buNone/>
+            </a:pPr>
+            <a:r>
+              <a:rPr lang="en-US" sz="1200" dirty="0">
+                <a:solidFill>
+                  <a:srgbClr val="333333"/>
+                </a:solidFill>
+                <a:latin typeface="Arial" pitchFamily="34" charset="0"/>
+                <a:ea typeface="Arial" pitchFamily="34" charset="-122"/>
+                <a:cs typeface="Arial" pitchFamily="34" charset="-120"/>
+              </a:rPr>
+              <a:t>+</a:t>
+            </a:r>
+            <a:endParaRPr lang="en-US" sz="1200" dirty="0"/>
+          </a:p>
+        </p:txBody>
+      </p:sp>
+      <p:sp>
+        <p:nvSpPr>
+          <p:cNvPr id="35" name="Text 33"/>
+          <p:cNvSpPr/>
+          <p:nvPr/>
+        </p:nvSpPr>
+        <p:spPr>
+          <a:xfrm>
+            <a:off x="2240280" y="5440680"/>
+            <a:ext cx="274320" cy="274320"/>
+          </a:xfrm>
+          <a:prstGeom prst="rect">
+            <a:avLst/>
+          </a:prstGeom>
+          <a:noFill/>
+          <a:ln/>
+        </p:spPr>
+        <p:txBody>
+          <a:bodyPr wrap="square" lIns="0" tIns="0" rIns="0" bIns="0" rtlCol="0" anchor="ctr"/>
+          <a:lstStyle/>
+          <a:p>
+            <a:pPr algn="ctr" indent="0" marL="0">
+              <a:buNone/>
+            </a:pPr>
+            <a:r>
+              <a:rPr lang="en-US" sz="1200" dirty="0">
+                <a:solidFill>
+                  <a:srgbClr val="333333"/>
+                </a:solidFill>
+                <a:latin typeface="Arial" pitchFamily="34" charset="0"/>
+                <a:ea typeface="Arial" pitchFamily="34" charset="-122"/>
+                <a:cs typeface="Arial" pitchFamily="34" charset="-120"/>
+              </a:rPr>
+              <a:t>+</a:t>
+            </a:r>
+            <a:endParaRPr lang="en-US" sz="1200" dirty="0"/>
+          </a:p>
+        </p:txBody>
+      </p:sp>
+      <p:sp>
+        <p:nvSpPr>
+          <p:cNvPr id="36" name="Text 34"/>
+          <p:cNvSpPr/>
+          <p:nvPr/>
+        </p:nvSpPr>
+        <p:spPr>
+          <a:xfrm>
+            <a:off x="3703320" y="5440680"/>
+            <a:ext cx="274320" cy="274320"/>
+          </a:xfrm>
+          <a:prstGeom prst="rect">
+            <a:avLst/>
+          </a:prstGeom>
+          <a:noFill/>
+          <a:ln/>
+        </p:spPr>
+        <p:txBody>
+          <a:bodyPr wrap="square" lIns="0" tIns="0" rIns="0" bIns="0" rtlCol="0" anchor="ctr"/>
+          <a:lstStyle/>
+          <a:p>
+            <a:pPr algn="ctr" indent="0" marL="0">
+              <a:buNone/>
+            </a:pPr>
+            <a:r>
+              <a:rPr lang="en-US" sz="1200" dirty="0">
+                <a:solidFill>
+                  <a:srgbClr val="333333"/>
+                </a:solidFill>
+                <a:latin typeface="Arial" pitchFamily="34" charset="0"/>
+                <a:ea typeface="Arial" pitchFamily="34" charset="-122"/>
+                <a:cs typeface="Arial" pitchFamily="34" charset="-120"/>
+              </a:rPr>
+              <a:t>+</a:t>
+            </a:r>
+            <a:endParaRPr lang="en-US" sz="1200" dirty="0"/>
+          </a:p>
+        </p:txBody>
+      </p:sp>
+      <p:sp>
+        <p:nvSpPr>
+          <p:cNvPr id="37" name="Text 35"/>
+          <p:cNvSpPr/>
+          <p:nvPr/>
+        </p:nvSpPr>
+        <p:spPr>
+          <a:xfrm>
+            <a:off x="5166360" y="5440680"/>
+            <a:ext cx="274320" cy="274320"/>
+          </a:xfrm>
+          <a:prstGeom prst="rect">
+            <a:avLst/>
+          </a:prstGeom>
+          <a:noFill/>
+          <a:ln/>
+        </p:spPr>
+        <p:txBody>
+          <a:bodyPr wrap="square" lIns="0" tIns="0" rIns="0" bIns="0" rtlCol="0" anchor="ctr"/>
+          <a:lstStyle/>
+          <a:p>
+            <a:pPr algn="ctr" indent="0" marL="0">
+              <a:buNone/>
+            </a:pPr>
+            <a:r>
+              <a:rPr lang="en-US" sz="1200" dirty="0">
+                <a:solidFill>
+                  <a:srgbClr val="333333"/>
+                </a:solidFill>
+                <a:latin typeface="Arial" pitchFamily="34" charset="0"/>
+                <a:ea typeface="Arial" pitchFamily="34" charset="-122"/>
+                <a:cs typeface="Arial" pitchFamily="34" charset="-120"/>
+              </a:rPr>
+              <a:t>+</a:t>
+            </a:r>
+            <a:endParaRPr lang="en-US" sz="1200" dirty="0"/>
+          </a:p>
+        </p:txBody>
+      </p:sp>
+      <p:sp>
+        <p:nvSpPr>
+          <p:cNvPr id="38" name="Text 36"/>
+          <p:cNvSpPr/>
+          <p:nvPr/>
+        </p:nvSpPr>
+        <p:spPr>
+          <a:xfrm>
+            <a:off x="6629400" y="5440680"/>
+            <a:ext cx="274320" cy="274320"/>
+          </a:xfrm>
+          <a:prstGeom prst="rect">
+            <a:avLst/>
+          </a:prstGeom>
+          <a:noFill/>
+          <a:ln/>
+        </p:spPr>
+        <p:txBody>
+          <a:bodyPr wrap="square" lIns="0" tIns="0" rIns="0" bIns="0" rtlCol="0" anchor="ctr"/>
+          <a:lstStyle/>
+          <a:p>
+            <a:pPr algn="ctr" indent="0" marL="0">
+              <a:buNone/>
+            </a:pPr>
+            <a:r>
+              <a:rPr lang="en-US" sz="1200" dirty="0">
+                <a:solidFill>
+                  <a:srgbClr val="333333"/>
+                </a:solidFill>
+                <a:latin typeface="Arial" pitchFamily="34" charset="0"/>
+                <a:ea typeface="Arial" pitchFamily="34" charset="-122"/>
+                <a:cs typeface="Arial" pitchFamily="34" charset="-120"/>
+              </a:rPr>
+              <a:t>+</a:t>
+            </a:r>
+            <a:endParaRPr lang="en-US" sz="1200" dirty="0"/>
+          </a:p>
+        </p:txBody>
+      </p:sp>
+      <p:sp>
+        <p:nvSpPr>
+          <p:cNvPr id="39" name="Text 37"/>
+          <p:cNvSpPr/>
+          <p:nvPr/>
+        </p:nvSpPr>
+        <p:spPr>
+          <a:xfrm>
+            <a:off x="8092440" y="5440680"/>
+            <a:ext cx="274320" cy="274320"/>
+          </a:xfrm>
+          <a:prstGeom prst="rect">
+            <a:avLst/>
+          </a:prstGeom>
+          <a:noFill/>
+          <a:ln/>
+        </p:spPr>
+        <p:txBody>
+          <a:bodyPr wrap="square" lIns="0" tIns="0" rIns="0" bIns="0" rtlCol="0" anchor="ctr"/>
+          <a:lstStyle/>
+          <a:p>
+            <a:pPr algn="ctr" indent="0" marL="0">
+              <a:buNone/>
+            </a:pPr>
+            <a:r>
+              <a:rPr lang="en-US" sz="1200" dirty="0">
+                <a:solidFill>
+                  <a:srgbClr val="333333"/>
+                </a:solidFill>
+                <a:latin typeface="Arial" pitchFamily="34" charset="0"/>
+                <a:ea typeface="Arial" pitchFamily="34" charset="-122"/>
+                <a:cs typeface="Arial" pitchFamily="34" charset="-120"/>
+              </a:rPr>
+              <a:t>+</a:t>
+            </a:r>
+            <a:endParaRPr lang="en-US" sz="1200" dirty="0"/>
+          </a:p>
+        </p:txBody>
+      </p:sp>
+      <p:sp>
+        <p:nvSpPr>
+          <p:cNvPr id="40" name="Text 38"/>
+          <p:cNvSpPr/>
+          <p:nvPr/>
+        </p:nvSpPr>
+        <p:spPr>
+          <a:xfrm>
+            <a:off x="9555480" y="5440680"/>
+            <a:ext cx="274320" cy="274320"/>
+          </a:xfrm>
+          <a:prstGeom prst="rect">
+            <a:avLst/>
+          </a:prstGeom>
+          <a:noFill/>
+          <a:ln/>
+        </p:spPr>
+        <p:txBody>
+          <a:bodyPr wrap="square" lIns="0" tIns="0" rIns="0" bIns="0" rtlCol="0" anchor="ctr"/>
+          <a:lstStyle/>
+          <a:p>
+            <a:pPr algn="ctr" indent="0" marL="0">
+              <a:buNone/>
+            </a:pPr>
+            <a:r>
+              <a:rPr lang="en-US" sz="1200" dirty="0">
+                <a:solidFill>
+                  <a:srgbClr val="333333"/>
+                </a:solidFill>
+                <a:latin typeface="Arial" pitchFamily="34" charset="0"/>
+                <a:ea typeface="Arial" pitchFamily="34" charset="-122"/>
+                <a:cs typeface="Arial" pitchFamily="34" charset="-120"/>
+              </a:rPr>
+              <a:t>+</a:t>
+            </a:r>
+            <a:endParaRPr lang="en-US" sz="1200" dirty="0"/>
+          </a:p>
+        </p:txBody>
+      </p:sp>
+      <p:sp>
+        <p:nvSpPr>
+          <p:cNvPr id="41" name="Text 39"/>
+          <p:cNvSpPr/>
+          <p:nvPr/>
+        </p:nvSpPr>
+        <p:spPr>
+          <a:xfrm>
+            <a:off x="11018520" y="5440680"/>
+            <a:ext cx="274320" cy="274320"/>
+          </a:xfrm>
+          <a:prstGeom prst="rect">
+            <a:avLst/>
+          </a:prstGeom>
+          <a:noFill/>
+          <a:ln/>
+        </p:spPr>
+        <p:txBody>
+          <a:bodyPr wrap="square" lIns="0" tIns="0" rIns="0" bIns="0" rtlCol="0" anchor="ctr"/>
+          <a:lstStyle/>
+          <a:p>
+            <a:pPr algn="ctr" indent="0" marL="0">
+              <a:buNone/>
+            </a:pPr>
+            <a:r>
+              <a:rPr lang="en-US" sz="1200" dirty="0">
+                <a:solidFill>
+                  <a:srgbClr val="333333"/>
+                </a:solidFill>
+                <a:latin typeface="Arial" pitchFamily="34" charset="0"/>
+                <a:ea typeface="Arial" pitchFamily="34" charset="-122"/>
+                <a:cs typeface="Arial" pitchFamily="34" charset="-120"/>
+              </a:rPr>
+              <a:t>+</a:t>
+            </a:r>
+            <a:endParaRPr lang="en-US" sz="1200" dirty="0"/>
+          </a:p>
+        </p:txBody>
+      </p:sp>
+      <p:sp>
+        <p:nvSpPr>
+          <p:cNvPr id="42" name="Text 40"/>
+          <p:cNvSpPr/>
+          <p:nvPr/>
+        </p:nvSpPr>
+        <p:spPr>
+          <a:xfrm>
             <a:off x="548640" y="411480"/>
             <a:ext cx="7315200" cy="365760"/>
           </a:xfrm>
@@ -10376,34 +8425,29 @@
                 <a:ea typeface="JetBrains Mono" pitchFamily="34" charset="-122"/>
                 <a:cs typeface="JetBrains Mono" pitchFamily="34" charset="-120"/>
               </a:rPr>
-              <a:t>COMO A GENTE É ORGANIZADA</a:t>
-            </a:r>
-            <a:endParaRPr lang="en-US" sz="1200" dirty="0"/>
-          </a:p>
-        </p:txBody>
-      </p:sp>
-      <p:sp>
-        <p:nvSpPr>
-          <p:cNvPr id="3" name="Shape 1"/>
+              <a:t>PROVA — O QUE FIZEMOS ESSE MÊS</a:t>
+            </a:r>
+            <a:endParaRPr lang="en-US" sz="1200" dirty="0"/>
+          </a:p>
+        </p:txBody>
+      </p:sp>
+      <p:sp>
+        <p:nvSpPr>
+          <p:cNvPr id="43" name="Shape 41"/>
           <p:cNvSpPr/>
           <p:nvPr/>
         </p:nvSpPr>
         <p:spPr>
           <a:xfrm>
             <a:off x="548640" y="1188720"/>
-            <a:ext cx="3454298" cy="4937760"/>
-          </a:xfrm>
-          <a:prstGeom prst="roundRect">
-            <a:avLst>
-              <a:gd name="adj" fmla="val 4235"/>
-            </a:avLst>
-          </a:prstGeom>
-          <a:solidFill>
-            <a:srgbClr val="141414"/>
-          </a:solidFill>
-          <a:ln w="9525">
+            <a:ext cx="5364328" cy="685800"/>
+          </a:xfrm>
+          <a:prstGeom prst="ellipse">
+            <a:avLst/>
+          </a:prstGeom>
+          <a:ln w="19050">
             <a:solidFill>
-              <a:srgbClr val="333333"/>
+              <a:srgbClr val="FFFFFF"/>
             </a:solidFill>
             <a:prstDash val="solid"/>
           </a:ln>
@@ -10411,53 +8455,53 @@
       </p:sp>
       <p:sp>
         <p:nvSpPr>
-          <p:cNvPr id="4" name="Text 2"/>
-          <p:cNvSpPr/>
-          <p:nvPr/>
-        </p:nvSpPr>
-        <p:spPr>
-          <a:xfrm>
-            <a:off x="822960" y="1463040"/>
-            <a:ext cx="2905658" cy="822960"/>
-          </a:xfrm>
-          <a:prstGeom prst="rect">
-            <a:avLst/>
-          </a:prstGeom>
-          <a:noFill/>
-          <a:ln/>
-        </p:spPr>
-        <p:txBody>
-          <a:bodyPr wrap="square" lIns="0" tIns="0" rIns="0" bIns="0" rtlCol="0" anchor="t"/>
-          <a:lstStyle/>
-          <a:p>
-            <a:pPr indent="0" marL="0">
-              <a:buNone/>
-            </a:pPr>
-            <a:r>
-              <a:rPr lang="en-US" sz="1800" b="1" i="1" dirty="0">
-                <a:solidFill>
-                  <a:srgbClr val="DAFF94"/>
+          <p:cNvPr id="44" name="Text 42"/>
+          <p:cNvSpPr/>
+          <p:nvPr/>
+        </p:nvSpPr>
+        <p:spPr>
+          <a:xfrm>
+            <a:off x="548640" y="1188720"/>
+            <a:ext cx="5364328" cy="685800"/>
+          </a:xfrm>
+          <a:prstGeom prst="rect">
+            <a:avLst/>
+          </a:prstGeom>
+          <a:noFill/>
+          <a:ln/>
+        </p:spPr>
+        <p:txBody>
+          <a:bodyPr wrap="square" lIns="0" tIns="0" rIns="0" bIns="0" rtlCol="0" anchor="ctr"/>
+          <a:lstStyle/>
+          <a:p>
+            <a:pPr algn="ctr" indent="0" marL="0">
+              <a:buNone/>
+            </a:pPr>
+            <a:r>
+              <a:rPr lang="en-US" sz="1400" i="1" dirty="0">
+                <a:solidFill>
+                  <a:srgbClr val="FFFFFF"/>
                 </a:solidFill>
                 <a:latin typeface="Libre Baskerville" pitchFamily="34" charset="0"/>
                 <a:ea typeface="Libre Baskerville" pitchFamily="34" charset="-122"/>
                 <a:cs typeface="Libre Baskerville" pitchFamily="34" charset="-120"/>
               </a:rPr>
-              <a:t>Estrutura</a:t>
-            </a:r>
-            <a:endParaRPr lang="en-US" sz="1800" dirty="0"/>
-          </a:p>
-        </p:txBody>
-      </p:sp>
-      <p:sp>
-        <p:nvSpPr>
-          <p:cNvPr id="5" name="Text 3"/>
-          <p:cNvSpPr/>
-          <p:nvPr/>
-        </p:nvSpPr>
-        <p:spPr>
-          <a:xfrm>
-            <a:off x="822960" y="2377440"/>
-            <a:ext cx="2905658" cy="3474720"/>
+              <a:t>PagueVeloz — Dia dos Pais</a:t>
+            </a:r>
+            <a:endParaRPr lang="en-US" sz="1400" dirty="0"/>
+          </a:p>
+        </p:txBody>
+      </p:sp>
+      <p:sp>
+        <p:nvSpPr>
+          <p:cNvPr id="45" name="Text 43"/>
+          <p:cNvSpPr/>
+          <p:nvPr/>
+        </p:nvSpPr>
+        <p:spPr>
+          <a:xfrm>
+            <a:off x="548640" y="2194560"/>
+            <a:ext cx="5364328" cy="2286000"/>
           </a:xfrm>
           <a:prstGeom prst="rect">
             <a:avLst/>
@@ -10473,7 +8517,7 @@
               <a:buNone/>
             </a:pPr>
             <a:r>
-              <a:rPr lang="en-US" sz="1250" dirty="0">
+              <a:rPr lang="en-US" sz="1300" dirty="0">
                 <a:solidFill>
                   <a:srgbClr val="FFFFFF"/>
                 </a:solidFill>
@@ -10481,34 +8525,77 @@
                 <a:ea typeface="Arial" pitchFamily="34" charset="-122"/>
                 <a:cs typeface="Arial" pitchFamily="34" charset="-120"/>
               </a:rPr>
-              <a:t>Sede em Campinas/SP — o escritório Open House, pensado desde a planta pra criatividade fluir — e uma base estratégica em São Luís/MA.</a:t>
-            </a:r>
-            <a:endParaRPr lang="en-US" sz="1250" dirty="0"/>
-          </a:p>
-        </p:txBody>
-      </p:sp>
-      <p:sp>
-        <p:nvSpPr>
-          <p:cNvPr id="6" name="Shape 4"/>
-          <p:cNvSpPr/>
-          <p:nvPr/>
-        </p:nvSpPr>
-        <p:spPr>
-          <a:xfrm>
-            <a:off x="4368698" y="1188720"/>
-            <a:ext cx="3454298" cy="4937760"/>
-          </a:xfrm>
-          <a:prstGeom prst="roundRect">
-            <a:avLst>
-              <a:gd name="adj" fmla="val 4235"/>
-            </a:avLst>
-          </a:prstGeom>
-          <a:solidFill>
-            <a:srgbClr val="141414"/>
-          </a:solidFill>
-          <a:ln w="9525">
+              <a:t>“O nome por trás do meu nome”: transformamos fachadas de comércio em homenagens aos pais que apoiaram o sonho de três empreendedores em São Paulo e Campinas.</a:t>
+            </a:r>
+            <a:endParaRPr lang="en-US" sz="1300" dirty="0"/>
+          </a:p>
+        </p:txBody>
+      </p:sp>
+      <p:sp>
+        <p:nvSpPr>
+          <p:cNvPr id="46" name="Text 44">
+            <a:hlinkClick r:id="rId1" tooltip=""/>
+          </p:cNvPr>
+          <p:cNvSpPr/>
+          <p:nvPr/>
+        </p:nvSpPr>
+        <p:spPr>
+          <a:xfrm>
+            <a:off x="548640" y="4572000"/>
+            <a:ext cx="5364328" cy="365760"/>
+          </a:xfrm>
+          <a:prstGeom prst="rect">
+            <a:avLst/>
+          </a:prstGeom>
+          <a:noFill/>
+          <a:ln/>
+        </p:spPr>
+        <p:txBody>
+          <a:bodyPr wrap="square" lIns="0" tIns="0" rIns="0" bIns="0" rtlCol="0" anchor="ctr"/>
+          <a:lstStyle/>
+          <a:p>
+            <a:pPr indent="0" marL="0">
+              <a:buNone/>
+            </a:pPr>
+            <a:r>
+              <a:rPr lang="en-US" sz="1200" b="1" u="sng" dirty="0">
+                <a:solidFill>
+                  <a:srgbClr val="FFFFFF"/>
+                </a:solidFill>
+                <a:latin typeface="JetBrains Mono" pitchFamily="34" charset="0"/>
+                <a:ea typeface="JetBrains Mono" pitchFamily="34" charset="-122"/>
+                <a:cs typeface="JetBrains Mono" pitchFamily="34" charset="-120"/>
+                <a:hlinkClick r:id="rId1" invalidUrl="" action="" tgtFrame="" tooltip="" history="1" highlightClick="0" endSnd="0">
+                  <a:extLst>
+                    <a:ext uri="{A12FA001-AC4F-418D-AE19-62706E023703}">
+                      <ahyp:hlinkClr xmlns:ahyp="http://schemas.microsoft.com/office/drawing/2018/hyperlinkcolor" val="tx"/>
+                    </a:ext>
+                  </a:extLst>
+                </a:hlinkClick>
+              </a:rPr>
+              <a:t>▶ assistir ao case</a:t>
+            </a:r>
+            <a:endParaRPr lang="en-US" sz="1200" dirty="0"/>
+          </a:p>
+        </p:txBody>
+      </p:sp>
+      <p:sp>
+        <p:nvSpPr>
+          <p:cNvPr id="47" name="Shape 45"/>
+          <p:cNvSpPr/>
+          <p:nvPr/>
+        </p:nvSpPr>
+        <p:spPr>
+          <a:xfrm>
+            <a:off x="6278728" y="1188720"/>
+            <a:ext cx="5364328" cy="685800"/>
+          </a:xfrm>
+          <a:prstGeom prst="ellipse">
+            <a:avLst/>
+          </a:prstGeom>
+          <a:ln w="19050">
             <a:solidFill>
-              <a:srgbClr val="333333"/>
+              <a:srgbClr val="DAFF94"/>
             </a:solidFill>
             <a:prstDash val="solid"/>
           </a:ln>
@@ -10516,30 +8603,30 @@
       </p:sp>
       <p:sp>
         <p:nvSpPr>
-          <p:cNvPr id="7" name="Text 5"/>
-          <p:cNvSpPr/>
-          <p:nvPr/>
-        </p:nvSpPr>
-        <p:spPr>
-          <a:xfrm>
-            <a:off x="4643018" y="1463040"/>
-            <a:ext cx="2905658" cy="822960"/>
-          </a:xfrm>
-          <a:prstGeom prst="rect">
-            <a:avLst/>
-          </a:prstGeom>
-          <a:noFill/>
-          <a:ln/>
-        </p:spPr>
-        <p:txBody>
-          <a:bodyPr wrap="square" lIns="0" tIns="0" rIns="0" bIns="0" rtlCol="0" anchor="t"/>
-          <a:lstStyle/>
-          <a:p>
-            <a:pPr indent="0" marL="0">
-              <a:buNone/>
-            </a:pPr>
-            <a:r>
-              <a:rPr lang="en-US" sz="1800" b="1" i="1" dirty="0">
+          <p:cNvPr id="48" name="Text 46"/>
+          <p:cNvSpPr/>
+          <p:nvPr/>
+        </p:nvSpPr>
+        <p:spPr>
+          <a:xfrm>
+            <a:off x="6278728" y="1188720"/>
+            <a:ext cx="5364328" cy="685800"/>
+          </a:xfrm>
+          <a:prstGeom prst="rect">
+            <a:avLst/>
+          </a:prstGeom>
+          <a:noFill/>
+          <a:ln/>
+        </p:spPr>
+        <p:txBody>
+          <a:bodyPr wrap="square" lIns="0" tIns="0" rIns="0" bIns="0" rtlCol="0" anchor="ctr"/>
+          <a:lstStyle/>
+          <a:p>
+            <a:pPr algn="ctr" indent="0" marL="0">
+              <a:buNone/>
+            </a:pPr>
+            <a:r>
+              <a:rPr lang="en-US" sz="1400" i="1" dirty="0">
                 <a:solidFill>
                   <a:srgbClr val="DAFF94"/>
                 </a:solidFill>
@@ -10547,22 +8634,22 @@
                 <a:ea typeface="Libre Baskerville" pitchFamily="34" charset="-122"/>
                 <a:cs typeface="Libre Baskerville" pitchFamily="34" charset="-120"/>
               </a:rPr>
-              <a:t>Sócios na liderança</a:t>
-            </a:r>
-            <a:endParaRPr lang="en-US" sz="1800" dirty="0"/>
-          </a:p>
-        </p:txBody>
-      </p:sp>
-      <p:sp>
-        <p:nvSpPr>
-          <p:cNvPr id="8" name="Text 6"/>
-          <p:cNvSpPr/>
-          <p:nvPr/>
-        </p:nvSpPr>
-        <p:spPr>
-          <a:xfrm>
-            <a:off x="4643018" y="2377440"/>
-            <a:ext cx="2905658" cy="3474720"/>
+              <a:t>Grupo Equatorial — Dia dos Pais</a:t>
+            </a:r>
+            <a:endParaRPr lang="en-US" sz="1400" dirty="0"/>
+          </a:p>
+        </p:txBody>
+      </p:sp>
+      <p:sp>
+        <p:nvSpPr>
+          <p:cNvPr id="49" name="Text 47"/>
+          <p:cNvSpPr/>
+          <p:nvPr/>
+        </p:nvSpPr>
+        <p:spPr>
+          <a:xfrm>
+            <a:off x="6278728" y="2194560"/>
+            <a:ext cx="5364328" cy="2286000"/>
           </a:xfrm>
           <a:prstGeom prst="rect">
             <a:avLst/>
@@ -10578,7 +8665,7 @@
               <a:buNone/>
             </a:pPr>
             <a:r>
-              <a:rPr lang="en-US" sz="1250" dirty="0">
+              <a:rPr lang="en-US" sz="1300" dirty="0">
                 <a:solidFill>
                   <a:srgbClr val="FFFFFF"/>
                 </a:solidFill>
@@ -10586,88 +8673,243 @@
                 <a:ea typeface="Arial" pitchFamily="34" charset="-122"/>
                 <a:cs typeface="Arial" pitchFamily="34" charset="-120"/>
               </a:rPr>
-              <a:t>Quadro societário composto por posições de liderança nas principais áreas da agência. Isso mantém a essência estratégica, técnica e criativa independente dos movimentos do mercado.</a:t>
-            </a:r>
-            <a:endParaRPr lang="en-US" sz="1250" dirty="0"/>
-          </a:p>
-        </p:txBody>
-      </p:sp>
-      <p:sp>
-        <p:nvSpPr>
-          <p:cNvPr id="9" name="Shape 7"/>
-          <p:cNvSpPr/>
-          <p:nvPr/>
-        </p:nvSpPr>
-        <p:spPr>
-          <a:xfrm>
-            <a:off x="8188757" y="1188720"/>
-            <a:ext cx="3454298" cy="4937760"/>
-          </a:xfrm>
-          <a:prstGeom prst="roundRect">
-            <a:avLst>
-              <a:gd name="adj" fmla="val 4235"/>
-            </a:avLst>
-          </a:prstGeom>
-          <a:solidFill>
-            <a:srgbClr val="141414"/>
-          </a:solidFill>
-          <a:ln w="9525">
-            <a:solidFill>
-              <a:srgbClr val="333333"/>
-            </a:solidFill>
-            <a:prstDash val="solid"/>
-          </a:ln>
-        </p:spPr>
-      </p:sp>
-      <p:sp>
-        <p:nvSpPr>
-          <p:cNvPr id="10" name="Text 8"/>
-          <p:cNvSpPr/>
-          <p:nvPr/>
-        </p:nvSpPr>
-        <p:spPr>
-          <a:xfrm>
-            <a:off x="8463077" y="1463040"/>
-            <a:ext cx="2905658" cy="822960"/>
-          </a:xfrm>
-          <a:prstGeom prst="rect">
-            <a:avLst/>
-          </a:prstGeom>
-          <a:noFill/>
-          <a:ln/>
-        </p:spPr>
-        <p:txBody>
-          <a:bodyPr wrap="square" lIns="0" tIns="0" rIns="0" bIns="0" rtlCol="0" anchor="t"/>
+              <a:t>Espelhos apagados em locais de grande circulação só acendem uma palavra quando a pessoa termina de contar o que herdou do pai — não na aparência, na atitude.</a:t>
+            </a:r>
+            <a:endParaRPr lang="en-US" sz="1300" dirty="0"/>
+          </a:p>
+        </p:txBody>
+      </p:sp>
+      <p:sp>
+        <p:nvSpPr>
+          <p:cNvPr id="50" name="Text 48">
+            <a:hlinkClick r:id="rId2" tooltip=""/>
+          </p:cNvPr>
+          <p:cNvSpPr/>
+          <p:nvPr/>
+        </p:nvSpPr>
+        <p:spPr>
+          <a:xfrm>
+            <a:off x="6278728" y="4572000"/>
+            <a:ext cx="5364328" cy="365760"/>
+          </a:xfrm>
+          <a:prstGeom prst="rect">
+            <a:avLst/>
+          </a:prstGeom>
+          <a:noFill/>
+          <a:ln/>
+        </p:spPr>
+        <p:txBody>
+          <a:bodyPr wrap="square" lIns="0" tIns="0" rIns="0" bIns="0" rtlCol="0" anchor="ctr"/>
           <a:lstStyle/>
           <a:p>
             <a:pPr indent="0" marL="0">
               <a:buNone/>
             </a:pPr>
             <a:r>
-              <a:rPr lang="en-US" sz="1800" b="1" i="1" dirty="0">
+              <a:rPr lang="en-US" sz="1200" b="1" u="sng" dirty="0">
                 <a:solidFill>
                   <a:srgbClr val="DAFF94"/>
+                </a:solidFill>
+                <a:latin typeface="JetBrains Mono" pitchFamily="34" charset="0"/>
+                <a:ea typeface="JetBrains Mono" pitchFamily="34" charset="-122"/>
+                <a:cs typeface="JetBrains Mono" pitchFamily="34" charset="-120"/>
+                <a:hlinkClick r:id="rId2" invalidUrl="" action="" tgtFrame="" tooltip="" history="1" highlightClick="0" endSnd="0">
+                  <a:extLst>
+                    <a:ext uri="{A12FA001-AC4F-418D-AE19-62706E023703}">
+                      <ahyp:hlinkClr xmlns:ahyp="http://schemas.microsoft.com/office/drawing/2018/hyperlinkcolor" val="tx"/>
+                    </a:ext>
+                  </a:extLst>
+                </a:hlinkClick>
+              </a:rPr>
+              <a:t>▶ assistir ao case</a:t>
+            </a:r>
+            <a:endParaRPr lang="en-US" sz="1200" dirty="0"/>
+          </a:p>
+        </p:txBody>
+      </p:sp>
+      <p:sp>
+        <p:nvSpPr>
+          <p:cNvPr id="51" name="Text 49"/>
+          <p:cNvSpPr/>
+          <p:nvPr/>
+        </p:nvSpPr>
+        <p:spPr>
+          <a:xfrm>
+            <a:off x="548640" y="5394960"/>
+            <a:ext cx="9144000" cy="457200"/>
+          </a:xfrm>
+          <a:prstGeom prst="rect">
+            <a:avLst/>
+          </a:prstGeom>
+          <a:noFill/>
+          <a:ln/>
+        </p:spPr>
+        <p:txBody>
+          <a:bodyPr wrap="square" lIns="0" tIns="0" rIns="0" bIns="0" rtlCol="0" anchor="ctr"/>
+          <a:lstStyle/>
+          <a:p>
+            <a:pPr indent="0" marL="0">
+              <a:buNone/>
+            </a:pPr>
+            <a:r>
+              <a:rPr lang="en-US" sz="1100" dirty="0">
+                <a:solidFill>
+                  <a:srgbClr val="999999"/>
+                </a:solidFill>
+                <a:latin typeface="JetBrains Mono" pitchFamily="34" charset="0"/>
+                <a:ea typeface="JetBrains Mono" pitchFamily="34" charset="-122"/>
+                <a:cs typeface="JetBrains Mono" pitchFamily="34" charset="-120"/>
+              </a:rPr>
+              <a:t>Campanhas de Dia dos Pais assinadas pela Arpejo em agosto/26.</a:t>
+            </a:r>
+            <a:endParaRPr lang="en-US" sz="1100" dirty="0"/>
+          </a:p>
+        </p:txBody>
+      </p:sp>
+    </p:spTree>
+  </p:cSld>
+  <p:clrMapOvr>
+    <a:masterClrMapping/>
+  </p:clrMapOvr>
+</p:sld>
+</file>
+
+<file path=ppt/slides/slide7.xml><?xml version="1.0" encoding="utf-8"?>
+<p:sld xmlns:a="http://schemas.openxmlformats.org/drawingml/2006/main" xmlns:r="http://schemas.openxmlformats.org/officeDocument/2006/relationships" xmlns:p="http://schemas.openxmlformats.org/presentationml/2006/main">
+  <p:cSld name="Slide 7">
+    <p:bg>
+      <p:bgPr>
+        <a:solidFill>
+          <a:srgbClr val="DAFF94"/>
+        </a:solidFill>
+      </p:bgPr>
+    </p:bg>
+    <p:spTree>
+      <p:nvGrpSpPr>
+        <p:cNvPr id="1" name=""/>
+        <p:cNvGrpSpPr/>
+        <p:nvPr/>
+      </p:nvGrpSpPr>
+      <p:grpSpPr>
+        <a:xfrm>
+          <a:off x="0" y="0"/>
+          <a:ext cx="0" cy="0"/>
+          <a:chOff x="0" y="0"/>
+          <a:chExt cx="0" cy="0"/>
+        </a:xfrm>
+      </p:grpSpPr>
+      <p:pic>
+        <p:nvPicPr>
+          <p:cNvPr id="2" name="Image 0" descr="/home/user/data-manipulation-exercises/.claude/skills/brand-guidelines/assets/textures/globe-black.png">    </p:cNvPr>
+          <p:cNvPicPr>
+            <a:picLocks noChangeAspect="1"/>
+          </p:cNvPicPr>
+          <p:nvPr/>
+        </p:nvPicPr>
+        <p:blipFill>
+          <a:blip r:embed="rId1"/>
+          <a:stretch>
+            <a:fillRect/>
+          </a:stretch>
+        </p:blipFill>
+        <p:spPr>
+          <a:xfrm>
+            <a:off x="11185855" y="457200"/>
+            <a:ext cx="411480" cy="411480"/>
+          </a:xfrm>
+          <a:prstGeom prst="rect">
+            <a:avLst/>
+          </a:prstGeom>
+        </p:spPr>
+      </p:pic>
+      <p:sp>
+        <p:nvSpPr>
+          <p:cNvPr id="3" name="Text 0"/>
+          <p:cNvSpPr/>
+          <p:nvPr/>
+        </p:nvSpPr>
+        <p:spPr>
+          <a:xfrm>
+            <a:off x="548640" y="457200"/>
+            <a:ext cx="1828800" cy="365760"/>
+          </a:xfrm>
+          <a:prstGeom prst="rect">
+            <a:avLst/>
+          </a:prstGeom>
+          <a:noFill/>
+          <a:ln/>
+        </p:spPr>
+        <p:txBody>
+          <a:bodyPr wrap="square" lIns="0" tIns="0" rIns="0" bIns="0" rtlCol="0" anchor="ctr"/>
+          <a:lstStyle/>
+          <a:p>
+            <a:pPr indent="0" marL="0">
+              <a:buNone/>
+            </a:pPr>
+            <a:r>
+              <a:rPr lang="en-US" sz="1200" b="1" dirty="0">
+                <a:solidFill>
+                  <a:srgbClr val="000000"/>
+                </a:solidFill>
+                <a:latin typeface="JetBrains Mono" pitchFamily="34" charset="0"/>
+                <a:ea typeface="JetBrains Mono" pitchFamily="34" charset="-122"/>
+                <a:cs typeface="JetBrains Mono" pitchFamily="34" charset="-120"/>
+              </a:rPr>
+              <a:t>report↗</a:t>
+            </a:r>
+            <a:endParaRPr lang="en-US" sz="1200" dirty="0"/>
+          </a:p>
+        </p:txBody>
+      </p:sp>
+      <p:sp>
+        <p:nvSpPr>
+          <p:cNvPr id="4" name="Text 1"/>
+          <p:cNvSpPr/>
+          <p:nvPr/>
+        </p:nvSpPr>
+        <p:spPr>
+          <a:xfrm>
+            <a:off x="548640" y="1371600"/>
+            <a:ext cx="11094415" cy="1097280"/>
+          </a:xfrm>
+          <a:prstGeom prst="rect">
+            <a:avLst/>
+          </a:prstGeom>
+          <a:noFill/>
+          <a:ln/>
+        </p:spPr>
+        <p:txBody>
+          <a:bodyPr wrap="square" lIns="0" tIns="0" rIns="0" bIns="0" rtlCol="0" anchor="ctr"/>
+          <a:lstStyle/>
+          <a:p>
+            <a:pPr indent="0" marL="0">
+              <a:buNone/>
+            </a:pPr>
+            <a:r>
+              <a:rPr lang="en-US" sz="2600" b="1" i="1" dirty="0">
+                <a:solidFill>
+                  <a:srgbClr val="000000"/>
                 </a:solidFill>
                 <a:latin typeface="Libre Baskerville" pitchFamily="34" charset="0"/>
                 <a:ea typeface="Libre Baskerville" pitchFamily="34" charset="-122"/>
                 <a:cs typeface="Libre Baskerville" pitchFamily="34" charset="-120"/>
               </a:rPr>
-              <a:t>+90 pessoas, 8 estados</a:t>
-            </a:r>
-            <a:endParaRPr lang="en-US" sz="1800" dirty="0"/>
-          </a:p>
-        </p:txBody>
-      </p:sp>
-      <p:sp>
-        <p:nvSpPr>
-          <p:cNvPr id="11" name="Text 9"/>
-          <p:cNvSpPr/>
-          <p:nvPr/>
-        </p:nvSpPr>
-        <p:spPr>
-          <a:xfrm>
-            <a:off x="8463077" y="2377440"/>
-            <a:ext cx="2905658" cy="3474720"/>
+              <a:t>O nosso diferencial: inteligência de mercado, todo mês.</a:t>
+            </a:r>
+            <a:endParaRPr lang="en-US" sz="2600" dirty="0"/>
+          </a:p>
+        </p:txBody>
+      </p:sp>
+      <p:sp>
+        <p:nvSpPr>
+          <p:cNvPr id="5" name="Text 2"/>
+          <p:cNvSpPr/>
+          <p:nvPr/>
+        </p:nvSpPr>
+        <p:spPr>
+          <a:xfrm>
+            <a:off x="548640" y="2560320"/>
+            <a:ext cx="11094415" cy="2377440"/>
           </a:xfrm>
           <a:prstGeom prst="rect">
             <a:avLst/>
@@ -10683,20 +8925,67 @@
               <a:buNone/>
             </a:pPr>
             <a:r>
-              <a:rPr lang="en-US" sz="1250" dirty="0">
-                <a:solidFill>
-                  <a:srgbClr val="FFFFFF"/>
-                </a:solidFill>
-                <a:latin typeface="Arial" pitchFamily="34" charset="0"/>
-                <a:ea typeface="Arial" pitchFamily="34" charset="-122"/>
-                <a:cs typeface="Arial" pitchFamily="34" charset="-120"/>
-              </a:rPr>
-              <a:t>Um time plural, presente em DF, MA, MG, PR, PE, RS, RN e SP.</a:t>
-            </a:r>
-            <a:endParaRPr lang="en-US" sz="1250" dirty="0"/>
-          </a:p>
-        </p:txBody>
-      </p:sp>
+              <a:rPr lang="en-US" sz="1500" dirty="0">
+                <a:solidFill>
+                  <a:srgbClr val="222222"/>
+                </a:solidFill>
+                <a:latin typeface="Arial" pitchFamily="34" charset="0"/>
+                <a:ea typeface="Arial" pitchFamily="34" charset="-122"/>
+                <a:cs typeface="Arial" pitchFamily="34" charset="-120"/>
+              </a:rPr>
+              <a:t>Isso que você viu até agora — leitura de tendências de consumo, novidades de plataformas e cases que inspiram — é o nosso .report: um relatório proprietário que produzimos todo mês pra orientar as decisões dos nossos clientes.</a:t>
+            </a:r>
+            <a:endParaRPr lang="en-US" sz="1500" dirty="0"/>
+          </a:p>
+          <a:p>
+            <a:pPr indent="0" marL="0">
+              <a:buNone/>
+            </a:pPr>
+            <a:endParaRPr lang="en-US" sz="1500" dirty="0"/>
+          </a:p>
+          <a:p>
+            <a:pPr indent="0" marL="0">
+              <a:buNone/>
+            </a:pPr>
+            <a:r>
+              <a:rPr lang="en-US" sz="1500" dirty="0">
+                <a:solidFill>
+                  <a:srgbClr val="222222"/>
+                </a:solidFill>
+                <a:latin typeface="Arial" pitchFamily="34" charset="0"/>
+                <a:ea typeface="Arial" pitchFamily="34" charset="-122"/>
+                <a:cs typeface="Arial" pitchFamily="34" charset="-120"/>
+              </a:rPr>
+              <a:t>Quem fecha com a Arpejo não recebe só campanha. Recebe visão de mercado aplicada, com frequência mensal.</a:t>
+            </a:r>
+            <a:endParaRPr lang="en-US" sz="1500" dirty="0"/>
+          </a:p>
+        </p:txBody>
+      </p:sp>
+      <p:pic>
+        <p:nvPicPr>
+          <p:cNvPr id="6" name="Image 1" descr="/home/user/data-manipulation-exercises/.claude/skills/brand-guidelines/assets/textures/arrow-black.png">    </p:cNvPr>
+          <p:cNvPicPr>
+            <a:picLocks noChangeAspect="1"/>
+          </p:cNvPicPr>
+          <p:nvPr/>
+        </p:nvPicPr>
+        <p:blipFill>
+          <a:blip r:embed="rId2"/>
+          <a:stretch>
+            <a:fillRect/>
+          </a:stretch>
+        </p:blipFill>
+        <p:spPr>
+          <a:xfrm rot="5400000">
+            <a:off x="11277295" y="5943600"/>
+            <a:ext cx="292608" cy="292608"/>
+          </a:xfrm>
+          <a:prstGeom prst="rect">
+            <a:avLst/>
+          </a:prstGeom>
+        </p:spPr>
+      </p:pic>
     </p:spTree>
   </p:cSld>
   <p:clrMapOvr>
@@ -12289,415 +10578,9 @@
           </a:p>
         </p:txBody>
       </p:sp>
-      <p:sp>
-        <p:nvSpPr>
-          <p:cNvPr id="42" name="Text 40"/>
-          <p:cNvSpPr/>
-          <p:nvPr/>
-        </p:nvSpPr>
-        <p:spPr>
-          <a:xfrm>
-            <a:off x="548640" y="411480"/>
-            <a:ext cx="7315200" cy="365760"/>
-          </a:xfrm>
-          <a:prstGeom prst="rect">
-            <a:avLst/>
-          </a:prstGeom>
-          <a:noFill/>
-          <a:ln/>
-        </p:spPr>
-        <p:txBody>
-          <a:bodyPr wrap="square" lIns="0" tIns="0" rIns="0" bIns="0" rtlCol="0" anchor="ctr"/>
-          <a:lstStyle/>
-          <a:p>
-            <a:pPr indent="0" marL="0">
-              <a:buNone/>
-            </a:pPr>
-            <a:r>
-              <a:rPr lang="en-US" sz="1200" dirty="0">
-                <a:solidFill>
-                  <a:srgbClr val="DAFF94"/>
-                </a:solidFill>
-                <a:latin typeface="JetBrains Mono" pitchFamily="34" charset="0"/>
-                <a:ea typeface="JetBrains Mono" pitchFamily="34" charset="-122"/>
-                <a:cs typeface="JetBrains Mono" pitchFamily="34" charset="-120"/>
-              </a:rPr>
-              <a:t>PROVA — O QUE FIZEMOS ESSE MÊS</a:t>
-            </a:r>
-            <a:endParaRPr lang="en-US" sz="1200" dirty="0"/>
-          </a:p>
-        </p:txBody>
-      </p:sp>
-      <p:sp>
-        <p:nvSpPr>
-          <p:cNvPr id="43" name="Shape 41"/>
-          <p:cNvSpPr/>
-          <p:nvPr/>
-        </p:nvSpPr>
-        <p:spPr>
-          <a:xfrm>
-            <a:off x="548640" y="1188720"/>
-            <a:ext cx="5364328" cy="685800"/>
-          </a:xfrm>
-          <a:prstGeom prst="ellipse">
-            <a:avLst/>
-          </a:prstGeom>
-          <a:ln w="19050">
-            <a:solidFill>
-              <a:srgbClr val="FFFFFF"/>
-            </a:solidFill>
-            <a:prstDash val="solid"/>
-          </a:ln>
-        </p:spPr>
-      </p:sp>
-      <p:sp>
-        <p:nvSpPr>
-          <p:cNvPr id="44" name="Text 42"/>
-          <p:cNvSpPr/>
-          <p:nvPr/>
-        </p:nvSpPr>
-        <p:spPr>
-          <a:xfrm>
-            <a:off x="548640" y="1188720"/>
-            <a:ext cx="5364328" cy="685800"/>
-          </a:xfrm>
-          <a:prstGeom prst="rect">
-            <a:avLst/>
-          </a:prstGeom>
-          <a:noFill/>
-          <a:ln/>
-        </p:spPr>
-        <p:txBody>
-          <a:bodyPr wrap="square" lIns="0" tIns="0" rIns="0" bIns="0" rtlCol="0" anchor="ctr"/>
-          <a:lstStyle/>
-          <a:p>
-            <a:pPr algn="ctr" indent="0" marL="0">
-              <a:buNone/>
-            </a:pPr>
-            <a:r>
-              <a:rPr lang="en-US" sz="1400" i="1" dirty="0">
-                <a:solidFill>
-                  <a:srgbClr val="FFFFFF"/>
-                </a:solidFill>
-                <a:latin typeface="Libre Baskerville" pitchFamily="34" charset="0"/>
-                <a:ea typeface="Libre Baskerville" pitchFamily="34" charset="-122"/>
-                <a:cs typeface="Libre Baskerville" pitchFamily="34" charset="-120"/>
-              </a:rPr>
-              <a:t>PagueVeloz — Dia dos Pais</a:t>
-            </a:r>
-            <a:endParaRPr lang="en-US" sz="1400" dirty="0"/>
-          </a:p>
-        </p:txBody>
-      </p:sp>
-      <p:sp>
-        <p:nvSpPr>
-          <p:cNvPr id="45" name="Text 43"/>
-          <p:cNvSpPr/>
-          <p:nvPr/>
-        </p:nvSpPr>
-        <p:spPr>
-          <a:xfrm>
-            <a:off x="548640" y="2194560"/>
-            <a:ext cx="5364328" cy="2286000"/>
-          </a:xfrm>
-          <a:prstGeom prst="rect">
-            <a:avLst/>
-          </a:prstGeom>
-          <a:noFill/>
-          <a:ln/>
-        </p:spPr>
-        <p:txBody>
-          <a:bodyPr wrap="square" lIns="0" tIns="0" rIns="0" bIns="0" rtlCol="0" anchor="t"/>
-          <a:lstStyle/>
-          <a:p>
-            <a:pPr indent="0" marL="0">
-              <a:buNone/>
-            </a:pPr>
-            <a:r>
-              <a:rPr lang="en-US" sz="1300" dirty="0">
-                <a:solidFill>
-                  <a:srgbClr val="FFFFFF"/>
-                </a:solidFill>
-                <a:latin typeface="Arial" pitchFamily="34" charset="0"/>
-                <a:ea typeface="Arial" pitchFamily="34" charset="-122"/>
-                <a:cs typeface="Arial" pitchFamily="34" charset="-120"/>
-              </a:rPr>
-              <a:t>“O nome por trás do meu nome”: transformamos fachadas de comércio em homenagens aos pais que apoiaram o sonho de três empreendedores em São Paulo e Campinas.</a:t>
-            </a:r>
-            <a:endParaRPr lang="en-US" sz="1300" dirty="0"/>
-          </a:p>
-        </p:txBody>
-      </p:sp>
-      <p:sp>
-        <p:nvSpPr>
-          <p:cNvPr id="46" name="Text 44">
-            <a:hlinkClick r:id="rId1" tooltip=""/>
-          </p:cNvPr>
-          <p:cNvSpPr/>
-          <p:nvPr/>
-        </p:nvSpPr>
-        <p:spPr>
-          <a:xfrm>
-            <a:off x="548640" y="4572000"/>
-            <a:ext cx="5364328" cy="365760"/>
-          </a:xfrm>
-          <a:prstGeom prst="rect">
-            <a:avLst/>
-          </a:prstGeom>
-          <a:noFill/>
-          <a:ln/>
-        </p:spPr>
-        <p:txBody>
-          <a:bodyPr wrap="square" lIns="0" tIns="0" rIns="0" bIns="0" rtlCol="0" anchor="ctr"/>
-          <a:lstStyle/>
-          <a:p>
-            <a:pPr indent="0" marL="0">
-              <a:buNone/>
-            </a:pPr>
-            <a:r>
-              <a:rPr lang="en-US" sz="1200" b="1" u="sng" dirty="0">
-                <a:solidFill>
-                  <a:srgbClr val="FFFFFF"/>
-                </a:solidFill>
-                <a:latin typeface="JetBrains Mono" pitchFamily="34" charset="0"/>
-                <a:ea typeface="JetBrains Mono" pitchFamily="34" charset="-122"/>
-                <a:cs typeface="JetBrains Mono" pitchFamily="34" charset="-120"/>
-                <a:hlinkClick r:id="rId1" invalidUrl="" action="" tgtFrame="" tooltip="" history="1" highlightClick="0" endSnd="0">
-                  <a:extLst>
-                    <a:ext uri="{A12FA001-AC4F-418D-AE19-62706E023703}">
-                      <ahyp:hlinkClr xmlns:ahyp="http://schemas.microsoft.com/office/drawing/2018/hyperlinkcolor" val="tx"/>
-                    </a:ext>
-                  </a:extLst>
-                </a:hlinkClick>
-              </a:rPr>
-              <a:t>▶ assistir ao case</a:t>
-            </a:r>
-            <a:endParaRPr lang="en-US" sz="1200" dirty="0"/>
-          </a:p>
-        </p:txBody>
-      </p:sp>
-      <p:sp>
-        <p:nvSpPr>
-          <p:cNvPr id="47" name="Shape 45"/>
-          <p:cNvSpPr/>
-          <p:nvPr/>
-        </p:nvSpPr>
-        <p:spPr>
-          <a:xfrm>
-            <a:off x="6278728" y="1188720"/>
-            <a:ext cx="5364328" cy="685800"/>
-          </a:xfrm>
-          <a:prstGeom prst="ellipse">
-            <a:avLst/>
-          </a:prstGeom>
-          <a:ln w="19050">
-            <a:solidFill>
-              <a:srgbClr val="DAFF94"/>
-            </a:solidFill>
-            <a:prstDash val="solid"/>
-          </a:ln>
-        </p:spPr>
-      </p:sp>
-      <p:sp>
-        <p:nvSpPr>
-          <p:cNvPr id="48" name="Text 46"/>
-          <p:cNvSpPr/>
-          <p:nvPr/>
-        </p:nvSpPr>
-        <p:spPr>
-          <a:xfrm>
-            <a:off x="6278728" y="1188720"/>
-            <a:ext cx="5364328" cy="685800"/>
-          </a:xfrm>
-          <a:prstGeom prst="rect">
-            <a:avLst/>
-          </a:prstGeom>
-          <a:noFill/>
-          <a:ln/>
-        </p:spPr>
-        <p:txBody>
-          <a:bodyPr wrap="square" lIns="0" tIns="0" rIns="0" bIns="0" rtlCol="0" anchor="ctr"/>
-          <a:lstStyle/>
-          <a:p>
-            <a:pPr algn="ctr" indent="0" marL="0">
-              <a:buNone/>
-            </a:pPr>
-            <a:r>
-              <a:rPr lang="en-US" sz="1400" i="1" dirty="0">
-                <a:solidFill>
-                  <a:srgbClr val="DAFF94"/>
-                </a:solidFill>
-                <a:latin typeface="Libre Baskerville" pitchFamily="34" charset="0"/>
-                <a:ea typeface="Libre Baskerville" pitchFamily="34" charset="-122"/>
-                <a:cs typeface="Libre Baskerville" pitchFamily="34" charset="-120"/>
-              </a:rPr>
-              <a:t>Grupo Equatorial — Dia dos Pais</a:t>
-            </a:r>
-            <a:endParaRPr lang="en-US" sz="1400" dirty="0"/>
-          </a:p>
-        </p:txBody>
-      </p:sp>
-      <p:sp>
-        <p:nvSpPr>
-          <p:cNvPr id="49" name="Text 47"/>
-          <p:cNvSpPr/>
-          <p:nvPr/>
-        </p:nvSpPr>
-        <p:spPr>
-          <a:xfrm>
-            <a:off x="6278728" y="2194560"/>
-            <a:ext cx="5364328" cy="2286000"/>
-          </a:xfrm>
-          <a:prstGeom prst="rect">
-            <a:avLst/>
-          </a:prstGeom>
-          <a:noFill/>
-          <a:ln/>
-        </p:spPr>
-        <p:txBody>
-          <a:bodyPr wrap="square" lIns="0" tIns="0" rIns="0" bIns="0" rtlCol="0" anchor="t"/>
-          <a:lstStyle/>
-          <a:p>
-            <a:pPr indent="0" marL="0">
-              <a:buNone/>
-            </a:pPr>
-            <a:r>
-              <a:rPr lang="en-US" sz="1300" dirty="0">
-                <a:solidFill>
-                  <a:srgbClr val="FFFFFF"/>
-                </a:solidFill>
-                <a:latin typeface="Arial" pitchFamily="34" charset="0"/>
-                <a:ea typeface="Arial" pitchFamily="34" charset="-122"/>
-                <a:cs typeface="Arial" pitchFamily="34" charset="-120"/>
-              </a:rPr>
-              <a:t>Espelhos apagados em locais de grande circulação só acendem uma palavra quando a pessoa termina de contar o que herdou do pai — não na aparência, na atitude.</a:t>
-            </a:r>
-            <a:endParaRPr lang="en-US" sz="1300" dirty="0"/>
-          </a:p>
-        </p:txBody>
-      </p:sp>
-      <p:sp>
-        <p:nvSpPr>
-          <p:cNvPr id="50" name="Text 48">
-            <a:hlinkClick r:id="rId2" tooltip=""/>
-          </p:cNvPr>
-          <p:cNvSpPr/>
-          <p:nvPr/>
-        </p:nvSpPr>
-        <p:spPr>
-          <a:xfrm>
-            <a:off x="6278728" y="4572000"/>
-            <a:ext cx="5364328" cy="365760"/>
-          </a:xfrm>
-          <a:prstGeom prst="rect">
-            <a:avLst/>
-          </a:prstGeom>
-          <a:noFill/>
-          <a:ln/>
-        </p:spPr>
-        <p:txBody>
-          <a:bodyPr wrap="square" lIns="0" tIns="0" rIns="0" bIns="0" rtlCol="0" anchor="ctr"/>
-          <a:lstStyle/>
-          <a:p>
-            <a:pPr indent="0" marL="0">
-              <a:buNone/>
-            </a:pPr>
-            <a:r>
-              <a:rPr lang="en-US" sz="1200" b="1" u="sng" dirty="0">
-                <a:solidFill>
-                  <a:srgbClr val="DAFF94"/>
-                </a:solidFill>
-                <a:latin typeface="JetBrains Mono" pitchFamily="34" charset="0"/>
-                <a:ea typeface="JetBrains Mono" pitchFamily="34" charset="-122"/>
-                <a:cs typeface="JetBrains Mono" pitchFamily="34" charset="-120"/>
-                <a:hlinkClick r:id="rId2" invalidUrl="" action="" tgtFrame="" tooltip="" history="1" highlightClick="0" endSnd="0">
-                  <a:extLst>
-                    <a:ext uri="{A12FA001-AC4F-418D-AE19-62706E023703}">
-                      <ahyp:hlinkClr xmlns:ahyp="http://schemas.microsoft.com/office/drawing/2018/hyperlinkcolor" val="tx"/>
-                    </a:ext>
-                  </a:extLst>
-                </a:hlinkClick>
-              </a:rPr>
-              <a:t>▶ assistir ao case</a:t>
-            </a:r>
-            <a:endParaRPr lang="en-US" sz="1200" dirty="0"/>
-          </a:p>
-        </p:txBody>
-      </p:sp>
-      <p:sp>
-        <p:nvSpPr>
-          <p:cNvPr id="51" name="Text 49"/>
-          <p:cNvSpPr/>
-          <p:nvPr/>
-        </p:nvSpPr>
-        <p:spPr>
-          <a:xfrm>
-            <a:off x="548640" y="5394960"/>
-            <a:ext cx="9144000" cy="457200"/>
-          </a:xfrm>
-          <a:prstGeom prst="rect">
-            <a:avLst/>
-          </a:prstGeom>
-          <a:noFill/>
-          <a:ln/>
-        </p:spPr>
-        <p:txBody>
-          <a:bodyPr wrap="square" lIns="0" tIns="0" rIns="0" bIns="0" rtlCol="0" anchor="ctr"/>
-          <a:lstStyle/>
-          <a:p>
-            <a:pPr indent="0" marL="0">
-              <a:buNone/>
-            </a:pPr>
-            <a:r>
-              <a:rPr lang="en-US" sz="1100" dirty="0">
-                <a:solidFill>
-                  <a:srgbClr val="999999"/>
-                </a:solidFill>
-                <a:latin typeface="JetBrains Mono" pitchFamily="34" charset="0"/>
-                <a:ea typeface="JetBrains Mono" pitchFamily="34" charset="-122"/>
-                <a:cs typeface="JetBrains Mono" pitchFamily="34" charset="-120"/>
-              </a:rPr>
-              <a:t>Campanhas de Dia dos Pais assinadas pela Arpejo em agosto/26.</a:t>
-            </a:r>
-            <a:endParaRPr lang="en-US" sz="1100" dirty="0"/>
-          </a:p>
-        </p:txBody>
-      </p:sp>
-    </p:spTree>
-  </p:cSld>
-  <p:clrMapOvr>
-    <a:masterClrMapping/>
-  </p:clrMapOvr>
-</p:sld>
-</file>
-
-<file path=ppt/slides/slide9.xml><?xml version="1.0" encoding="utf-8"?>
-<p:sld xmlns:a="http://schemas.openxmlformats.org/drawingml/2006/main" xmlns:r="http://schemas.openxmlformats.org/officeDocument/2006/relationships" xmlns:p="http://schemas.openxmlformats.org/presentationml/2006/main">
-  <p:cSld name="Slide 9">
-    <p:bg>
-      <p:bgPr>
-        <a:solidFill>
-          <a:srgbClr val="DAFF94"/>
-        </a:solidFill>
-      </p:bgPr>
-    </p:bg>
-    <p:spTree>
-      <p:nvGrpSpPr>
-        <p:cNvPr id="1" name=""/>
-        <p:cNvGrpSpPr/>
-        <p:nvPr/>
-      </p:nvGrpSpPr>
-      <p:grpSpPr>
-        <a:xfrm>
-          <a:off x="0" y="0"/>
-          <a:ext cx="0" cy="0"/>
-          <a:chOff x="0" y="0"/>
-          <a:chExt cx="0" cy="0"/>
-        </a:xfrm>
-      </p:grpSpPr>
       <p:pic>
         <p:nvPicPr>
-          <p:cNvPr id="2" name="Image 0" descr="/home/user/data-manipulation-exercises/.claude/skills/brand-guidelines/assets/textures/globe-black.png">    </p:cNvPr>
+          <p:cNvPr id="42" name="Image 0" descr="/home/user/data-manipulation-exercises/.claude/skills/brand-guidelines/assets/textures/arrow-lime.png">    </p:cNvPr>
           <p:cNvPicPr>
             <a:picLocks noChangeAspect="1"/>
           </p:cNvPicPr>
@@ -12710,158 +10593,18 @@
           </a:stretch>
         </p:blipFill>
         <p:spPr>
-          <a:xfrm>
-            <a:off x="11185855" y="457200"/>
-            <a:ext cx="411480" cy="411480"/>
+          <a:xfrm rot="16200000">
+            <a:off x="320040" y="320040"/>
+            <a:ext cx="292608" cy="292608"/>
           </a:xfrm>
           <a:prstGeom prst="rect">
             <a:avLst/>
           </a:prstGeom>
         </p:spPr>
       </p:pic>
-      <p:sp>
-        <p:nvSpPr>
-          <p:cNvPr id="3" name="Text 0"/>
-          <p:cNvSpPr/>
-          <p:nvPr/>
-        </p:nvSpPr>
-        <p:spPr>
-          <a:xfrm>
-            <a:off x="548640" y="457200"/>
-            <a:ext cx="1828800" cy="365760"/>
-          </a:xfrm>
-          <a:prstGeom prst="rect">
-            <a:avLst/>
-          </a:prstGeom>
-          <a:noFill/>
-          <a:ln/>
-        </p:spPr>
-        <p:txBody>
-          <a:bodyPr wrap="square" lIns="0" tIns="0" rIns="0" bIns="0" rtlCol="0" anchor="ctr"/>
-          <a:lstStyle/>
-          <a:p>
-            <a:pPr indent="0" marL="0">
-              <a:buNone/>
-            </a:pPr>
-            <a:r>
-              <a:rPr lang="en-US" sz="1200" b="1" dirty="0">
-                <a:solidFill>
-                  <a:srgbClr val="000000"/>
-                </a:solidFill>
-                <a:latin typeface="JetBrains Mono" pitchFamily="34" charset="0"/>
-                <a:ea typeface="JetBrains Mono" pitchFamily="34" charset="-122"/>
-                <a:cs typeface="JetBrains Mono" pitchFamily="34" charset="-120"/>
-              </a:rPr>
-              <a:t>report↗</a:t>
-            </a:r>
-            <a:endParaRPr lang="en-US" sz="1200" dirty="0"/>
-          </a:p>
-        </p:txBody>
-      </p:sp>
-      <p:sp>
-        <p:nvSpPr>
-          <p:cNvPr id="4" name="Text 1"/>
-          <p:cNvSpPr/>
-          <p:nvPr/>
-        </p:nvSpPr>
-        <p:spPr>
-          <a:xfrm>
-            <a:off x="548640" y="1371600"/>
-            <a:ext cx="11094415" cy="1097280"/>
-          </a:xfrm>
-          <a:prstGeom prst="rect">
-            <a:avLst/>
-          </a:prstGeom>
-          <a:noFill/>
-          <a:ln/>
-        </p:spPr>
-        <p:txBody>
-          <a:bodyPr wrap="square" lIns="0" tIns="0" rIns="0" bIns="0" rtlCol="0" anchor="ctr"/>
-          <a:lstStyle/>
-          <a:p>
-            <a:pPr indent="0" marL="0">
-              <a:buNone/>
-            </a:pPr>
-            <a:r>
-              <a:rPr lang="en-US" sz="2600" b="1" i="1" dirty="0">
-                <a:solidFill>
-                  <a:srgbClr val="000000"/>
-                </a:solidFill>
-                <a:latin typeface="Libre Baskerville" pitchFamily="34" charset="0"/>
-                <a:ea typeface="Libre Baskerville" pitchFamily="34" charset="-122"/>
-                <a:cs typeface="Libre Baskerville" pitchFamily="34" charset="-120"/>
-              </a:rPr>
-              <a:t>O nosso diferencial: inteligência de mercado, todo mês.</a:t>
-            </a:r>
-            <a:endParaRPr lang="en-US" sz="2600" dirty="0"/>
-          </a:p>
-        </p:txBody>
-      </p:sp>
-      <p:sp>
-        <p:nvSpPr>
-          <p:cNvPr id="5" name="Text 2"/>
-          <p:cNvSpPr/>
-          <p:nvPr/>
-        </p:nvSpPr>
-        <p:spPr>
-          <a:xfrm>
-            <a:off x="548640" y="2560320"/>
-            <a:ext cx="11094415" cy="2377440"/>
-          </a:xfrm>
-          <a:prstGeom prst="rect">
-            <a:avLst/>
-          </a:prstGeom>
-          <a:noFill/>
-          <a:ln/>
-        </p:spPr>
-        <p:txBody>
-          <a:bodyPr wrap="square" lIns="0" tIns="0" rIns="0" bIns="0" rtlCol="0" anchor="t"/>
-          <a:lstStyle/>
-          <a:p>
-            <a:pPr indent="0" marL="0">
-              <a:buNone/>
-            </a:pPr>
-            <a:r>
-              <a:rPr lang="en-US" sz="1500" dirty="0">
-                <a:solidFill>
-                  <a:srgbClr val="222222"/>
-                </a:solidFill>
-                <a:latin typeface="Arial" pitchFamily="34" charset="0"/>
-                <a:ea typeface="Arial" pitchFamily="34" charset="-122"/>
-                <a:cs typeface="Arial" pitchFamily="34" charset="-120"/>
-              </a:rPr>
-              <a:t>Isso que você viu até agora — leitura de tendências de consumo, novidades de plataformas e cases que inspiram — é o nosso .report: um relatório proprietário que produzimos todo mês pra orientar as decisões dos nossos clientes.</a:t>
-            </a:r>
-            <a:endParaRPr lang="en-US" sz="1500" dirty="0"/>
-          </a:p>
-          <a:p>
-            <a:pPr indent="0" marL="0">
-              <a:buNone/>
-            </a:pPr>
-            <a:endParaRPr lang="en-US" sz="1500" dirty="0"/>
-          </a:p>
-          <a:p>
-            <a:pPr indent="0" marL="0">
-              <a:buNone/>
-            </a:pPr>
-            <a:r>
-              <a:rPr lang="en-US" sz="1500" dirty="0">
-                <a:solidFill>
-                  <a:srgbClr val="222222"/>
-                </a:solidFill>
-                <a:latin typeface="Arial" pitchFamily="34" charset="0"/>
-                <a:ea typeface="Arial" pitchFamily="34" charset="-122"/>
-                <a:cs typeface="Arial" pitchFamily="34" charset="-120"/>
-              </a:rPr>
-              <a:t>Quem fecha com a Arpejo não recebe só campanha. Recebe visão de mercado aplicada, com frequência mensal.</a:t>
-            </a:r>
-            <a:endParaRPr lang="en-US" sz="1500" dirty="0"/>
-          </a:p>
-        </p:txBody>
-      </p:sp>
       <p:pic>
         <p:nvPicPr>
-          <p:cNvPr id="6" name="Image 1" descr="/home/user/data-manipulation-exercises/.claude/skills/brand-guidelines/assets/textures/arrow-black.png">    </p:cNvPr>
+          <p:cNvPr id="43" name="Image 1" descr="/home/user/data-manipulation-exercises/.claude/skills/brand-guidelines/assets/textures/arrow-lime.png">    </p:cNvPr>
           <p:cNvPicPr>
             <a:picLocks noChangeAspect="1"/>
           </p:cNvPicPr>
@@ -12874,9 +10617,193 @@
           </a:stretch>
         </p:blipFill>
         <p:spPr>
+          <a:xfrm>
+            <a:off x="11579047" y="320040"/>
+            <a:ext cx="292608" cy="292608"/>
+          </a:xfrm>
+          <a:prstGeom prst="rect">
+            <a:avLst/>
+          </a:prstGeom>
+        </p:spPr>
+      </p:pic>
+      <p:pic>
+        <p:nvPicPr>
+          <p:cNvPr id="44" name="Image 2" descr="/home/user/data-manipulation-exercises/.claude/skills/brand-guidelines/assets/textures/arrow-lime.png">    </p:cNvPr>
+          <p:cNvPicPr>
+            <a:picLocks noChangeAspect="1"/>
+          </p:cNvPicPr>
+          <p:nvPr/>
+        </p:nvPicPr>
+        <p:blipFill>
+          <a:blip r:embed="rId3"/>
+          <a:stretch>
+            <a:fillRect/>
+          </a:stretch>
+        </p:blipFill>
+        <p:spPr>
+          <a:xfrm rot="10800000">
+            <a:off x="320040" y="6245352"/>
+            <a:ext cx="292608" cy="292608"/>
+          </a:xfrm>
+          <a:prstGeom prst="rect">
+            <a:avLst/>
+          </a:prstGeom>
+        </p:spPr>
+      </p:pic>
+      <p:pic>
+        <p:nvPicPr>
+          <p:cNvPr id="45" name="Image 3" descr="/home/user/data-manipulation-exercises/.claude/skills/brand-guidelines/assets/textures/arrow-lime.png">    </p:cNvPr>
+          <p:cNvPicPr>
+            <a:picLocks noChangeAspect="1"/>
+          </p:cNvPicPr>
+          <p:nvPr/>
+        </p:nvPicPr>
+        <p:blipFill>
+          <a:blip r:embed="rId4"/>
+          <a:stretch>
+            <a:fillRect/>
+          </a:stretch>
+        </p:blipFill>
+        <p:spPr>
           <a:xfrm rot="5400000">
-            <a:off x="11277295" y="5943600"/>
+            <a:off x="11579047" y="6245352"/>
             <a:ext cx="292608" cy="292608"/>
+          </a:xfrm>
+          <a:prstGeom prst="rect">
+            <a:avLst/>
+          </a:prstGeom>
+        </p:spPr>
+      </p:pic>
+      <p:sp>
+        <p:nvSpPr>
+          <p:cNvPr id="46" name="Text 40"/>
+          <p:cNvSpPr/>
+          <p:nvPr/>
+        </p:nvSpPr>
+        <p:spPr>
+          <a:xfrm>
+            <a:off x="731520" y="2011680"/>
+            <a:ext cx="10728655" cy="2377440"/>
+          </a:xfrm>
+          <a:prstGeom prst="rect">
+            <a:avLst/>
+          </a:prstGeom>
+          <a:noFill/>
+          <a:ln/>
+        </p:spPr>
+        <p:txBody>
+          <a:bodyPr wrap="square" lIns="0" tIns="0" rIns="0" bIns="0" rtlCol="0" anchor="ctr"/>
+          <a:lstStyle/>
+          <a:p>
+            <a:pPr indent="0" marL="0">
+              <a:buNone/>
+            </a:pPr>
+            <a:r>
+              <a:rPr lang="en-US" sz="3000" b="1" i="1" dirty="0">
+                <a:solidFill>
+                  <a:srgbClr val="FFFFFF"/>
+                </a:solidFill>
+                <a:latin typeface="Libre Baskerville" pitchFamily="34" charset="0"/>
+                <a:ea typeface="Libre Baskerville" pitchFamily="34" charset="-122"/>
+                <a:cs typeface="Libre Baskerville" pitchFamily="34" charset="-120"/>
+              </a:rPr>
+              <a:t>Vamos conversar sobre o que</a:t>
+            </a:r>
+            <a:endParaRPr lang="en-US" sz="3000" dirty="0"/>
+          </a:p>
+          <a:p>
+            <a:pPr indent="0" marL="0">
+              <a:buNone/>
+            </a:pPr>
+            <a:r>
+              <a:rPr lang="en-US" sz="3000" b="1" i="1" dirty="0">
+                <a:solidFill>
+                  <a:srgbClr val="FFFFFF"/>
+                </a:solidFill>
+                <a:latin typeface="Libre Baskerville" pitchFamily="34" charset="0"/>
+                <a:ea typeface="Libre Baskerville" pitchFamily="34" charset="-122"/>
+                <a:cs typeface="Libre Baskerville" pitchFamily="34" charset="-120"/>
+              </a:rPr>
+              <a:t>essas tendências significam</a:t>
+            </a:r>
+            <a:endParaRPr lang="en-US" sz="3000" dirty="0"/>
+          </a:p>
+          <a:p>
+            <a:pPr indent="0" marL="0">
+              <a:buNone/>
+            </a:pPr>
+            <a:r>
+              <a:rPr lang="en-US" sz="3000" b="1" i="1" dirty="0">
+                <a:solidFill>
+                  <a:srgbClr val="FFFFFF"/>
+                </a:solidFill>
+                <a:latin typeface="Libre Baskerville" pitchFamily="34" charset="0"/>
+                <a:ea typeface="Libre Baskerville" pitchFamily="34" charset="-122"/>
+                <a:cs typeface="Libre Baskerville" pitchFamily="34" charset="-120"/>
+              </a:rPr>
+              <a:t>pra sua marca?</a:t>
+            </a:r>
+            <a:endParaRPr lang="en-US" sz="3000" dirty="0"/>
+          </a:p>
+        </p:txBody>
+      </p:sp>
+      <p:sp>
+        <p:nvSpPr>
+          <p:cNvPr id="47" name="Text 41"/>
+          <p:cNvSpPr/>
+          <p:nvPr/>
+        </p:nvSpPr>
+        <p:spPr>
+          <a:xfrm>
+            <a:off x="731520" y="4754880"/>
+            <a:ext cx="7315200" cy="457200"/>
+          </a:xfrm>
+          <a:prstGeom prst="rect">
+            <a:avLst/>
+          </a:prstGeom>
+          <a:noFill/>
+          <a:ln/>
+        </p:spPr>
+        <p:txBody>
+          <a:bodyPr wrap="square" lIns="0" tIns="0" rIns="0" bIns="0" rtlCol="0" anchor="ctr"/>
+          <a:lstStyle/>
+          <a:p>
+            <a:pPr indent="0" marL="0">
+              <a:buNone/>
+            </a:pPr>
+            <a:r>
+              <a:rPr lang="en-US" sz="1300" dirty="0">
+                <a:solidFill>
+                  <a:srgbClr val="DAFF94"/>
+                </a:solidFill>
+                <a:latin typeface="JetBrains Mono" pitchFamily="34" charset="0"/>
+                <a:ea typeface="JetBrains Mono" pitchFamily="34" charset="-122"/>
+                <a:cs typeface="JetBrains Mono" pitchFamily="34" charset="-120"/>
+              </a:rPr>
+              <a:t>fala com a gente → @arpejo</a:t>
+            </a:r>
+            <a:endParaRPr lang="en-US" sz="1300" dirty="0"/>
+          </a:p>
+        </p:txBody>
+      </p:sp>
+      <p:pic>
+        <p:nvPicPr>
+          <p:cNvPr id="48" name="Image 4" descr="/home/user/data-manipulation-exercises/.claude/skills/arpejo-report-desdobramento/assets/arpejo-report-logo.png">    </p:cNvPr>
+          <p:cNvPicPr>
+            <a:picLocks noChangeAspect="1"/>
+          </p:cNvPicPr>
+          <p:nvPr/>
+        </p:nvPicPr>
+        <p:blipFill>
+          <a:blip r:embed="rId5"/>
+          <a:stretch>
+            <a:fillRect/>
+          </a:stretch>
+        </p:blipFill>
+        <p:spPr>
+          <a:xfrm>
+            <a:off x="731520" y="5669280"/>
+            <a:ext cx="2194560" cy="657842"/>
           </a:xfrm>
           <a:prstGeom prst="rect">
             <a:avLst/>

--- a/entregas-agosto26/apresentacao-prospeccao-agosto26.pptx
+++ b/entregas-agosto26/apresentacao-prospeccao-agosto26.pptx
@@ -3090,7 +3090,7 @@
       </p:sp>
       <p:pic>
         <p:nvPicPr>
-          <p:cNvPr id="42" name="Image 0" descr="/home/user/data-manipulation-exercises/.claude/skills/brand-guidelines/assets/textures/globe-black.png">    </p:cNvPr>
+          <p:cNvPr id="42" name="Image 0" descr="/tmp/claude-0/-home-user-data-manipulation-exercises/f19acac8-ccb4-5197-8e49-c3b6029ad477/scratchpad/texture-check/assets/globe-black.png">    </p:cNvPr>
           <p:cNvPicPr>
             <a:picLocks noChangeAspect="1"/>
           </p:cNvPicPr>
@@ -3114,7 +3114,7 @@
       </p:pic>
       <p:pic>
         <p:nvPicPr>
-          <p:cNvPr id="43" name="Image 1" descr="/home/user/data-manipulation-exercises/.claude/skills/arpejo-report-desdobramento/assets/arpejo-report-logo-all-black.png">    </p:cNvPr>
+          <p:cNvPr id="43" name="Image 1" descr="../assets/arpejo-report-logo-all-black.png">    </p:cNvPr>
           <p:cNvPicPr>
             <a:picLocks noChangeAspect="1"/>
           </p:cNvPicPr>
@@ -3177,7 +3177,7 @@
       </p:sp>
       <p:pic>
         <p:nvPicPr>
-          <p:cNvPr id="45" name="Image 2" descr="/home/user/data-manipulation-exercises/.claude/skills/brand-guidelines/assets/textures/arrow-black.png">    </p:cNvPr>
+          <p:cNvPr id="45" name="Image 2" descr="/tmp/claude-0/-home-user-data-manipulation-exercises/f19acac8-ccb4-5197-8e49-c3b6029ad477/scratchpad/texture-check/assets/arrow-black.png">    </p:cNvPr>
           <p:cNvPicPr>
             <a:picLocks noChangeAspect="1"/>
           </p:cNvPicPr>
@@ -3948,7 +3948,7 @@
       </p:sp>
       <p:pic>
         <p:nvPicPr>
-          <p:cNvPr id="8" name="Image 0" descr="/home/user/data-manipulation-exercises/.claude/skills/brand-guidelines/assets/textures/globe-black.png">    </p:cNvPr>
+          <p:cNvPr id="8" name="Image 0" descr="/tmp/claude-0/-home-user-data-manipulation-exercises/f19acac8-ccb4-5197-8e49-c3b6029ad477/scratchpad/texture-check/assets/globe-black.png">    </p:cNvPr>
           <p:cNvPicPr>
             <a:picLocks noChangeAspect="1"/>
           </p:cNvPicPr>
@@ -4523,7 +4523,7 @@
       </p:sp>
       <p:pic>
         <p:nvPicPr>
-          <p:cNvPr id="8" name="Image 0" descr="/home/user/data-manipulation-exercises/.claude/skills/brand-guidelines/assets/textures/globe-lime.png">    </p:cNvPr>
+          <p:cNvPr id="8" name="Image 0" descr="/tmp/claude-0/-home-user-data-manipulation-exercises/f19acac8-ccb4-5197-8e49-c3b6029ad477/scratchpad/texture-check/assets/globe-lime.png">    </p:cNvPr>
           <p:cNvPicPr>
             <a:picLocks noChangeAspect="1"/>
           </p:cNvPicPr>
@@ -8800,7 +8800,7 @@
       </p:grpSpPr>
       <p:pic>
         <p:nvPicPr>
-          <p:cNvPr id="2" name="Image 0" descr="/home/user/data-manipulation-exercises/.claude/skills/brand-guidelines/assets/textures/globe-black.png">    </p:cNvPr>
+          <p:cNvPr id="2" name="Image 0" descr="/tmp/claude-0/-home-user-data-manipulation-exercises/f19acac8-ccb4-5197-8e49-c3b6029ad477/scratchpad/texture-check/assets/globe-black.png">    </p:cNvPr>
           <p:cNvPicPr>
             <a:picLocks noChangeAspect="1"/>
           </p:cNvPicPr>
@@ -8863,32 +8863,54 @@
       </p:sp>
       <p:sp>
         <p:nvSpPr>
-          <p:cNvPr id="4" name="Text 1"/>
-          <p:cNvSpPr/>
-          <p:nvPr/>
-        </p:nvSpPr>
-        <p:spPr>
-          <a:xfrm>
-            <a:off x="548640" y="1371600"/>
-            <a:ext cx="11094415" cy="1097280"/>
-          </a:xfrm>
-          <a:prstGeom prst="rect">
-            <a:avLst/>
-          </a:prstGeom>
-          <a:noFill/>
-          <a:ln/>
-        </p:spPr>
-        <p:txBody>
-          <a:bodyPr wrap="square" lIns="0" tIns="0" rIns="0" bIns="0" rtlCol="0" anchor="ctr"/>
+          <p:cNvPr id="4" name="Shape 1"/>
+          <p:cNvSpPr/>
+          <p:nvPr/>
+        </p:nvSpPr>
+        <p:spPr>
+          <a:xfrm>
+            <a:off x="548640" y="1143000"/>
+            <a:ext cx="11094415" cy="5257800"/>
+          </a:xfrm>
+          <a:prstGeom prst="roundRect">
+            <a:avLst>
+              <a:gd name="adj" fmla="val 3478"/>
+            </a:avLst>
+          </a:prstGeom>
+          <a:solidFill>
+            <a:srgbClr val="000000"/>
+          </a:solidFill>
+          <a:ln/>
+        </p:spPr>
+      </p:sp>
+      <p:sp>
+        <p:nvSpPr>
+          <p:cNvPr id="5" name="Text 2"/>
+          <p:cNvSpPr/>
+          <p:nvPr/>
+        </p:nvSpPr>
+        <p:spPr>
+          <a:xfrm>
+            <a:off x="960120" y="1508760"/>
+            <a:ext cx="5090008" cy="1371600"/>
+          </a:xfrm>
+          <a:prstGeom prst="rect">
+            <a:avLst/>
+          </a:prstGeom>
+          <a:noFill/>
+          <a:ln/>
+        </p:spPr>
+        <p:txBody>
+          <a:bodyPr wrap="square" lIns="0" tIns="0" rIns="0" bIns="0" rtlCol="0" anchor="t"/>
           <a:lstStyle/>
           <a:p>
             <a:pPr indent="0" marL="0">
               <a:buNone/>
             </a:pPr>
             <a:r>
-              <a:rPr lang="en-US" sz="2600" b="1" i="1" dirty="0">
-                <a:solidFill>
-                  <a:srgbClr val="000000"/>
+              <a:rPr lang="en-US" sz="2200" b="1" i="1" dirty="0">
+                <a:solidFill>
+                  <a:srgbClr val="DAFF94"/>
                 </a:solidFill>
                 <a:latin typeface="Libre Baskerville" pitchFamily="34" charset="0"/>
                 <a:ea typeface="Libre Baskerville" pitchFamily="34" charset="-122"/>
@@ -8896,20 +8918,20 @@
               </a:rPr>
               <a:t>O nosso diferencial: inteligência de mercado, todo mês.</a:t>
             </a:r>
-            <a:endParaRPr lang="en-US" sz="2600" dirty="0"/>
-          </a:p>
-        </p:txBody>
-      </p:sp>
-      <p:sp>
-        <p:nvSpPr>
-          <p:cNvPr id="5" name="Text 2"/>
-          <p:cNvSpPr/>
-          <p:nvPr/>
-        </p:nvSpPr>
-        <p:spPr>
-          <a:xfrm>
-            <a:off x="548640" y="2560320"/>
-            <a:ext cx="11094415" cy="2377440"/>
+            <a:endParaRPr lang="en-US" sz="2200" dirty="0"/>
+          </a:p>
+        </p:txBody>
+      </p:sp>
+      <p:sp>
+        <p:nvSpPr>
+          <p:cNvPr id="6" name="Text 3"/>
+          <p:cNvSpPr/>
+          <p:nvPr/>
+        </p:nvSpPr>
+        <p:spPr>
+          <a:xfrm>
+            <a:off x="960120" y="2971800"/>
+            <a:ext cx="5090008" cy="2743200"/>
           </a:xfrm>
           <a:prstGeom prst="rect">
             <a:avLst/>
@@ -8925,9 +8947,9 @@
               <a:buNone/>
             </a:pPr>
             <a:r>
-              <a:rPr lang="en-US" sz="1500" dirty="0">
-                <a:solidFill>
-                  <a:srgbClr val="222222"/>
+              <a:rPr lang="en-US" sz="1350" dirty="0">
+                <a:solidFill>
+                  <a:srgbClr val="FFFFFF"/>
                 </a:solidFill>
                 <a:latin typeface="Arial" pitchFamily="34" charset="0"/>
                 <a:ea typeface="Arial" pitchFamily="34" charset="-122"/>
@@ -8935,22 +8957,22 @@
               </a:rPr>
               <a:t>Isso que você viu até agora — leitura de tendências de consumo, novidades de plataformas e cases que inspiram — é o nosso .report: um relatório proprietário que produzimos todo mês pra orientar as decisões dos nossos clientes.</a:t>
             </a:r>
-            <a:endParaRPr lang="en-US" sz="1500" dirty="0"/>
+            <a:endParaRPr lang="en-US" sz="1350" dirty="0"/>
           </a:p>
           <a:p>
             <a:pPr indent="0" marL="0">
               <a:buNone/>
             </a:pPr>
-            <a:endParaRPr lang="en-US" sz="1500" dirty="0"/>
+            <a:endParaRPr lang="en-US" sz="1350" dirty="0"/>
           </a:p>
           <a:p>
             <a:pPr indent="0" marL="0">
               <a:buNone/>
             </a:pPr>
             <a:r>
-              <a:rPr lang="en-US" sz="1500" dirty="0">
-                <a:solidFill>
-                  <a:srgbClr val="222222"/>
+              <a:rPr lang="en-US" sz="1350" dirty="0">
+                <a:solidFill>
+                  <a:srgbClr val="FFFFFF"/>
                 </a:solidFill>
                 <a:latin typeface="Arial" pitchFamily="34" charset="0"/>
                 <a:ea typeface="Arial" pitchFamily="34" charset="-122"/>
@@ -8958,13 +8980,13 @@
               </a:rPr>
               <a:t>Quem fecha com a Arpejo não recebe só campanha. Recebe visão de mercado aplicada, com frequência mensal.</a:t>
             </a:r>
-            <a:endParaRPr lang="en-US" sz="1500" dirty="0"/>
+            <a:endParaRPr lang="en-US" sz="1350" dirty="0"/>
           </a:p>
         </p:txBody>
       </p:sp>
       <p:pic>
         <p:nvPicPr>
-          <p:cNvPr id="6" name="Image 1" descr="/home/user/data-manipulation-exercises/.claude/skills/brand-guidelines/assets/textures/arrow-black.png">    </p:cNvPr>
+          <p:cNvPr id="7" name="Image 1" descr="/tmp/claude-0/-home-user-data-manipulation-exercises/f19acac8-ccb4-5197-8e49-c3b6029ad477/scratchpad/report-images/final/prospect-diferencial.jpg">    </p:cNvPr>
           <p:cNvPicPr>
             <a:picLocks noChangeAspect="1"/>
           </p:cNvPicPr>
@@ -8972,6 +8994,29 @@
         </p:nvPicPr>
         <p:blipFill>
           <a:blip r:embed="rId2"/>
+          <a:srcRect l="0" r="0" t="0" b="0"/>
+          <a:stretch/>
+        </p:blipFill>
+        <p:spPr>
+          <a:xfrm>
+            <a:off x="6461608" y="1463040"/>
+            <a:ext cx="4861408" cy="4617720"/>
+          </a:xfrm>
+          <a:prstGeom prst="rect">
+            <a:avLst/>
+          </a:prstGeom>
+        </p:spPr>
+      </p:pic>
+      <p:pic>
+        <p:nvPicPr>
+          <p:cNvPr id="8" name="Image 2" descr="/tmp/claude-0/-home-user-data-manipulation-exercises/f19acac8-ccb4-5197-8e49-c3b6029ad477/scratchpad/texture-check/assets/arrow-black.png">    </p:cNvPr>
+          <p:cNvPicPr>
+            <a:picLocks noChangeAspect="1"/>
+          </p:cNvPicPr>
+          <p:nvPr/>
+        </p:nvPicPr>
+        <p:blipFill>
+          <a:blip r:embed="rId3"/>
           <a:stretch>
             <a:fillRect/>
           </a:stretch>
@@ -10580,7 +10625,7 @@
       </p:sp>
       <p:pic>
         <p:nvPicPr>
-          <p:cNvPr id="42" name="Image 0" descr="/home/user/data-manipulation-exercises/.claude/skills/brand-guidelines/assets/textures/arrow-lime.png">    </p:cNvPr>
+          <p:cNvPr id="42" name="Image 0" descr="/tmp/claude-0/-home-user-data-manipulation-exercises/f19acac8-ccb4-5197-8e49-c3b6029ad477/scratchpad/texture-check/assets/arrow-lime.png">    </p:cNvPr>
           <p:cNvPicPr>
             <a:picLocks noChangeAspect="1"/>
           </p:cNvPicPr>
@@ -10604,7 +10649,7 @@
       </p:pic>
       <p:pic>
         <p:nvPicPr>
-          <p:cNvPr id="43" name="Image 1" descr="/home/user/data-manipulation-exercises/.claude/skills/brand-guidelines/assets/textures/arrow-lime.png">    </p:cNvPr>
+          <p:cNvPr id="43" name="Image 1" descr="/tmp/claude-0/-home-user-data-manipulation-exercises/f19acac8-ccb4-5197-8e49-c3b6029ad477/scratchpad/texture-check/assets/arrow-lime.png">    </p:cNvPr>
           <p:cNvPicPr>
             <a:picLocks noChangeAspect="1"/>
           </p:cNvPicPr>
@@ -10628,7 +10673,7 @@
       </p:pic>
       <p:pic>
         <p:nvPicPr>
-          <p:cNvPr id="44" name="Image 2" descr="/home/user/data-manipulation-exercises/.claude/skills/brand-guidelines/assets/textures/arrow-lime.png">    </p:cNvPr>
+          <p:cNvPr id="44" name="Image 2" descr="/tmp/claude-0/-home-user-data-manipulation-exercises/f19acac8-ccb4-5197-8e49-c3b6029ad477/scratchpad/texture-check/assets/arrow-lime.png">    </p:cNvPr>
           <p:cNvPicPr>
             <a:picLocks noChangeAspect="1"/>
           </p:cNvPicPr>
@@ -10652,7 +10697,7 @@
       </p:pic>
       <p:pic>
         <p:nvPicPr>
-          <p:cNvPr id="45" name="Image 3" descr="/home/user/data-manipulation-exercises/.claude/skills/brand-guidelines/assets/textures/arrow-lime.png">    </p:cNvPr>
+          <p:cNvPr id="45" name="Image 3" descr="/tmp/claude-0/-home-user-data-manipulation-exercises/f19acac8-ccb4-5197-8e49-c3b6029ad477/scratchpad/texture-check/assets/arrow-lime.png">    </p:cNvPr>
           <p:cNvPicPr>
             <a:picLocks noChangeAspect="1"/>
           </p:cNvPicPr>
@@ -10788,7 +10833,7 @@
       </p:sp>
       <p:pic>
         <p:nvPicPr>
-          <p:cNvPr id="48" name="Image 4" descr="/home/user/data-manipulation-exercises/.claude/skills/arpejo-report-desdobramento/assets/arpejo-report-logo.png">    </p:cNvPr>
+          <p:cNvPr id="48" name="Image 4" descr="../assets/arpejo-report-logo-all-black.png">    </p:cNvPr>
           <p:cNvPicPr>
             <a:picLocks noChangeAspect="1"/>
           </p:cNvPicPr>

--- a/entregas-agosto26/apresentacao-prospeccao-agosto26.pptx
+++ b/entregas-agosto26/apresentacao-prospeccao-agosto26.pptx
@@ -4242,7 +4242,7 @@
         </p:nvPicPr>
         <p:blipFill>
           <a:blip r:embed="rId2"/>
-          <a:srcRect l="0" r="0" t="0" b="0"/>
+          <a:srcRect l="15170" r="15170" t="0" b="0"/>
           <a:stretch/>
         </p:blipFill>
         <p:spPr>
@@ -4817,7 +4817,7 @@
         </p:nvPicPr>
         <p:blipFill>
           <a:blip r:embed="rId2"/>
-          <a:srcRect l="0" r="0" t="0" b="0"/>
+          <a:srcRect l="3113" r="3113" t="0" b="0"/>
           <a:stretch/>
         </p:blipFill>
         <p:spPr>
@@ -8994,7 +8994,7 @@
         </p:nvPicPr>
         <p:blipFill>
           <a:blip r:embed="rId2"/>
-          <a:srcRect l="0" r="0" t="0" b="0"/>
+          <a:srcRect l="15127" r="15127" t="0" b="0"/>
           <a:stretch/>
         </p:blipFill>
         <p:spPr>
